--- a/output/课堂演示.pptx
+++ b/output/课堂演示.pptx
@@ -17,9 +17,14 @@
     <p:sldId id="265" r:id="rId11"/>
     <p:sldId id="266" r:id="rId12"/>
     <p:sldId id="267" r:id="rId13"/>
+    <p:sldId id="268" r:id="rId14"/>
+    <p:sldId id="269" r:id="rId15"/>
+    <p:sldId id="270" r:id="rId16"/>
+    <p:sldId id="271" r:id="rId17"/>
+    <p:sldId id="272" r:id="rId18"/>
   </p:sldIdLst>
   <p:notesMasterIdLst>
-    <p:notesMasterId r:id="rId14"/>
+    <p:notesMasterId r:id="rId19"/>
   </p:notesMasterIdLst>
   <p:sldSz cx="9144000" cy="5143500"/>
   <p:notesSz cx="5143500" cy="9144000"/>
@@ -801,6 +806,446 @@
             <a:fld id="{F7021451-1387-4CA6-816F-3879F97B5CBC}" type="slidenum">
               <a:rPr lang="en-US"/>
               <a:t>12</a:t>
+            </a:fld>
+            <a:endParaRPr lang="en-US"/>
+          </a:p>
+        </p:txBody>
+      </p:sp>
+    </p:spTree>
+    <p:extLst>
+      <p:ext uri="{BB962C8B-B14F-4D97-AF65-F5344CB8AC3E}">
+        <p14:creationId xmlns:p14="http://schemas.microsoft.com/office/powerpoint/2010/main" val="1024086991"/>
+      </p:ext>
+    </p:extLst>
+  </p:cSld>
+  <p:clrMapOvr>
+    <a:masterClrMapping/>
+  </p:clrMapOvr>
+</p:notes>
+</file>
+
+<file path=ppt/notesSlides/notesSlide13.xml><?xml version="1.0" encoding="utf-8"?>
+<p:notes xmlns:a="http://schemas.openxmlformats.org/drawingml/2006/main" xmlns:r="http://schemas.openxmlformats.org/officeDocument/2006/relationships" xmlns:p="http://schemas.openxmlformats.org/presentationml/2006/main">
+  <p:cSld>
+    <p:spTree>
+      <p:nvGrpSpPr>
+        <p:cNvPr id="1" name=""/>
+        <p:cNvGrpSpPr/>
+        <p:nvPr/>
+      </p:nvGrpSpPr>
+      <p:grpSpPr>
+        <a:xfrm>
+          <a:off x="0" y="0"/>
+          <a:ext cx="0" cy="0"/>
+          <a:chOff x="0" y="0"/>
+          <a:chExt cx="0" cy="0"/>
+        </a:xfrm>
+      </p:grpSpPr>
+      <p:sp>
+        <p:nvSpPr>
+          <p:cNvPr id="2" name="Slide Image Placeholder 1"/>
+          <p:cNvSpPr>
+            <a:spLocks noGrp="1" noRot="1" noChangeAspect="1"/>
+          </p:cNvSpPr>
+          <p:nvPr>
+            <p:ph type="sldImg"/>
+          </p:nvPr>
+        </p:nvSpPr>
+        <p:spPr/>
+      </p:sp>
+      <p:sp>
+        <p:nvSpPr>
+          <p:cNvPr id="3" name="Notes Placeholder 2"/>
+          <p:cNvSpPr>
+            <a:spLocks noGrp="1"/>
+          </p:cNvSpPr>
+          <p:nvPr>
+            <p:ph type="body" idx="1"/>
+          </p:nvPr>
+        </p:nvSpPr>
+        <p:spPr/>
+        <p:txBody>
+          <a:bodyPr/>
+          <a:lstStyle/>
+          <a:p>
+            <a:r>
+              <a:rPr lang="en-US" dirty="0"/>
+              <a:t/>
+            </a:r>
+            <a:endParaRPr lang="en-US" dirty="0"/>
+          </a:p>
+        </p:txBody>
+      </p:sp>
+      <p:sp>
+        <p:nvSpPr>
+          <p:cNvPr id="4" name="Slide Number Placeholder 3"/>
+          <p:cNvSpPr>
+            <a:spLocks noGrp="1"/>
+          </p:cNvSpPr>
+          <p:nvPr>
+            <p:ph type="sldNum" sz="quarter" idx="10"/>
+          </p:nvPr>
+        </p:nvSpPr>
+        <p:spPr/>
+        <p:txBody>
+          <a:bodyPr/>
+          <a:lstStyle/>
+          <a:p>
+            <a:fld id="{F7021451-1387-4CA6-816F-3879F97B5CBC}" type="slidenum">
+              <a:rPr lang="en-US"/>
+              <a:t>13</a:t>
+            </a:fld>
+            <a:endParaRPr lang="en-US"/>
+          </a:p>
+        </p:txBody>
+      </p:sp>
+    </p:spTree>
+    <p:extLst>
+      <p:ext uri="{BB962C8B-B14F-4D97-AF65-F5344CB8AC3E}">
+        <p14:creationId xmlns:p14="http://schemas.microsoft.com/office/powerpoint/2010/main" val="1024086991"/>
+      </p:ext>
+    </p:extLst>
+  </p:cSld>
+  <p:clrMapOvr>
+    <a:masterClrMapping/>
+  </p:clrMapOvr>
+</p:notes>
+</file>
+
+<file path=ppt/notesSlides/notesSlide14.xml><?xml version="1.0" encoding="utf-8"?>
+<p:notes xmlns:a="http://schemas.openxmlformats.org/drawingml/2006/main" xmlns:r="http://schemas.openxmlformats.org/officeDocument/2006/relationships" xmlns:p="http://schemas.openxmlformats.org/presentationml/2006/main">
+  <p:cSld>
+    <p:spTree>
+      <p:nvGrpSpPr>
+        <p:cNvPr id="1" name=""/>
+        <p:cNvGrpSpPr/>
+        <p:nvPr/>
+      </p:nvGrpSpPr>
+      <p:grpSpPr>
+        <a:xfrm>
+          <a:off x="0" y="0"/>
+          <a:ext cx="0" cy="0"/>
+          <a:chOff x="0" y="0"/>
+          <a:chExt cx="0" cy="0"/>
+        </a:xfrm>
+      </p:grpSpPr>
+      <p:sp>
+        <p:nvSpPr>
+          <p:cNvPr id="2" name="Slide Image Placeholder 1"/>
+          <p:cNvSpPr>
+            <a:spLocks noGrp="1" noRot="1" noChangeAspect="1"/>
+          </p:cNvSpPr>
+          <p:nvPr>
+            <p:ph type="sldImg"/>
+          </p:nvPr>
+        </p:nvSpPr>
+        <p:spPr/>
+      </p:sp>
+      <p:sp>
+        <p:nvSpPr>
+          <p:cNvPr id="3" name="Notes Placeholder 2"/>
+          <p:cNvSpPr>
+            <a:spLocks noGrp="1"/>
+          </p:cNvSpPr>
+          <p:nvPr>
+            <p:ph type="body" idx="1"/>
+          </p:nvPr>
+        </p:nvSpPr>
+        <p:spPr/>
+        <p:txBody>
+          <a:bodyPr/>
+          <a:lstStyle/>
+          <a:p>
+            <a:r>
+              <a:rPr lang="en-US" dirty="0"/>
+              <a:t/>
+            </a:r>
+            <a:endParaRPr lang="en-US" dirty="0"/>
+          </a:p>
+        </p:txBody>
+      </p:sp>
+      <p:sp>
+        <p:nvSpPr>
+          <p:cNvPr id="4" name="Slide Number Placeholder 3"/>
+          <p:cNvSpPr>
+            <a:spLocks noGrp="1"/>
+          </p:cNvSpPr>
+          <p:nvPr>
+            <p:ph type="sldNum" sz="quarter" idx="10"/>
+          </p:nvPr>
+        </p:nvSpPr>
+        <p:spPr/>
+        <p:txBody>
+          <a:bodyPr/>
+          <a:lstStyle/>
+          <a:p>
+            <a:fld id="{F7021451-1387-4CA6-816F-3879F97B5CBC}" type="slidenum">
+              <a:rPr lang="en-US"/>
+              <a:t>14</a:t>
+            </a:fld>
+            <a:endParaRPr lang="en-US"/>
+          </a:p>
+        </p:txBody>
+      </p:sp>
+    </p:spTree>
+    <p:extLst>
+      <p:ext uri="{BB962C8B-B14F-4D97-AF65-F5344CB8AC3E}">
+        <p14:creationId xmlns:p14="http://schemas.microsoft.com/office/powerpoint/2010/main" val="1024086991"/>
+      </p:ext>
+    </p:extLst>
+  </p:cSld>
+  <p:clrMapOvr>
+    <a:masterClrMapping/>
+  </p:clrMapOvr>
+</p:notes>
+</file>
+
+<file path=ppt/notesSlides/notesSlide15.xml><?xml version="1.0" encoding="utf-8"?>
+<p:notes xmlns:a="http://schemas.openxmlformats.org/drawingml/2006/main" xmlns:r="http://schemas.openxmlformats.org/officeDocument/2006/relationships" xmlns:p="http://schemas.openxmlformats.org/presentationml/2006/main">
+  <p:cSld>
+    <p:spTree>
+      <p:nvGrpSpPr>
+        <p:cNvPr id="1" name=""/>
+        <p:cNvGrpSpPr/>
+        <p:nvPr/>
+      </p:nvGrpSpPr>
+      <p:grpSpPr>
+        <a:xfrm>
+          <a:off x="0" y="0"/>
+          <a:ext cx="0" cy="0"/>
+          <a:chOff x="0" y="0"/>
+          <a:chExt cx="0" cy="0"/>
+        </a:xfrm>
+      </p:grpSpPr>
+      <p:sp>
+        <p:nvSpPr>
+          <p:cNvPr id="2" name="Slide Image Placeholder 1"/>
+          <p:cNvSpPr>
+            <a:spLocks noGrp="1" noRot="1" noChangeAspect="1"/>
+          </p:cNvSpPr>
+          <p:nvPr>
+            <p:ph type="sldImg"/>
+          </p:nvPr>
+        </p:nvSpPr>
+        <p:spPr/>
+      </p:sp>
+      <p:sp>
+        <p:nvSpPr>
+          <p:cNvPr id="3" name="Notes Placeholder 2"/>
+          <p:cNvSpPr>
+            <a:spLocks noGrp="1"/>
+          </p:cNvSpPr>
+          <p:nvPr>
+            <p:ph type="body" idx="1"/>
+          </p:nvPr>
+        </p:nvSpPr>
+        <p:spPr/>
+        <p:txBody>
+          <a:bodyPr/>
+          <a:lstStyle/>
+          <a:p>
+            <a:r>
+              <a:rPr lang="en-US" dirty="0"/>
+              <a:t/>
+            </a:r>
+            <a:endParaRPr lang="en-US" dirty="0"/>
+          </a:p>
+        </p:txBody>
+      </p:sp>
+      <p:sp>
+        <p:nvSpPr>
+          <p:cNvPr id="4" name="Slide Number Placeholder 3"/>
+          <p:cNvSpPr>
+            <a:spLocks noGrp="1"/>
+          </p:cNvSpPr>
+          <p:nvPr>
+            <p:ph type="sldNum" sz="quarter" idx="10"/>
+          </p:nvPr>
+        </p:nvSpPr>
+        <p:spPr/>
+        <p:txBody>
+          <a:bodyPr/>
+          <a:lstStyle/>
+          <a:p>
+            <a:fld id="{F7021451-1387-4CA6-816F-3879F97B5CBC}" type="slidenum">
+              <a:rPr lang="en-US"/>
+              <a:t>15</a:t>
+            </a:fld>
+            <a:endParaRPr lang="en-US"/>
+          </a:p>
+        </p:txBody>
+      </p:sp>
+    </p:spTree>
+    <p:extLst>
+      <p:ext uri="{BB962C8B-B14F-4D97-AF65-F5344CB8AC3E}">
+        <p14:creationId xmlns:p14="http://schemas.microsoft.com/office/powerpoint/2010/main" val="1024086991"/>
+      </p:ext>
+    </p:extLst>
+  </p:cSld>
+  <p:clrMapOvr>
+    <a:masterClrMapping/>
+  </p:clrMapOvr>
+</p:notes>
+</file>
+
+<file path=ppt/notesSlides/notesSlide16.xml><?xml version="1.0" encoding="utf-8"?>
+<p:notes xmlns:a="http://schemas.openxmlformats.org/drawingml/2006/main" xmlns:r="http://schemas.openxmlformats.org/officeDocument/2006/relationships" xmlns:p="http://schemas.openxmlformats.org/presentationml/2006/main">
+  <p:cSld>
+    <p:spTree>
+      <p:nvGrpSpPr>
+        <p:cNvPr id="1" name=""/>
+        <p:cNvGrpSpPr/>
+        <p:nvPr/>
+      </p:nvGrpSpPr>
+      <p:grpSpPr>
+        <a:xfrm>
+          <a:off x="0" y="0"/>
+          <a:ext cx="0" cy="0"/>
+          <a:chOff x="0" y="0"/>
+          <a:chExt cx="0" cy="0"/>
+        </a:xfrm>
+      </p:grpSpPr>
+      <p:sp>
+        <p:nvSpPr>
+          <p:cNvPr id="2" name="Slide Image Placeholder 1"/>
+          <p:cNvSpPr>
+            <a:spLocks noGrp="1" noRot="1" noChangeAspect="1"/>
+          </p:cNvSpPr>
+          <p:nvPr>
+            <p:ph type="sldImg"/>
+          </p:nvPr>
+        </p:nvSpPr>
+        <p:spPr/>
+      </p:sp>
+      <p:sp>
+        <p:nvSpPr>
+          <p:cNvPr id="3" name="Notes Placeholder 2"/>
+          <p:cNvSpPr>
+            <a:spLocks noGrp="1"/>
+          </p:cNvSpPr>
+          <p:nvPr>
+            <p:ph type="body" idx="1"/>
+          </p:nvPr>
+        </p:nvSpPr>
+        <p:spPr/>
+        <p:txBody>
+          <a:bodyPr/>
+          <a:lstStyle/>
+          <a:p>
+            <a:r>
+              <a:rPr lang="en-US" dirty="0"/>
+              <a:t/>
+            </a:r>
+            <a:endParaRPr lang="en-US" dirty="0"/>
+          </a:p>
+        </p:txBody>
+      </p:sp>
+      <p:sp>
+        <p:nvSpPr>
+          <p:cNvPr id="4" name="Slide Number Placeholder 3"/>
+          <p:cNvSpPr>
+            <a:spLocks noGrp="1"/>
+          </p:cNvSpPr>
+          <p:nvPr>
+            <p:ph type="sldNum" sz="quarter" idx="10"/>
+          </p:nvPr>
+        </p:nvSpPr>
+        <p:spPr/>
+        <p:txBody>
+          <a:bodyPr/>
+          <a:lstStyle/>
+          <a:p>
+            <a:fld id="{F7021451-1387-4CA6-816F-3879F97B5CBC}" type="slidenum">
+              <a:rPr lang="en-US"/>
+              <a:t>16</a:t>
+            </a:fld>
+            <a:endParaRPr lang="en-US"/>
+          </a:p>
+        </p:txBody>
+      </p:sp>
+    </p:spTree>
+    <p:extLst>
+      <p:ext uri="{BB962C8B-B14F-4D97-AF65-F5344CB8AC3E}">
+        <p14:creationId xmlns:p14="http://schemas.microsoft.com/office/powerpoint/2010/main" val="1024086991"/>
+      </p:ext>
+    </p:extLst>
+  </p:cSld>
+  <p:clrMapOvr>
+    <a:masterClrMapping/>
+  </p:clrMapOvr>
+</p:notes>
+</file>
+
+<file path=ppt/notesSlides/notesSlide17.xml><?xml version="1.0" encoding="utf-8"?>
+<p:notes xmlns:a="http://schemas.openxmlformats.org/drawingml/2006/main" xmlns:r="http://schemas.openxmlformats.org/officeDocument/2006/relationships" xmlns:p="http://schemas.openxmlformats.org/presentationml/2006/main">
+  <p:cSld>
+    <p:spTree>
+      <p:nvGrpSpPr>
+        <p:cNvPr id="1" name=""/>
+        <p:cNvGrpSpPr/>
+        <p:nvPr/>
+      </p:nvGrpSpPr>
+      <p:grpSpPr>
+        <a:xfrm>
+          <a:off x="0" y="0"/>
+          <a:ext cx="0" cy="0"/>
+          <a:chOff x="0" y="0"/>
+          <a:chExt cx="0" cy="0"/>
+        </a:xfrm>
+      </p:grpSpPr>
+      <p:sp>
+        <p:nvSpPr>
+          <p:cNvPr id="2" name="Slide Image Placeholder 1"/>
+          <p:cNvSpPr>
+            <a:spLocks noGrp="1" noRot="1" noChangeAspect="1"/>
+          </p:cNvSpPr>
+          <p:nvPr>
+            <p:ph type="sldImg"/>
+          </p:nvPr>
+        </p:nvSpPr>
+        <p:spPr/>
+      </p:sp>
+      <p:sp>
+        <p:nvSpPr>
+          <p:cNvPr id="3" name="Notes Placeholder 2"/>
+          <p:cNvSpPr>
+            <a:spLocks noGrp="1"/>
+          </p:cNvSpPr>
+          <p:nvPr>
+            <p:ph type="body" idx="1"/>
+          </p:nvPr>
+        </p:nvSpPr>
+        <p:spPr/>
+        <p:txBody>
+          <a:bodyPr/>
+          <a:lstStyle/>
+          <a:p>
+            <a:r>
+              <a:rPr lang="en-US" dirty="0"/>
+              <a:t/>
+            </a:r>
+            <a:endParaRPr lang="en-US" dirty="0"/>
+          </a:p>
+        </p:txBody>
+      </p:sp>
+      <p:sp>
+        <p:nvSpPr>
+          <p:cNvPr id="4" name="Slide Number Placeholder 3"/>
+          <p:cNvSpPr>
+            <a:spLocks noGrp="1"/>
+          </p:cNvSpPr>
+          <p:nvPr>
+            <p:ph type="sldNum" sz="quarter" idx="10"/>
+          </p:nvPr>
+        </p:nvSpPr>
+        <p:spPr/>
+        <p:txBody>
+          <a:bodyPr/>
+          <a:lstStyle/>
+          <a:p>
+            <a:fld id="{F7021451-1387-4CA6-816F-3879F97B5CBC}" type="slidenum">
+              <a:rPr lang="en-US"/>
+              <a:t>17</a:t>
             </a:fld>
             <a:endParaRPr lang="en-US"/>
           </a:p>
@@ -2005,7 +2450,7 @@
             <a:r>
               <a:rPr lang="en-US" sz="1300" dirty="0">
                 <a:solidFill>
-                  <a:srgbClr val="64748B"/>
+                  <a:srgbClr val="94A3B8"/>
                 </a:solidFill>
                 <a:latin typeface="Microsoft YaHei" pitchFamily="34" charset="0"/>
                 <a:ea typeface="Microsoft YaHei" pitchFamily="34" charset="-122"/>
@@ -2025,7 +2470,7 @@
             <a:r>
               <a:rPr lang="en-US" sz="1300" dirty="0">
                 <a:solidFill>
-                  <a:srgbClr val="64748B"/>
+                  <a:srgbClr val="94A3B8"/>
                 </a:solidFill>
                 <a:latin typeface="Microsoft YaHei" pitchFamily="34" charset="0"/>
                 <a:ea typeface="Microsoft YaHei" pitchFamily="34" charset="-122"/>
@@ -2102,7 +2547,7 @@
                 <a:ea typeface="Microsoft YaHei" pitchFamily="34" charset="-122"/>
                 <a:cs typeface="Microsoft YaHei" pitchFamily="34" charset="-120"/>
               </a:rPr>
-              <a:t>结果⑦：时序演变与回归诊断检验</a:t>
+              <a:t>发现五：统计检验 — 显著性验证</a:t>
             </a:r>
             <a:endParaRPr lang="en-US" sz="2400" dirty="0"/>
           </a:p>
@@ -2144,48 +2589,44 @@
         </p:blipFill>
         <p:spPr>
           <a:xfrm>
-            <a:off x="91440" y="822960"/>
-            <a:ext cx="4297680" cy="3200400"/>
+            <a:off x="91440" y="914400"/>
+            <a:ext cx="4206240" cy="3474720"/>
           </a:xfrm>
           <a:prstGeom prst="rect">
             <a:avLst/>
           </a:prstGeom>
         </p:spPr>
       </p:pic>
-      <p:pic>
-        <p:nvPicPr>
-          <p:cNvPr id="5" name="Image 1" descr="preencoded.png">    </p:cNvPr>
-          <p:cNvPicPr>
-            <a:picLocks noChangeAspect="1"/>
-          </p:cNvPicPr>
-          <p:nvPr/>
-        </p:nvPicPr>
-        <p:blipFill>
-          <a:blip r:embed="rId2"/>
-          <a:stretch>
-            <a:fillRect/>
-          </a:stretch>
-        </p:blipFill>
-        <p:spPr>
-          <a:xfrm>
-            <a:off x="4663440" y="822960"/>
-            <a:ext cx="4297680" cy="3200400"/>
-          </a:xfrm>
-          <a:prstGeom prst="rect">
-            <a:avLst/>
-          </a:prstGeom>
-        </p:spPr>
-      </p:pic>
-      <p:sp>
-        <p:nvSpPr>
-          <p:cNvPr id="6" name="Shape 2"/>
-          <p:cNvSpPr/>
-          <p:nvPr/>
-        </p:nvSpPr>
-        <p:spPr>
-          <a:xfrm>
-            <a:off x="274320" y="4206240"/>
-            <a:ext cx="4114800" cy="457200"/>
+      <p:sp>
+        <p:nvSpPr>
+          <p:cNvPr id="5" name="Shape 2"/>
+          <p:cNvSpPr/>
+          <p:nvPr/>
+        </p:nvSpPr>
+        <p:spPr>
+          <a:xfrm>
+            <a:off x="4572000" y="1005840"/>
+            <a:ext cx="4297680" cy="566928"/>
+          </a:xfrm>
+          <a:prstGeom prst="rect">
+            <a:avLst/>
+          </a:prstGeom>
+          <a:solidFill>
+            <a:srgbClr val="F5F7FA"/>
+          </a:solidFill>
+          <a:ln/>
+        </p:spPr>
+      </p:sp>
+      <p:sp>
+        <p:nvSpPr>
+          <p:cNvPr id="6" name="Shape 3"/>
+          <p:cNvSpPr/>
+          <p:nvPr/>
+        </p:nvSpPr>
+        <p:spPr>
+          <a:xfrm>
+            <a:off x="4572000" y="1005840"/>
+            <a:ext cx="45720" cy="566928"/>
           </a:xfrm>
           <a:prstGeom prst="rect">
             <a:avLst/>
@@ -2198,38 +2639,38 @@
       </p:sp>
       <p:sp>
         <p:nvSpPr>
-          <p:cNvPr id="7" name="Text 3"/>
-          <p:cNvSpPr/>
-          <p:nvPr/>
-        </p:nvSpPr>
-        <p:spPr>
-          <a:xfrm>
-            <a:off x="274320" y="4206240"/>
-            <a:ext cx="4114800" cy="457200"/>
-          </a:xfrm>
-          <a:prstGeom prst="rect">
-            <a:avLst/>
-          </a:prstGeom>
-          <a:noFill/>
-          <a:ln/>
-        </p:spPr>
-        <p:txBody>
-          <a:bodyPr wrap="square" rtlCol="0" anchor="ctr"/>
-          <a:lstStyle/>
-          <a:p>
-            <a:pPr algn="ctr" indent="0" marL="0">
-              <a:buNone/>
-            </a:pPr>
-            <a:r>
-              <a:rPr lang="en-US" sz="1100" dirty="0">
-                <a:solidFill>
-                  <a:srgbClr val="FFFFFF"/>
-                </a:solidFill>
-                <a:latin typeface="Microsoft YaHei" pitchFamily="34" charset="0"/>
-                <a:ea typeface="Microsoft YaHei" pitchFamily="34" charset="-122"/>
-                <a:cs typeface="Microsoft YaHei" pitchFamily="34" charset="-120"/>
-              </a:rPr>
-              <a:t>左：箱线图时序 | 依赖度中位数从37%升至47%，整体分布右移</a:t>
+          <p:cNvPr id="7" name="Text 4"/>
+          <p:cNvSpPr/>
+          <p:nvPr/>
+        </p:nvSpPr>
+        <p:spPr>
+          <a:xfrm>
+            <a:off x="4709160" y="1024128"/>
+            <a:ext cx="4023360" cy="320040"/>
+          </a:xfrm>
+          <a:prstGeom prst="rect">
+            <a:avLst/>
+          </a:prstGeom>
+          <a:noFill/>
+          <a:ln/>
+        </p:spPr>
+        <p:txBody>
+          <a:bodyPr wrap="square" rtlCol="0" anchor="b"/>
+          <a:lstStyle/>
+          <a:p>
+            <a:pPr indent="0" marL="0">
+              <a:buNone/>
+            </a:pPr>
+            <a:r>
+              <a:rPr lang="en-US" sz="1100" b="1" dirty="0">
+                <a:solidFill>
+                  <a:srgbClr val="1E293B"/>
+                </a:solidFill>
+                <a:latin typeface="Microsoft YaHei" pitchFamily="34" charset="0"/>
+                <a:ea typeface="Microsoft YaHei" pitchFamily="34" charset="-122"/>
+                <a:cs typeface="Microsoft YaHei" pitchFamily="34" charset="-120"/>
+              </a:rPr>
+              <a:t>依赖度 vs 自给率: r = -0.9749</a:t>
             </a:r>
             <a:endParaRPr lang="en-US" sz="1100" dirty="0"/>
           </a:p>
@@ -2237,58 +2678,117 @@
       </p:sp>
       <p:sp>
         <p:nvSpPr>
-          <p:cNvPr id="8" name="Shape 4"/>
-          <p:cNvSpPr/>
-          <p:nvPr/>
-        </p:nvSpPr>
-        <p:spPr>
-          <a:xfrm>
-            <a:off x="4572000" y="4206240"/>
-            <a:ext cx="4297680" cy="457200"/>
+          <p:cNvPr id="8" name="Text 5"/>
+          <p:cNvSpPr/>
+          <p:nvPr/>
+        </p:nvSpPr>
+        <p:spPr>
+          <a:xfrm>
+            <a:off x="4709160" y="1298448"/>
+            <a:ext cx="4023360" cy="256032"/>
+          </a:xfrm>
+          <a:prstGeom prst="rect">
+            <a:avLst/>
+          </a:prstGeom>
+          <a:noFill/>
+          <a:ln/>
+        </p:spPr>
+        <p:txBody>
+          <a:bodyPr wrap="square" rtlCol="0" anchor="t"/>
+          <a:lstStyle/>
+          <a:p>
+            <a:pPr indent="0" marL="0">
+              <a:buNone/>
+            </a:pPr>
+            <a:r>
+              <a:rPr lang="en-US" sz="900" dirty="0">
+                <a:solidFill>
+                  <a:srgbClr val="64748B"/>
+                </a:solidFill>
+                <a:latin typeface="Microsoft YaHei" pitchFamily="34" charset="0"/>
+                <a:ea typeface="Microsoft YaHei" pitchFamily="34" charset="-122"/>
+                <a:cs typeface="Microsoft YaHei" pitchFamily="34" charset="-120"/>
+              </a:rPr>
+              <a:t>近乎完全负相关</a:t>
+            </a:r>
+            <a:endParaRPr lang="en-US" sz="900" dirty="0"/>
+          </a:p>
+        </p:txBody>
+      </p:sp>
+      <p:sp>
+        <p:nvSpPr>
+          <p:cNvPr id="9" name="Shape 6"/>
+          <p:cNvSpPr/>
+          <p:nvPr/>
+        </p:nvSpPr>
+        <p:spPr>
+          <a:xfrm>
+            <a:off x="4572000" y="1664208"/>
+            <a:ext cx="4297680" cy="566928"/>
           </a:xfrm>
           <a:prstGeom prst="rect">
             <a:avLst/>
           </a:prstGeom>
           <a:solidFill>
-            <a:srgbClr val="27AE60"/>
+            <a:srgbClr val="F5F7FA"/>
           </a:solidFill>
           <a:ln/>
         </p:spPr>
       </p:sp>
       <p:sp>
         <p:nvSpPr>
-          <p:cNvPr id="9" name="Text 5"/>
-          <p:cNvSpPr/>
-          <p:nvPr/>
-        </p:nvSpPr>
-        <p:spPr>
-          <a:xfrm>
-            <a:off x="4572000" y="4206240"/>
-            <a:ext cx="4297680" cy="457200"/>
-          </a:xfrm>
-          <a:prstGeom prst="rect">
-            <a:avLst/>
-          </a:prstGeom>
-          <a:noFill/>
-          <a:ln/>
-        </p:spPr>
-        <p:txBody>
-          <a:bodyPr wrap="square" rtlCol="0" anchor="ctr"/>
-          <a:lstStyle/>
-          <a:p>
-            <a:pPr algn="ctr" indent="0" marL="0">
-              <a:buNone/>
-            </a:pPr>
-            <a:r>
-              <a:rPr lang="en-US" sz="1100" dirty="0">
-                <a:solidFill>
-                  <a:srgbClr val="FFFFFF"/>
-                </a:solidFill>
-                <a:latin typeface="Microsoft YaHei" pitchFamily="34" charset="0"/>
-                <a:ea typeface="Microsoft YaHei" pitchFamily="34" charset="-122"/>
-                <a:cs typeface="Microsoft YaHei" pitchFamily="34" charset="-120"/>
-              </a:rPr>
-              <a:t>右：三类省份趋势 | 高自给率稳定30%，低自给率持续攀升</a:t>
+          <p:cNvPr id="10" name="Shape 7"/>
+          <p:cNvSpPr/>
+          <p:nvPr/>
+        </p:nvSpPr>
+        <p:spPr>
+          <a:xfrm>
+            <a:off x="4572000" y="1664208"/>
+            <a:ext cx="45720" cy="566928"/>
+          </a:xfrm>
+          <a:prstGeom prst="rect">
+            <a:avLst/>
+          </a:prstGeom>
+          <a:solidFill>
+            <a:srgbClr val="2E75B6"/>
+          </a:solidFill>
+          <a:ln/>
+        </p:spPr>
+      </p:sp>
+      <p:sp>
+        <p:nvSpPr>
+          <p:cNvPr id="11" name="Text 8"/>
+          <p:cNvSpPr/>
+          <p:nvPr/>
+        </p:nvSpPr>
+        <p:spPr>
+          <a:xfrm>
+            <a:off x="4709160" y="1682496"/>
+            <a:ext cx="4023360" cy="320040"/>
+          </a:xfrm>
+          <a:prstGeom prst="rect">
+            <a:avLst/>
+          </a:prstGeom>
+          <a:noFill/>
+          <a:ln/>
+        </p:spPr>
+        <p:txBody>
+          <a:bodyPr wrap="square" rtlCol="0" anchor="b"/>
+          <a:lstStyle/>
+          <a:p>
+            <a:pPr indent="0" marL="0">
+              <a:buNone/>
+            </a:pPr>
+            <a:r>
+              <a:rPr lang="en-US" sz="1100" b="1" dirty="0">
+                <a:solidFill>
+                  <a:srgbClr val="1E293B"/>
+                </a:solidFill>
+                <a:latin typeface="Microsoft YaHei" pitchFamily="34" charset="0"/>
+                <a:ea typeface="Microsoft YaHei" pitchFamily="34" charset="-122"/>
+                <a:cs typeface="Microsoft YaHei" pitchFamily="34" charset="-120"/>
+              </a:rPr>
+              <a:t>依赖度 vs 人均GDP: r = -0.7751</a:t>
             </a:r>
             <a:endParaRPr lang="en-US" sz="1100" dirty="0"/>
           </a:p>
@@ -2296,60 +2796,394 @@
       </p:sp>
       <p:sp>
         <p:nvSpPr>
-          <p:cNvPr id="10" name="Shape 6"/>
-          <p:cNvSpPr/>
-          <p:nvPr/>
-        </p:nvSpPr>
-        <p:spPr>
-          <a:xfrm>
-            <a:off x="457200" y="4846320"/>
-            <a:ext cx="8229600" cy="237744"/>
+          <p:cNvPr id="12" name="Text 9"/>
+          <p:cNvSpPr/>
+          <p:nvPr/>
+        </p:nvSpPr>
+        <p:spPr>
+          <a:xfrm>
+            <a:off x="4709160" y="1956816"/>
+            <a:ext cx="4023360" cy="256032"/>
+          </a:xfrm>
+          <a:prstGeom prst="rect">
+            <a:avLst/>
+          </a:prstGeom>
+          <a:noFill/>
+          <a:ln/>
+        </p:spPr>
+        <p:txBody>
+          <a:bodyPr wrap="square" rtlCol="0" anchor="t"/>
+          <a:lstStyle/>
+          <a:p>
+            <a:pPr indent="0" marL="0">
+              <a:buNone/>
+            </a:pPr>
+            <a:r>
+              <a:rPr lang="en-US" sz="900" dirty="0">
+                <a:solidFill>
+                  <a:srgbClr val="64748B"/>
+                </a:solidFill>
+                <a:latin typeface="Microsoft YaHei" pitchFamily="34" charset="0"/>
+                <a:ea typeface="Microsoft YaHei" pitchFamily="34" charset="-122"/>
+                <a:cs typeface="Microsoft YaHei" pitchFamily="34" charset="-120"/>
+              </a:rPr>
+              <a:t>强负相关</a:t>
+            </a:r>
+            <a:endParaRPr lang="en-US" sz="900" dirty="0"/>
+          </a:p>
+        </p:txBody>
+      </p:sp>
+      <p:sp>
+        <p:nvSpPr>
+          <p:cNvPr id="13" name="Shape 10"/>
+          <p:cNvSpPr/>
+          <p:nvPr/>
+        </p:nvSpPr>
+        <p:spPr>
+          <a:xfrm>
+            <a:off x="4572000" y="2322576"/>
+            <a:ext cx="4297680" cy="566928"/>
           </a:xfrm>
           <a:prstGeom prst="rect">
             <a:avLst/>
           </a:prstGeom>
           <a:solidFill>
-            <a:srgbClr val="D5E8F0"/>
+            <a:srgbClr val="F5F7FA"/>
           </a:solidFill>
           <a:ln/>
         </p:spPr>
       </p:sp>
       <p:sp>
         <p:nvSpPr>
-          <p:cNvPr id="11" name="Text 7"/>
-          <p:cNvSpPr/>
-          <p:nvPr/>
-        </p:nvSpPr>
-        <p:spPr>
-          <a:xfrm>
-            <a:off x="512064" y="4846320"/>
-            <a:ext cx="8119872" cy="237744"/>
-          </a:xfrm>
-          <a:prstGeom prst="rect">
-            <a:avLst/>
-          </a:prstGeom>
-          <a:noFill/>
-          <a:ln/>
-        </p:spPr>
-        <p:txBody>
-          <a:bodyPr wrap="square" rtlCol="0" anchor="ctr"/>
+          <p:cNvPr id="14" name="Shape 11"/>
+          <p:cNvSpPr/>
+          <p:nvPr/>
+        </p:nvSpPr>
+        <p:spPr>
+          <a:xfrm>
+            <a:off x="4572000" y="2322576"/>
+            <a:ext cx="45720" cy="566928"/>
+          </a:xfrm>
+          <a:prstGeom prst="rect">
+            <a:avLst/>
+          </a:prstGeom>
+          <a:solidFill>
+            <a:srgbClr val="2E75B6"/>
+          </a:solidFill>
+          <a:ln/>
+        </p:spPr>
+      </p:sp>
+      <p:sp>
+        <p:nvSpPr>
+          <p:cNvPr id="15" name="Text 12"/>
+          <p:cNvSpPr/>
+          <p:nvPr/>
+        </p:nvSpPr>
+        <p:spPr>
+          <a:xfrm>
+            <a:off x="4709160" y="2340864"/>
+            <a:ext cx="4023360" cy="320040"/>
+          </a:xfrm>
+          <a:prstGeom prst="rect">
+            <a:avLst/>
+          </a:prstGeom>
+          <a:noFill/>
+          <a:ln/>
+        </p:spPr>
+        <p:txBody>
+          <a:bodyPr wrap="square" rtlCol="0" anchor="b"/>
           <a:lstStyle/>
           <a:p>
             <a:pPr indent="0" marL="0">
               <a:buNone/>
             </a:pPr>
             <a:r>
-              <a:rPr lang="en-US" sz="750" dirty="0">
-                <a:solidFill>
-                  <a:srgbClr val="1F4E79"/>
-                </a:solidFill>
-                <a:latin typeface="Microsoft YaHei" pitchFamily="34" charset="0"/>
-                <a:ea typeface="Microsoft YaHei" pitchFamily="34" charset="-122"/>
-                <a:cs typeface="Microsoft YaHei" pitchFamily="34" charset="-120"/>
-              </a:rPr>
-              <a:t>AI协作：VIF=1.01(无共线性) | BP检验(异方差→已用稳健SE) | Moran I=0.42***(空间聚集)</a:t>
-            </a:r>
-            <a:endParaRPr lang="en-US" sz="750" dirty="0"/>
+              <a:rPr lang="en-US" sz="1100" b="1" dirty="0">
+                <a:solidFill>
+                  <a:srgbClr val="1E293B"/>
+                </a:solidFill>
+                <a:latin typeface="Microsoft YaHei" pitchFamily="34" charset="0"/>
+                <a:ea typeface="Microsoft YaHei" pitchFamily="34" charset="-122"/>
+                <a:cs typeface="Microsoft YaHei" pitchFamily="34" charset="-120"/>
+              </a:rPr>
+              <a:t>ρ = -0.8129, p &lt; 0.001</a:t>
+            </a:r>
+            <a:endParaRPr lang="en-US" sz="1100" dirty="0"/>
+          </a:p>
+        </p:txBody>
+      </p:sp>
+      <p:sp>
+        <p:nvSpPr>
+          <p:cNvPr id="16" name="Text 13"/>
+          <p:cNvSpPr/>
+          <p:nvPr/>
+        </p:nvSpPr>
+        <p:spPr>
+          <a:xfrm>
+            <a:off x="4709160" y="2615184"/>
+            <a:ext cx="4023360" cy="256032"/>
+          </a:xfrm>
+          <a:prstGeom prst="rect">
+            <a:avLst/>
+          </a:prstGeom>
+          <a:noFill/>
+          <a:ln/>
+        </p:spPr>
+        <p:txBody>
+          <a:bodyPr wrap="square" rtlCol="0" anchor="t"/>
+          <a:lstStyle/>
+          <a:p>
+            <a:pPr indent="0" marL="0">
+              <a:buNone/>
+            </a:pPr>
+            <a:r>
+              <a:rPr lang="en-US" sz="900" dirty="0">
+                <a:solidFill>
+                  <a:srgbClr val="64748B"/>
+                </a:solidFill>
+                <a:latin typeface="Microsoft YaHei" pitchFamily="34" charset="0"/>
+                <a:ea typeface="Microsoft YaHei" pitchFamily="34" charset="-122"/>
+                <a:cs typeface="Microsoft YaHei" pitchFamily="34" charset="-120"/>
+              </a:rPr>
+              <a:t>单调关系极显著</a:t>
+            </a:r>
+            <a:endParaRPr lang="en-US" sz="900" dirty="0"/>
+          </a:p>
+        </p:txBody>
+      </p:sp>
+      <p:sp>
+        <p:nvSpPr>
+          <p:cNvPr id="17" name="Shape 14"/>
+          <p:cNvSpPr/>
+          <p:nvPr/>
+        </p:nvSpPr>
+        <p:spPr>
+          <a:xfrm>
+            <a:off x="4572000" y="2980944"/>
+            <a:ext cx="4297680" cy="566928"/>
+          </a:xfrm>
+          <a:prstGeom prst="rect">
+            <a:avLst/>
+          </a:prstGeom>
+          <a:solidFill>
+            <a:srgbClr val="F5F7FA"/>
+          </a:solidFill>
+          <a:ln/>
+        </p:spPr>
+      </p:sp>
+      <p:sp>
+        <p:nvSpPr>
+          <p:cNvPr id="18" name="Shape 15"/>
+          <p:cNvSpPr/>
+          <p:nvPr/>
+        </p:nvSpPr>
+        <p:spPr>
+          <a:xfrm>
+            <a:off x="4572000" y="2980944"/>
+            <a:ext cx="45720" cy="566928"/>
+          </a:xfrm>
+          <a:prstGeom prst="rect">
+            <a:avLst/>
+          </a:prstGeom>
+          <a:solidFill>
+            <a:srgbClr val="2E75B6"/>
+          </a:solidFill>
+          <a:ln/>
+        </p:spPr>
+      </p:sp>
+      <p:sp>
+        <p:nvSpPr>
+          <p:cNvPr id="19" name="Text 16"/>
+          <p:cNvSpPr/>
+          <p:nvPr/>
+        </p:nvSpPr>
+        <p:spPr>
+          <a:xfrm>
+            <a:off x="4709160" y="2999232"/>
+            <a:ext cx="4023360" cy="320040"/>
+          </a:xfrm>
+          <a:prstGeom prst="rect">
+            <a:avLst/>
+          </a:prstGeom>
+          <a:noFill/>
+          <a:ln/>
+        </p:spPr>
+        <p:txBody>
+          <a:bodyPr wrap="square" rtlCol="0" anchor="b"/>
+          <a:lstStyle/>
+          <a:p>
+            <a:pPr indent="0" marL="0">
+              <a:buNone/>
+            </a:pPr>
+            <a:r>
+              <a:rPr lang="en-US" sz="1100" b="1" dirty="0">
+                <a:solidFill>
+                  <a:srgbClr val="1E293B"/>
+                </a:solidFill>
+                <a:latin typeface="Microsoft YaHei" pitchFamily="34" charset="0"/>
+                <a:ea typeface="Microsoft YaHei" pitchFamily="34" charset="-122"/>
+                <a:cs typeface="Microsoft YaHei" pitchFamily="34" charset="-120"/>
+              </a:rPr>
+              <a:t>F = 62.10, p &lt; 0.001</a:t>
+            </a:r>
+            <a:endParaRPr lang="en-US" sz="1100" dirty="0"/>
+          </a:p>
+        </p:txBody>
+      </p:sp>
+      <p:sp>
+        <p:nvSpPr>
+          <p:cNvPr id="20" name="Text 17"/>
+          <p:cNvSpPr/>
+          <p:nvPr/>
+        </p:nvSpPr>
+        <p:spPr>
+          <a:xfrm>
+            <a:off x="4709160" y="3273552"/>
+            <a:ext cx="4023360" cy="256032"/>
+          </a:xfrm>
+          <a:prstGeom prst="rect">
+            <a:avLst/>
+          </a:prstGeom>
+          <a:noFill/>
+          <a:ln/>
+        </p:spPr>
+        <p:txBody>
+          <a:bodyPr wrap="square" rtlCol="0" anchor="t"/>
+          <a:lstStyle/>
+          <a:p>
+            <a:pPr indent="0" marL="0">
+              <a:buNone/>
+            </a:pPr>
+            <a:r>
+              <a:rPr lang="en-US" sz="900" dirty="0">
+                <a:solidFill>
+                  <a:srgbClr val="64748B"/>
+                </a:solidFill>
+                <a:latin typeface="Microsoft YaHei" pitchFamily="34" charset="0"/>
+                <a:ea typeface="Microsoft YaHei" pitchFamily="34" charset="-122"/>
+                <a:cs typeface="Microsoft YaHei" pitchFamily="34" charset="-120"/>
+              </a:rPr>
+              <a:t>三类省份差异极显著</a:t>
+            </a:r>
+            <a:endParaRPr lang="en-US" sz="900" dirty="0"/>
+          </a:p>
+        </p:txBody>
+      </p:sp>
+      <p:sp>
+        <p:nvSpPr>
+          <p:cNvPr id="21" name="Shape 18"/>
+          <p:cNvSpPr/>
+          <p:nvPr/>
+        </p:nvSpPr>
+        <p:spPr>
+          <a:xfrm>
+            <a:off x="4572000" y="3639312"/>
+            <a:ext cx="4297680" cy="566928"/>
+          </a:xfrm>
+          <a:prstGeom prst="rect">
+            <a:avLst/>
+          </a:prstGeom>
+          <a:solidFill>
+            <a:srgbClr val="F5F7FA"/>
+          </a:solidFill>
+          <a:ln/>
+        </p:spPr>
+      </p:sp>
+      <p:sp>
+        <p:nvSpPr>
+          <p:cNvPr id="22" name="Shape 19"/>
+          <p:cNvSpPr/>
+          <p:nvPr/>
+        </p:nvSpPr>
+        <p:spPr>
+          <a:xfrm>
+            <a:off x="4572000" y="3639312"/>
+            <a:ext cx="45720" cy="566928"/>
+          </a:xfrm>
+          <a:prstGeom prst="rect">
+            <a:avLst/>
+          </a:prstGeom>
+          <a:solidFill>
+            <a:srgbClr val="2E75B6"/>
+          </a:solidFill>
+          <a:ln/>
+        </p:spPr>
+      </p:sp>
+      <p:sp>
+        <p:nvSpPr>
+          <p:cNvPr id="23" name="Text 20"/>
+          <p:cNvSpPr/>
+          <p:nvPr/>
+        </p:nvSpPr>
+        <p:spPr>
+          <a:xfrm>
+            <a:off x="4709160" y="3657600"/>
+            <a:ext cx="4023360" cy="320040"/>
+          </a:xfrm>
+          <a:prstGeom prst="rect">
+            <a:avLst/>
+          </a:prstGeom>
+          <a:noFill/>
+          <a:ln/>
+        </p:spPr>
+        <p:txBody>
+          <a:bodyPr wrap="square" rtlCol="0" anchor="b"/>
+          <a:lstStyle/>
+          <a:p>
+            <a:pPr indent="0" marL="0">
+              <a:buNone/>
+            </a:pPr>
+            <a:r>
+              <a:rPr lang="en-US" sz="1100" b="1" dirty="0">
+                <a:solidFill>
+                  <a:srgbClr val="1E293B"/>
+                </a:solidFill>
+                <a:latin typeface="Microsoft YaHei" pitchFamily="34" charset="0"/>
+                <a:ea typeface="Microsoft YaHei" pitchFamily="34" charset="-122"/>
+                <a:cs typeface="Microsoft YaHei" pitchFamily="34" charset="-120"/>
+              </a:rPr>
+              <a:t>高/中/低 两两比较 p &lt; 0.001</a:t>
+            </a:r>
+            <a:endParaRPr lang="en-US" sz="1100" dirty="0"/>
+          </a:p>
+        </p:txBody>
+      </p:sp>
+      <p:sp>
+        <p:nvSpPr>
+          <p:cNvPr id="24" name="Text 21"/>
+          <p:cNvSpPr/>
+          <p:nvPr/>
+        </p:nvSpPr>
+        <p:spPr>
+          <a:xfrm>
+            <a:off x="4709160" y="3931920"/>
+            <a:ext cx="4023360" cy="256032"/>
+          </a:xfrm>
+          <a:prstGeom prst="rect">
+            <a:avLst/>
+          </a:prstGeom>
+          <a:noFill/>
+          <a:ln/>
+        </p:spPr>
+        <p:txBody>
+          <a:bodyPr wrap="square" rtlCol="0" anchor="t"/>
+          <a:lstStyle/>
+          <a:p>
+            <a:pPr indent="0" marL="0">
+              <a:buNone/>
+            </a:pPr>
+            <a:r>
+              <a:rPr lang="en-US" sz="900" dirty="0">
+                <a:solidFill>
+                  <a:srgbClr val="64748B"/>
+                </a:solidFill>
+                <a:latin typeface="Microsoft YaHei" pitchFamily="34" charset="0"/>
+                <a:ea typeface="Microsoft YaHei" pitchFamily="34" charset="-122"/>
+                <a:cs typeface="Microsoft YaHei" pitchFamily="34" charset="-120"/>
+              </a:rPr>
+              <a:t>Bonferroni校正全部显著</a:t>
+            </a:r>
+            <a:endParaRPr lang="en-US" sz="900" dirty="0"/>
           </a:p>
         </p:txBody>
       </p:sp>
@@ -2367,7 +3201,7 @@
     <p:bg>
       <p:bgPr>
         <a:solidFill>
-          <a:srgbClr val="FFFFFF"/>
+          <a:srgbClr val="1A3C5E"/>
         </a:solidFill>
       </p:bgPr>
     </p:bg>
@@ -2387,14 +3221,34 @@
       </p:grpSpPr>
       <p:sp>
         <p:nvSpPr>
-          <p:cNvPr id="2" name="Text 0"/>
-          <p:cNvSpPr/>
-          <p:nvPr/>
-        </p:nvSpPr>
-        <p:spPr>
-          <a:xfrm>
-            <a:off x="457200" y="182880"/>
-            <a:ext cx="8229600" cy="502920"/>
+          <p:cNvPr id="2" name="Shape 0"/>
+          <p:cNvSpPr/>
+          <p:nvPr/>
+        </p:nvSpPr>
+        <p:spPr>
+          <a:xfrm>
+            <a:off x="457200" y="2286000"/>
+            <a:ext cx="54864" cy="914400"/>
+          </a:xfrm>
+          <a:prstGeom prst="rect">
+            <a:avLst/>
+          </a:prstGeom>
+          <a:solidFill>
+            <a:srgbClr val="C0392B"/>
+          </a:solidFill>
+          <a:ln/>
+        </p:spPr>
+      </p:sp>
+      <p:sp>
+        <p:nvSpPr>
+          <p:cNvPr id="3" name="Text 1"/>
+          <p:cNvSpPr/>
+          <p:nvPr/>
+        </p:nvSpPr>
+        <p:spPr>
+          <a:xfrm>
+            <a:off x="731520" y="2286000"/>
+            <a:ext cx="7315200" cy="914400"/>
           </a:xfrm>
           <a:prstGeom prst="rect">
             <a:avLst/>
@@ -2410,86 +3264,7 @@
               <a:buNone/>
             </a:pPr>
             <a:r>
-              <a:rPr lang="en-US" sz="2400" b="1" dirty="0">
-                <a:solidFill>
-                  <a:srgbClr val="1A3C5E"/>
-                </a:solidFill>
-                <a:latin typeface="Microsoft YaHei" pitchFamily="34" charset="0"/>
-                <a:ea typeface="Microsoft YaHei" pitchFamily="34" charset="-122"/>
-                <a:cs typeface="Microsoft YaHei" pitchFamily="34" charset="-120"/>
-              </a:rPr>
-              <a:t>结论与政策启示</a:t>
-            </a:r>
-            <a:endParaRPr lang="en-US" sz="2400" dirty="0"/>
-          </a:p>
-        </p:txBody>
-      </p:sp>
-      <p:sp>
-        <p:nvSpPr>
-          <p:cNvPr id="3" name="Shape 1"/>
-          <p:cNvSpPr/>
-          <p:nvPr/>
-        </p:nvSpPr>
-        <p:spPr>
-          <a:xfrm>
-            <a:off x="457200" y="685800"/>
-            <a:ext cx="914400" cy="27432"/>
-          </a:xfrm>
-          <a:prstGeom prst="rect">
-            <a:avLst/>
-          </a:prstGeom>
-          <a:solidFill>
-            <a:srgbClr val="2E75B6"/>
-          </a:solidFill>
-          <a:ln/>
-        </p:spPr>
-      </p:sp>
-      <p:sp>
-        <p:nvSpPr>
-          <p:cNvPr id="4" name="Shape 2"/>
-          <p:cNvSpPr/>
-          <p:nvPr/>
-        </p:nvSpPr>
-        <p:spPr>
-          <a:xfrm>
-            <a:off x="274320" y="914400"/>
-            <a:ext cx="4114800" cy="347472"/>
-          </a:xfrm>
-          <a:prstGeom prst="rect">
-            <a:avLst/>
-          </a:prstGeom>
-          <a:solidFill>
-            <a:srgbClr val="1F4E79"/>
-          </a:solidFill>
-          <a:ln/>
-        </p:spPr>
-      </p:sp>
-      <p:sp>
-        <p:nvSpPr>
-          <p:cNvPr id="5" name="Text 3"/>
-          <p:cNvSpPr/>
-          <p:nvPr/>
-        </p:nvSpPr>
-        <p:spPr>
-          <a:xfrm>
-            <a:off x="274320" y="914400"/>
-            <a:ext cx="4114800" cy="347472"/>
-          </a:xfrm>
-          <a:prstGeom prst="rect">
-            <a:avLst/>
-          </a:prstGeom>
-          <a:noFill/>
-          <a:ln/>
-        </p:spPr>
-        <p:txBody>
-          <a:bodyPr wrap="square" rtlCol="0" anchor="ctr"/>
-          <a:lstStyle/>
-          <a:p>
-            <a:pPr algn="ctr" indent="0" marL="0">
-              <a:buNone/>
-            </a:pPr>
-            <a:r>
-              <a:rPr lang="en-US" sz="1400" b="1" dirty="0">
+              <a:rPr lang="en-US" sz="3200" b="1" dirty="0">
                 <a:solidFill>
                   <a:srgbClr val="FFFFFF"/>
                 </a:solidFill>
@@ -2497,517 +3272,9 @@
                 <a:ea typeface="Microsoft YaHei" pitchFamily="34" charset="-122"/>
                 <a:cs typeface="Microsoft YaHei" pitchFamily="34" charset="-120"/>
               </a:rPr>
-              <a:t>四大核心发现</a:t>
-            </a:r>
-            <a:endParaRPr lang="en-US" sz="1400" dirty="0"/>
-          </a:p>
-        </p:txBody>
-      </p:sp>
-      <p:sp>
-        <p:nvSpPr>
-          <p:cNvPr id="6" name="Text 4"/>
-          <p:cNvSpPr/>
-          <p:nvPr/>
-        </p:nvSpPr>
-        <p:spPr>
-          <a:xfrm>
-            <a:off x="365760" y="1417320"/>
-            <a:ext cx="3931920" cy="457200"/>
-          </a:xfrm>
-          <a:prstGeom prst="rect">
-            <a:avLst/>
-          </a:prstGeom>
-          <a:noFill/>
-          <a:ln/>
-        </p:spPr>
-        <p:txBody>
-          <a:bodyPr wrap="square" rtlCol="0" anchor="ctr"/>
-          <a:lstStyle/>
-          <a:p>
-            <a:pPr indent="0" marL="0">
-              <a:buNone/>
-            </a:pPr>
-            <a:r>
-              <a:rPr lang="en-US" sz="950" dirty="0">
-                <a:solidFill>
-                  <a:srgbClr val="1E293B"/>
-                </a:solidFill>
-                <a:latin typeface="Microsoft YaHei" pitchFamily="34" charset="0"/>
-                <a:ea typeface="Microsoft YaHei" pitchFamily="34" charset="-122"/>
-                <a:cs typeface="Microsoft YaHei" pitchFamily="34" charset="-120"/>
-              </a:rPr>
-              <a:t>① 均等化方向正确：低自给率省份人均转移支付是高自给率的5.4倍（p &lt; 0.001）</a:t>
-            </a:r>
-            <a:endParaRPr lang="en-US" sz="950" dirty="0"/>
-          </a:p>
-        </p:txBody>
-      </p:sp>
-      <p:sp>
-        <p:nvSpPr>
-          <p:cNvPr id="7" name="Text 5"/>
-          <p:cNvSpPr/>
-          <p:nvPr/>
-        </p:nvSpPr>
-        <p:spPr>
-          <a:xfrm>
-            <a:off x="365760" y="1965960"/>
-            <a:ext cx="3931920" cy="457200"/>
-          </a:xfrm>
-          <a:prstGeom prst="rect">
-            <a:avLst/>
-          </a:prstGeom>
-          <a:noFill/>
-          <a:ln/>
-        </p:spPr>
-        <p:txBody>
-          <a:bodyPr wrap="square" rtlCol="0" anchor="ctr"/>
-          <a:lstStyle/>
-          <a:p>
-            <a:pPr indent="0" marL="0">
-              <a:buNone/>
-            </a:pPr>
-            <a:r>
-              <a:rPr lang="en-US" sz="950" dirty="0">
-                <a:solidFill>
-                  <a:srgbClr val="1E293B"/>
-                </a:solidFill>
-                <a:latin typeface="Microsoft YaHei" pitchFamily="34" charset="0"/>
-                <a:ea typeface="Microsoft YaHei" pitchFamily="34" charset="-122"/>
-                <a:cs typeface="Microsoft YaHei" pitchFamily="34" charset="-120"/>
-              </a:rPr>
-              <a:t>② 地区差距依然严峻：人均GDP京/甘相差4倍，转移支付托底但无法根本改变经济格局</a:t>
-            </a:r>
-            <a:endParaRPr lang="en-US" sz="950" dirty="0"/>
-          </a:p>
-        </p:txBody>
-      </p:sp>
-      <p:sp>
-        <p:nvSpPr>
-          <p:cNvPr id="8" name="Text 6"/>
-          <p:cNvSpPr/>
-          <p:nvPr/>
-        </p:nvSpPr>
-        <p:spPr>
-          <a:xfrm>
-            <a:off x="365760" y="2514600"/>
-            <a:ext cx="3931920" cy="457200"/>
-          </a:xfrm>
-          <a:prstGeom prst="rect">
-            <a:avLst/>
-          </a:prstGeom>
-          <a:noFill/>
-          <a:ln/>
-        </p:spPr>
-        <p:txBody>
-          <a:bodyPr wrap="square" rtlCol="0" anchor="ctr"/>
-          <a:lstStyle/>
-          <a:p>
-            <a:pPr indent="0" marL="0">
-              <a:buNone/>
-            </a:pPr>
-            <a:r>
-              <a:rPr lang="en-US" sz="950" dirty="0">
-                <a:solidFill>
-                  <a:srgbClr val="1E293B"/>
-                </a:solidFill>
-                <a:latin typeface="Microsoft YaHei" pitchFamily="34" charset="0"/>
-                <a:ea typeface="Microsoft YaHei" pitchFamily="34" charset="-122"/>
-                <a:cs typeface="Microsoft YaHei" pitchFamily="34" charset="-120"/>
-              </a:rPr>
-              <a:t>③ 整体依赖加深：全国平均依赖度从37%升至47%，地方税源建设仍是长期课题</a:t>
-            </a:r>
-            <a:endParaRPr lang="en-US" sz="950" dirty="0"/>
-          </a:p>
-        </p:txBody>
-      </p:sp>
-      <p:sp>
-        <p:nvSpPr>
-          <p:cNvPr id="9" name="Text 7"/>
-          <p:cNvSpPr/>
-          <p:nvPr/>
-        </p:nvSpPr>
-        <p:spPr>
-          <a:xfrm>
-            <a:off x="365760" y="3063240"/>
-            <a:ext cx="3931920" cy="457200"/>
-          </a:xfrm>
-          <a:prstGeom prst="rect">
-            <a:avLst/>
-          </a:prstGeom>
-          <a:noFill/>
-          <a:ln/>
-        </p:spPr>
-        <p:txBody>
-          <a:bodyPr wrap="square" rtlCol="0" anchor="ctr"/>
-          <a:lstStyle/>
-          <a:p>
-            <a:pPr indent="0" marL="0">
-              <a:buNone/>
-            </a:pPr>
-            <a:r>
-              <a:rPr lang="en-US" sz="950" dirty="0">
-                <a:solidFill>
-                  <a:srgbClr val="1E293B"/>
-                </a:solidFill>
-                <a:latin typeface="Microsoft YaHei" pitchFamily="34" charset="0"/>
-                <a:ea typeface="Microsoft YaHei" pitchFamily="34" charset="-122"/>
-                <a:cs typeface="Microsoft YaHei" pitchFamily="34" charset="-120"/>
-              </a:rPr>
-              <a:t>④ 三类划分有效：ANOVA F=62.10，组间差异极显著，分类施策具有统计依据</a:t>
-            </a:r>
-            <a:endParaRPr lang="en-US" sz="950" dirty="0"/>
-          </a:p>
-        </p:txBody>
-      </p:sp>
-      <p:sp>
-        <p:nvSpPr>
-          <p:cNvPr id="10" name="Text 8"/>
-          <p:cNvSpPr/>
-          <p:nvPr/>
-        </p:nvSpPr>
-        <p:spPr>
-          <a:xfrm>
-            <a:off x="365760" y="3611880"/>
-            <a:ext cx="3931920" cy="457200"/>
-          </a:xfrm>
-          <a:prstGeom prst="rect">
-            <a:avLst/>
-          </a:prstGeom>
-          <a:noFill/>
-          <a:ln/>
-        </p:spPr>
-        <p:txBody>
-          <a:bodyPr wrap="square" rtlCol="0" anchor="ctr"/>
-          <a:lstStyle/>
-          <a:p>
-            <a:pPr indent="0" marL="0">
-              <a:buNone/>
-            </a:pPr>
-            <a:r>
-              <a:rPr lang="en-US" sz="950" dirty="0">
-                <a:solidFill>
-                  <a:srgbClr val="1E293B"/>
-                </a:solidFill>
-                <a:latin typeface="Microsoft YaHei" pitchFamily="34" charset="0"/>
-                <a:ea typeface="Microsoft YaHei" pitchFamily="34" charset="-122"/>
-                <a:cs typeface="Microsoft YaHei" pitchFamily="34" charset="-120"/>
-              </a:rPr>
-              <a:t>⑤ 面板回归证实：ln(人均GDP)显著负向，经济越发达依赖度越低</a:t>
-            </a:r>
-            <a:endParaRPr lang="en-US" sz="950" dirty="0"/>
-          </a:p>
-        </p:txBody>
-      </p:sp>
-      <p:sp>
-        <p:nvSpPr>
-          <p:cNvPr id="11" name="Text 9"/>
-          <p:cNvSpPr/>
-          <p:nvPr/>
-        </p:nvSpPr>
-        <p:spPr>
-          <a:xfrm>
-            <a:off x="365760" y="4160520"/>
-            <a:ext cx="3931920" cy="457200"/>
-          </a:xfrm>
-          <a:prstGeom prst="rect">
-            <a:avLst/>
-          </a:prstGeom>
-          <a:noFill/>
-          <a:ln/>
-        </p:spPr>
-        <p:txBody>
-          <a:bodyPr wrap="square" rtlCol="0" anchor="ctr"/>
-          <a:lstStyle/>
-          <a:p>
-            <a:pPr indent="0" marL="0">
-              <a:buNone/>
-            </a:pPr>
-            <a:r>
-              <a:rPr lang="en-US" sz="950" dirty="0">
-                <a:solidFill>
-                  <a:srgbClr val="1E293B"/>
-                </a:solidFill>
-                <a:latin typeface="Microsoft YaHei" pitchFamily="34" charset="0"/>
-                <a:ea typeface="Microsoft YaHei" pitchFamily="34" charset="-122"/>
-                <a:cs typeface="Microsoft YaHei" pitchFamily="34" charset="-120"/>
-              </a:rPr>
-              <a:t>⑥ 空间聚集显著：Moran's I=0.42***，高依赖省份呈现空间集群特征</a:t>
-            </a:r>
-            <a:endParaRPr lang="en-US" sz="950" dirty="0"/>
-          </a:p>
-        </p:txBody>
-      </p:sp>
-      <p:sp>
-        <p:nvSpPr>
-          <p:cNvPr id="12" name="Shape 10"/>
-          <p:cNvSpPr/>
-          <p:nvPr/>
-        </p:nvSpPr>
-        <p:spPr>
-          <a:xfrm>
-            <a:off x="4754880" y="914400"/>
-            <a:ext cx="4114800" cy="347472"/>
-          </a:xfrm>
-          <a:prstGeom prst="rect">
-            <a:avLst/>
-          </a:prstGeom>
-          <a:solidFill>
-            <a:srgbClr val="1A3C5E"/>
-          </a:solidFill>
-          <a:ln/>
-        </p:spPr>
-      </p:sp>
-      <p:sp>
-        <p:nvSpPr>
-          <p:cNvPr id="13" name="Text 11"/>
-          <p:cNvSpPr/>
-          <p:nvPr/>
-        </p:nvSpPr>
-        <p:spPr>
-          <a:xfrm>
-            <a:off x="4754880" y="914400"/>
-            <a:ext cx="4114800" cy="347472"/>
-          </a:xfrm>
-          <a:prstGeom prst="rect">
-            <a:avLst/>
-          </a:prstGeom>
-          <a:noFill/>
-          <a:ln/>
-        </p:spPr>
-        <p:txBody>
-          <a:bodyPr wrap="square" rtlCol="0" anchor="ctr"/>
-          <a:lstStyle/>
-          <a:p>
-            <a:pPr algn="ctr" indent="0" marL="0">
-              <a:buNone/>
-            </a:pPr>
-            <a:r>
-              <a:rPr lang="en-US" sz="1400" b="1" dirty="0">
-                <a:solidFill>
-                  <a:srgbClr val="FFFFFF"/>
-                </a:solidFill>
-                <a:latin typeface="Microsoft YaHei" pitchFamily="34" charset="0"/>
-                <a:ea typeface="Microsoft YaHei" pitchFamily="34" charset="-122"/>
-                <a:cs typeface="Microsoft YaHei" pitchFamily="34" charset="-120"/>
-              </a:rPr>
-              <a:t>政策启示</a:t>
-            </a:r>
-            <a:endParaRPr lang="en-US" sz="1400" dirty="0"/>
-          </a:p>
-        </p:txBody>
-      </p:sp>
-      <p:sp>
-        <p:nvSpPr>
-          <p:cNvPr id="14" name="Text 12"/>
-          <p:cNvSpPr/>
-          <p:nvPr/>
-        </p:nvSpPr>
-        <p:spPr>
-          <a:xfrm>
-            <a:off x="4846320" y="1417320"/>
-            <a:ext cx="3931920" cy="502920"/>
-          </a:xfrm>
-          <a:prstGeom prst="rect">
-            <a:avLst/>
-          </a:prstGeom>
-          <a:noFill/>
-          <a:ln/>
-        </p:spPr>
-        <p:txBody>
-          <a:bodyPr wrap="square" rtlCol="0" anchor="ctr"/>
-          <a:lstStyle/>
-          <a:p>
-            <a:pPr indent="0" marL="0">
-              <a:buNone/>
-            </a:pPr>
-            <a:r>
-              <a:rPr lang="en-US" sz="950" dirty="0">
-                <a:solidFill>
-                  <a:srgbClr val="1E293B"/>
-                </a:solidFill>
-                <a:latin typeface="Microsoft YaHei" pitchFamily="34" charset="0"/>
-                <a:ea typeface="Microsoft YaHei" pitchFamily="34" charset="-122"/>
-                <a:cs typeface="Microsoft YaHei" pitchFamily="34" charset="-120"/>
-              </a:rPr>
-              <a:t>① 分类优化转移支付：一般性向低自给率倾斜，专项引入绩效竞争机制</a:t>
-            </a:r>
-            <a:endParaRPr lang="en-US" sz="950" dirty="0"/>
-          </a:p>
-        </p:txBody>
-      </p:sp>
-      <p:sp>
-        <p:nvSpPr>
-          <p:cNvPr id="15" name="Text 13"/>
-          <p:cNvSpPr/>
-          <p:nvPr/>
-        </p:nvSpPr>
-        <p:spPr>
-          <a:xfrm>
-            <a:off x="4846320" y="2075688"/>
-            <a:ext cx="3931920" cy="502920"/>
-          </a:xfrm>
-          <a:prstGeom prst="rect">
-            <a:avLst/>
-          </a:prstGeom>
-          <a:noFill/>
-          <a:ln/>
-        </p:spPr>
-        <p:txBody>
-          <a:bodyPr wrap="square" rtlCol="0" anchor="ctr"/>
-          <a:lstStyle/>
-          <a:p>
-            <a:pPr indent="0" marL="0">
-              <a:buNone/>
-            </a:pPr>
-            <a:r>
-              <a:rPr lang="en-US" sz="950" dirty="0">
-                <a:solidFill>
-                  <a:srgbClr val="1E293B"/>
-                </a:solidFill>
-                <a:latin typeface="Microsoft YaHei" pitchFamily="34" charset="0"/>
-                <a:ea typeface="Microsoft YaHei" pitchFamily="34" charset="-122"/>
-                <a:cs typeface="Microsoft YaHei" pitchFamily="34" charset="-120"/>
-              </a:rPr>
-              <a:t>② 推动地方税源建设：培育地方主体税种，增强自主造血能力</a:t>
-            </a:r>
-            <a:endParaRPr lang="en-US" sz="950" dirty="0"/>
-          </a:p>
-        </p:txBody>
-      </p:sp>
-      <p:sp>
-        <p:nvSpPr>
-          <p:cNvPr id="16" name="Text 14"/>
-          <p:cNvSpPr/>
-          <p:nvPr/>
-        </p:nvSpPr>
-        <p:spPr>
-          <a:xfrm>
-            <a:off x="4846320" y="2734056"/>
-            <a:ext cx="3931920" cy="502920"/>
-          </a:xfrm>
-          <a:prstGeom prst="rect">
-            <a:avLst/>
-          </a:prstGeom>
-          <a:noFill/>
-          <a:ln/>
-        </p:spPr>
-        <p:txBody>
-          <a:bodyPr wrap="square" rtlCol="0" anchor="ctr"/>
-          <a:lstStyle/>
-          <a:p>
-            <a:pPr indent="0" marL="0">
-              <a:buNone/>
-            </a:pPr>
-            <a:r>
-              <a:rPr lang="en-US" sz="950" dirty="0">
-                <a:solidFill>
-                  <a:srgbClr val="1E293B"/>
-                </a:solidFill>
-                <a:latin typeface="Microsoft YaHei" pitchFamily="34" charset="0"/>
-                <a:ea typeface="Microsoft YaHei" pitchFamily="34" charset="-122"/>
-                <a:cs typeface="Microsoft YaHei" pitchFamily="34" charset="-120"/>
-              </a:rPr>
-              <a:t>③ 建立动态监测体系：面板数据年度跟踪，差异化帮扶避免一刀切</a:t>
-            </a:r>
-            <a:endParaRPr lang="en-US" sz="950" dirty="0"/>
-          </a:p>
-        </p:txBody>
-      </p:sp>
-      <p:sp>
-        <p:nvSpPr>
-          <p:cNvPr id="17" name="Text 15"/>
-          <p:cNvSpPr/>
-          <p:nvPr/>
-        </p:nvSpPr>
-        <p:spPr>
-          <a:xfrm>
-            <a:off x="4846320" y="3392424"/>
-            <a:ext cx="3931920" cy="502920"/>
-          </a:xfrm>
-          <a:prstGeom prst="rect">
-            <a:avLst/>
-          </a:prstGeom>
-          <a:noFill/>
-          <a:ln/>
-        </p:spPr>
-        <p:txBody>
-          <a:bodyPr wrap="square" rtlCol="0" anchor="ctr"/>
-          <a:lstStyle/>
-          <a:p>
-            <a:pPr indent="0" marL="0">
-              <a:buNone/>
-            </a:pPr>
-            <a:r>
-              <a:rPr lang="en-US" sz="950" dirty="0">
-                <a:solidFill>
-                  <a:srgbClr val="1E293B"/>
-                </a:solidFill>
-                <a:latin typeface="Microsoft YaHei" pitchFamily="34" charset="0"/>
-                <a:ea typeface="Microsoft YaHei" pitchFamily="34" charset="-122"/>
-                <a:cs typeface="Microsoft YaHei" pitchFamily="34" charset="-120"/>
-              </a:rPr>
-              <a:t>④ 考虑空间溢出效应：高依赖省份集群区域需协同政策支持</a:t>
-            </a:r>
-            <a:endParaRPr lang="en-US" sz="950" dirty="0"/>
-          </a:p>
-        </p:txBody>
-      </p:sp>
-      <p:sp>
-        <p:nvSpPr>
-          <p:cNvPr id="18" name="Shape 16"/>
-          <p:cNvSpPr/>
-          <p:nvPr/>
-        </p:nvSpPr>
-        <p:spPr>
-          <a:xfrm>
-            <a:off x="274320" y="4160520"/>
-            <a:ext cx="8595360" cy="347472"/>
-          </a:xfrm>
-          <a:prstGeom prst="rect">
-            <a:avLst/>
-          </a:prstGeom>
-          <a:solidFill>
-            <a:srgbClr val="F5F7FA"/>
-          </a:solidFill>
-          <a:ln/>
-        </p:spPr>
-      </p:sp>
-      <p:sp>
-        <p:nvSpPr>
-          <p:cNvPr id="19" name="Text 17"/>
-          <p:cNvSpPr/>
-          <p:nvPr/>
-        </p:nvSpPr>
-        <p:spPr>
-          <a:xfrm>
-            <a:off x="457200" y="4160520"/>
-            <a:ext cx="8229600" cy="347472"/>
-          </a:xfrm>
-          <a:prstGeom prst="rect">
-            <a:avLst/>
-          </a:prstGeom>
-          <a:noFill/>
-          <a:ln/>
-        </p:spPr>
-        <p:txBody>
-          <a:bodyPr wrap="square" rtlCol="0" anchor="ctr"/>
-          <a:lstStyle/>
-          <a:p>
-            <a:pPr indent="0" marL="0">
-              <a:buNone/>
-            </a:pPr>
-            <a:r>
-              <a:rPr lang="en-US" sz="1000" dirty="0">
-                <a:solidFill>
-                  <a:srgbClr val="64748B"/>
-                </a:solidFill>
-                <a:latin typeface="Microsoft YaHei" pitchFamily="34" charset="0"/>
-                <a:ea typeface="Microsoft YaHei" pitchFamily="34" charset="-122"/>
-                <a:cs typeface="Microsoft YaHei" pitchFamily="34" charset="-120"/>
-              </a:rPr>
-              <a:t>局限与展望：转移支付未区分一般性/专项 → 可引入空间滞后模型(SLM)量化溢出效应 → 对接教育/医疗等社会产出指标</a:t>
-            </a:r>
-            <a:endParaRPr lang="en-US" sz="1000" dirty="0"/>
+              <a:t>第三部分：回归分析 — 因果识别</a:t>
+            </a:r>
+            <a:endParaRPr lang="en-US" sz="3200" dirty="0"/>
           </a:p>
         </p:txBody>
       </p:sp>
@@ -3076,7 +3343,7 @@
                 <a:ea typeface="Microsoft YaHei" pitchFamily="34" charset="-122"/>
                 <a:cs typeface="Microsoft YaHei" pitchFamily="34" charset="-120"/>
               </a:rPr>
-              <a:t>方法论反思：AI辅助开发的实践启示</a:t>
+              <a:t>发现六：面板固定效应回归</a:t>
             </a:r>
             <a:endParaRPr lang="en-US" sz="2400" dirty="0"/>
           </a:p>
@@ -3102,6 +3369,1296 @@
           <a:ln/>
         </p:spPr>
       </p:sp>
+      <p:pic>
+        <p:nvPicPr>
+          <p:cNvPr id="4" name="Image 0" descr="preencoded.png">    </p:cNvPr>
+          <p:cNvPicPr>
+            <a:picLocks noChangeAspect="1"/>
+          </p:cNvPicPr>
+          <p:nvPr/>
+        </p:nvPicPr>
+        <p:blipFill>
+          <a:blip r:embed="rId1"/>
+          <a:stretch>
+            <a:fillRect/>
+          </a:stretch>
+        </p:blipFill>
+        <p:spPr>
+          <a:xfrm>
+            <a:off x="91440" y="822960"/>
+            <a:ext cx="9144000" cy="3840480"/>
+          </a:xfrm>
+          <a:prstGeom prst="rect">
+            <a:avLst/>
+          </a:prstGeom>
+        </p:spPr>
+      </p:pic>
+      <p:sp>
+        <p:nvSpPr>
+          <p:cNvPr id="5" name="Shape 2"/>
+          <p:cNvSpPr/>
+          <p:nvPr/>
+        </p:nvSpPr>
+        <p:spPr>
+          <a:xfrm>
+            <a:off x="274320" y="4846320"/>
+            <a:ext cx="8595360" cy="411480"/>
+          </a:xfrm>
+          <a:prstGeom prst="rect">
+            <a:avLst/>
+          </a:prstGeom>
+          <a:solidFill>
+            <a:srgbClr val="1F4E79"/>
+          </a:solidFill>
+          <a:ln/>
+        </p:spPr>
+      </p:sp>
+      <p:sp>
+        <p:nvSpPr>
+          <p:cNvPr id="6" name="Text 3"/>
+          <p:cNvSpPr/>
+          <p:nvPr/>
+        </p:nvSpPr>
+        <p:spPr>
+          <a:xfrm>
+            <a:off x="457200" y="4846320"/>
+            <a:ext cx="8229600" cy="411480"/>
+          </a:xfrm>
+          <a:prstGeom prst="rect">
+            <a:avLst/>
+          </a:prstGeom>
+          <a:noFill/>
+          <a:ln/>
+        </p:spPr>
+        <p:txBody>
+          <a:bodyPr wrap="square" rtlCol="0" anchor="ctr"/>
+          <a:lstStyle/>
+          <a:p>
+            <a:pPr algn="ctr" indent="0" marL="0">
+              <a:buNone/>
+            </a:pPr>
+            <a:r>
+              <a:rPr lang="en-US" sz="1200" b="1" dirty="0">
+                <a:solidFill>
+                  <a:srgbClr val="FFFFFF"/>
+                </a:solidFill>
+                <a:latin typeface="Microsoft YaHei" pitchFamily="34" charset="0"/>
+                <a:ea typeface="Microsoft YaHei" pitchFamily="34" charset="-122"/>
+                <a:cs typeface="Microsoft YaHei" pitchFamily="34" charset="-120"/>
+              </a:rPr>
+              <a:t>ln(人均GDP)系数显著负向 · ln(人口)系数显著正向 · 控制省份FE和时间FE</a:t>
+            </a:r>
+            <a:endParaRPr lang="en-US" sz="1200" dirty="0"/>
+          </a:p>
+        </p:txBody>
+      </p:sp>
+    </p:spTree>
+  </p:cSld>
+  <p:clrMapOvr>
+    <a:masterClrMapping/>
+  </p:clrMapOvr>
+</p:sld>
+</file>
+
+<file path=ppt/slides/slide13.xml><?xml version="1.0" encoding="utf-8"?>
+<p:sld xmlns:a="http://schemas.openxmlformats.org/drawingml/2006/main" xmlns:r="http://schemas.openxmlformats.org/officeDocument/2006/relationships" xmlns:p="http://schemas.openxmlformats.org/presentationml/2006/main">
+  <p:cSld name="Slide 13">
+    <p:bg>
+      <p:bgPr>
+        <a:solidFill>
+          <a:srgbClr val="FFFFFF"/>
+        </a:solidFill>
+      </p:bgPr>
+    </p:bg>
+    <p:spTree>
+      <p:nvGrpSpPr>
+        <p:cNvPr id="1" name=""/>
+        <p:cNvGrpSpPr/>
+        <p:nvPr/>
+      </p:nvGrpSpPr>
+      <p:grpSpPr>
+        <a:xfrm>
+          <a:off x="0" y="0"/>
+          <a:ext cx="0" cy="0"/>
+          <a:chOff x="0" y="0"/>
+          <a:chExt cx="0" cy="0"/>
+        </a:xfrm>
+      </p:grpSpPr>
+      <p:sp>
+        <p:nvSpPr>
+          <p:cNvPr id="2" name="Text 0"/>
+          <p:cNvSpPr/>
+          <p:nvPr/>
+        </p:nvSpPr>
+        <p:spPr>
+          <a:xfrm>
+            <a:off x="457200" y="182880"/>
+            <a:ext cx="8229600" cy="502920"/>
+          </a:xfrm>
+          <a:prstGeom prst="rect">
+            <a:avLst/>
+          </a:prstGeom>
+          <a:noFill/>
+          <a:ln/>
+        </p:spPr>
+        <p:txBody>
+          <a:bodyPr wrap="square" rtlCol="0" anchor="ctr"/>
+          <a:lstStyle/>
+          <a:p>
+            <a:pPr indent="0" marL="0">
+              <a:buNone/>
+            </a:pPr>
+            <a:r>
+              <a:rPr lang="en-US" sz="2400" b="1" dirty="0">
+                <a:solidFill>
+                  <a:srgbClr val="1A3C5E"/>
+                </a:solidFill>
+                <a:latin typeface="Microsoft YaHei" pitchFamily="34" charset="0"/>
+                <a:ea typeface="Microsoft YaHei" pitchFamily="34" charset="-122"/>
+                <a:cs typeface="Microsoft YaHei" pitchFamily="34" charset="-120"/>
+              </a:rPr>
+              <a:t>发现七：分位数回归 — 异质性分析</a:t>
+            </a:r>
+            <a:endParaRPr lang="en-US" sz="2400" dirty="0"/>
+          </a:p>
+        </p:txBody>
+      </p:sp>
+      <p:sp>
+        <p:nvSpPr>
+          <p:cNvPr id="3" name="Shape 1"/>
+          <p:cNvSpPr/>
+          <p:nvPr/>
+        </p:nvSpPr>
+        <p:spPr>
+          <a:xfrm>
+            <a:off x="457200" y="685800"/>
+            <a:ext cx="914400" cy="27432"/>
+          </a:xfrm>
+          <a:prstGeom prst="rect">
+            <a:avLst/>
+          </a:prstGeom>
+          <a:solidFill>
+            <a:srgbClr val="2E75B6"/>
+          </a:solidFill>
+          <a:ln/>
+        </p:spPr>
+      </p:sp>
+      <p:pic>
+        <p:nvPicPr>
+          <p:cNvPr id="4" name="Image 0" descr="preencoded.png">    </p:cNvPr>
+          <p:cNvPicPr>
+            <a:picLocks noChangeAspect="1"/>
+          </p:cNvPicPr>
+          <p:nvPr/>
+        </p:nvPicPr>
+        <p:blipFill>
+          <a:blip r:embed="rId1"/>
+          <a:stretch>
+            <a:fillRect/>
+          </a:stretch>
+        </p:blipFill>
+        <p:spPr>
+          <a:xfrm>
+            <a:off x="91440" y="822960"/>
+            <a:ext cx="9144000" cy="3840480"/>
+          </a:xfrm>
+          <a:prstGeom prst="rect">
+            <a:avLst/>
+          </a:prstGeom>
+        </p:spPr>
+      </p:pic>
+      <p:sp>
+        <p:nvSpPr>
+          <p:cNvPr id="5" name="Shape 2"/>
+          <p:cNvSpPr/>
+          <p:nvPr/>
+        </p:nvSpPr>
+        <p:spPr>
+          <a:xfrm>
+            <a:off x="274320" y="4846320"/>
+            <a:ext cx="8595360" cy="411480"/>
+          </a:xfrm>
+          <a:prstGeom prst="rect">
+            <a:avLst/>
+          </a:prstGeom>
+          <a:solidFill>
+            <a:srgbClr val="C0392B"/>
+          </a:solidFill>
+          <a:ln/>
+        </p:spPr>
+      </p:sp>
+      <p:sp>
+        <p:nvSpPr>
+          <p:cNvPr id="6" name="Text 3"/>
+          <p:cNvSpPr/>
+          <p:nvPr/>
+        </p:nvSpPr>
+        <p:spPr>
+          <a:xfrm>
+            <a:off x="457200" y="4846320"/>
+            <a:ext cx="8229600" cy="411480"/>
+          </a:xfrm>
+          <a:prstGeom prst="rect">
+            <a:avLst/>
+          </a:prstGeom>
+          <a:noFill/>
+          <a:ln/>
+        </p:spPr>
+        <p:txBody>
+          <a:bodyPr wrap="square" rtlCol="0" anchor="ctr"/>
+          <a:lstStyle/>
+          <a:p>
+            <a:pPr algn="ctr" indent="0" marL="0">
+              <a:buNone/>
+            </a:pPr>
+            <a:r>
+              <a:rPr lang="en-US" sz="1200" b="1" dirty="0">
+                <a:solidFill>
+                  <a:srgbClr val="FFFFFF"/>
+                </a:solidFill>
+                <a:latin typeface="Microsoft YaHei" pitchFamily="34" charset="0"/>
+                <a:ea typeface="Microsoft YaHei" pitchFamily="34" charset="-122"/>
+                <a:cs typeface="Microsoft YaHei" pitchFamily="34" charset="-120"/>
+              </a:rPr>
+              <a:t>低依赖分位点：GDP效应更强 · 高依赖分位点：人口效应更显著</a:t>
+            </a:r>
+            <a:endParaRPr lang="en-US" sz="1200" dirty="0"/>
+          </a:p>
+        </p:txBody>
+      </p:sp>
+    </p:spTree>
+  </p:cSld>
+  <p:clrMapOvr>
+    <a:masterClrMapping/>
+  </p:clrMapOvr>
+</p:sld>
+</file>
+
+<file path=ppt/slides/slide14.xml><?xml version="1.0" encoding="utf-8"?>
+<p:sld xmlns:a="http://schemas.openxmlformats.org/drawingml/2006/main" xmlns:r="http://schemas.openxmlformats.org/officeDocument/2006/relationships" xmlns:p="http://schemas.openxmlformats.org/presentationml/2006/main">
+  <p:cSld name="Slide 14">
+    <p:bg>
+      <p:bgPr>
+        <a:solidFill>
+          <a:srgbClr val="1A3C5E"/>
+        </a:solidFill>
+      </p:bgPr>
+    </p:bg>
+    <p:spTree>
+      <p:nvGrpSpPr>
+        <p:cNvPr id="1" name=""/>
+        <p:cNvGrpSpPr/>
+        <p:nvPr/>
+      </p:nvGrpSpPr>
+      <p:grpSpPr>
+        <a:xfrm>
+          <a:off x="0" y="0"/>
+          <a:ext cx="0" cy="0"/>
+          <a:chOff x="0" y="0"/>
+          <a:chExt cx="0" cy="0"/>
+        </a:xfrm>
+      </p:grpSpPr>
+      <p:sp>
+        <p:nvSpPr>
+          <p:cNvPr id="2" name="Shape 0"/>
+          <p:cNvSpPr/>
+          <p:nvPr/>
+        </p:nvSpPr>
+        <p:spPr>
+          <a:xfrm>
+            <a:off x="457200" y="2286000"/>
+            <a:ext cx="54864" cy="914400"/>
+          </a:xfrm>
+          <a:prstGeom prst="rect">
+            <a:avLst/>
+          </a:prstGeom>
+          <a:solidFill>
+            <a:srgbClr val="C0392B"/>
+          </a:solidFill>
+          <a:ln/>
+        </p:spPr>
+      </p:sp>
+      <p:sp>
+        <p:nvSpPr>
+          <p:cNvPr id="3" name="Text 1"/>
+          <p:cNvSpPr/>
+          <p:nvPr/>
+        </p:nvSpPr>
+        <p:spPr>
+          <a:xfrm>
+            <a:off x="731520" y="2286000"/>
+            <a:ext cx="7315200" cy="914400"/>
+          </a:xfrm>
+          <a:prstGeom prst="rect">
+            <a:avLst/>
+          </a:prstGeom>
+          <a:noFill/>
+          <a:ln/>
+        </p:spPr>
+        <p:txBody>
+          <a:bodyPr wrap="square" rtlCol="0" anchor="ctr"/>
+          <a:lstStyle/>
+          <a:p>
+            <a:pPr indent="0" marL="0">
+              <a:buNone/>
+            </a:pPr>
+            <a:r>
+              <a:rPr lang="en-US" sz="3200" b="1" dirty="0">
+                <a:solidFill>
+                  <a:srgbClr val="FFFFFF"/>
+                </a:solidFill>
+                <a:latin typeface="Microsoft YaHei" pitchFamily="34" charset="0"/>
+                <a:ea typeface="Microsoft YaHei" pitchFamily="34" charset="-122"/>
+                <a:cs typeface="Microsoft YaHei" pitchFamily="34" charset="-120"/>
+              </a:rPr>
+              <a:t>第四部分：空间计量分析</a:t>
+            </a:r>
+            <a:endParaRPr lang="en-US" sz="3200" dirty="0"/>
+          </a:p>
+        </p:txBody>
+      </p:sp>
+    </p:spTree>
+  </p:cSld>
+  <p:clrMapOvr>
+    <a:masterClrMapping/>
+  </p:clrMapOvr>
+</p:sld>
+</file>
+
+<file path=ppt/slides/slide15.xml><?xml version="1.0" encoding="utf-8"?>
+<p:sld xmlns:a="http://schemas.openxmlformats.org/drawingml/2006/main" xmlns:r="http://schemas.openxmlformats.org/officeDocument/2006/relationships" xmlns:p="http://schemas.openxmlformats.org/presentationml/2006/main">
+  <p:cSld name="Slide 15">
+    <p:bg>
+      <p:bgPr>
+        <a:solidFill>
+          <a:srgbClr val="FFFFFF"/>
+        </a:solidFill>
+      </p:bgPr>
+    </p:bg>
+    <p:spTree>
+      <p:nvGrpSpPr>
+        <p:cNvPr id="1" name=""/>
+        <p:cNvGrpSpPr/>
+        <p:nvPr/>
+      </p:nvGrpSpPr>
+      <p:grpSpPr>
+        <a:xfrm>
+          <a:off x="0" y="0"/>
+          <a:ext cx="0" cy="0"/>
+          <a:chOff x="0" y="0"/>
+          <a:chExt cx="0" cy="0"/>
+        </a:xfrm>
+      </p:grpSpPr>
+      <p:sp>
+        <p:nvSpPr>
+          <p:cNvPr id="2" name="Text 0"/>
+          <p:cNvSpPr/>
+          <p:nvPr/>
+        </p:nvSpPr>
+        <p:spPr>
+          <a:xfrm>
+            <a:off x="457200" y="182880"/>
+            <a:ext cx="8229600" cy="502920"/>
+          </a:xfrm>
+          <a:prstGeom prst="rect">
+            <a:avLst/>
+          </a:prstGeom>
+          <a:noFill/>
+          <a:ln/>
+        </p:spPr>
+        <p:txBody>
+          <a:bodyPr wrap="square" rtlCol="0" anchor="ctr"/>
+          <a:lstStyle/>
+          <a:p>
+            <a:pPr indent="0" marL="0">
+              <a:buNone/>
+            </a:pPr>
+            <a:r>
+              <a:rPr lang="en-US" sz="2400" b="1" dirty="0">
+                <a:solidFill>
+                  <a:srgbClr val="1A3C5E"/>
+                </a:solidFill>
+                <a:latin typeface="Microsoft YaHei" pitchFamily="34" charset="0"/>
+                <a:ea typeface="Microsoft YaHei" pitchFamily="34" charset="-122"/>
+                <a:cs typeface="Microsoft YaHei" pitchFamily="34" charset="-120"/>
+              </a:rPr>
+              <a:t>发现八：空间聚集特征 — Moran's I检验</a:t>
+            </a:r>
+            <a:endParaRPr lang="en-US" sz="2400" dirty="0"/>
+          </a:p>
+        </p:txBody>
+      </p:sp>
+      <p:sp>
+        <p:nvSpPr>
+          <p:cNvPr id="3" name="Shape 1"/>
+          <p:cNvSpPr/>
+          <p:nvPr/>
+        </p:nvSpPr>
+        <p:spPr>
+          <a:xfrm>
+            <a:off x="457200" y="685800"/>
+            <a:ext cx="914400" cy="27432"/>
+          </a:xfrm>
+          <a:prstGeom prst="rect">
+            <a:avLst/>
+          </a:prstGeom>
+          <a:solidFill>
+            <a:srgbClr val="2E75B6"/>
+          </a:solidFill>
+          <a:ln/>
+        </p:spPr>
+      </p:sp>
+      <p:pic>
+        <p:nvPicPr>
+          <p:cNvPr id="4" name="Image 0" descr="preencoded.png">    </p:cNvPr>
+          <p:cNvPicPr>
+            <a:picLocks noChangeAspect="1"/>
+          </p:cNvPicPr>
+          <p:nvPr/>
+        </p:nvPicPr>
+        <p:blipFill>
+          <a:blip r:embed="rId1"/>
+          <a:stretch>
+            <a:fillRect/>
+          </a:stretch>
+        </p:blipFill>
+        <p:spPr>
+          <a:xfrm>
+            <a:off x="91440" y="822960"/>
+            <a:ext cx="9144000" cy="3840480"/>
+          </a:xfrm>
+          <a:prstGeom prst="rect">
+            <a:avLst/>
+          </a:prstGeom>
+        </p:spPr>
+      </p:pic>
+      <p:sp>
+        <p:nvSpPr>
+          <p:cNvPr id="5" name="Shape 2"/>
+          <p:cNvSpPr/>
+          <p:nvPr/>
+        </p:nvSpPr>
+        <p:spPr>
+          <a:xfrm>
+            <a:off x="274320" y="4846320"/>
+            <a:ext cx="8595360" cy="411480"/>
+          </a:xfrm>
+          <a:prstGeom prst="rect">
+            <a:avLst/>
+          </a:prstGeom>
+          <a:solidFill>
+            <a:srgbClr val="27AE60"/>
+          </a:solidFill>
+          <a:ln/>
+        </p:spPr>
+      </p:sp>
+      <p:sp>
+        <p:nvSpPr>
+          <p:cNvPr id="6" name="Text 3"/>
+          <p:cNvSpPr/>
+          <p:nvPr/>
+        </p:nvSpPr>
+        <p:spPr>
+          <a:xfrm>
+            <a:off x="457200" y="4846320"/>
+            <a:ext cx="8229600" cy="411480"/>
+          </a:xfrm>
+          <a:prstGeom prst="rect">
+            <a:avLst/>
+          </a:prstGeom>
+          <a:noFill/>
+          <a:ln/>
+        </p:spPr>
+        <p:txBody>
+          <a:bodyPr wrap="square" rtlCol="0" anchor="ctr"/>
+          <a:lstStyle/>
+          <a:p>
+            <a:pPr algn="ctr" indent="0" marL="0">
+              <a:buNone/>
+            </a:pPr>
+            <a:r>
+              <a:rPr lang="en-US" sz="1200" b="1" dirty="0">
+                <a:solidFill>
+                  <a:srgbClr val="FFFFFF"/>
+                </a:solidFill>
+                <a:latin typeface="Microsoft YaHei" pitchFamily="34" charset="0"/>
+                <a:ea typeface="Microsoft YaHei" pitchFamily="34" charset="-122"/>
+                <a:cs typeface="Microsoft YaHei" pitchFamily="34" charset="-120"/>
+              </a:rPr>
+              <a:t>Moran's I = 0.42（p &lt; 0.001）· 高依赖省份呈现空间集群特征</a:t>
+            </a:r>
+            <a:endParaRPr lang="en-US" sz="1200" dirty="0"/>
+          </a:p>
+        </p:txBody>
+      </p:sp>
+    </p:spTree>
+  </p:cSld>
+  <p:clrMapOvr>
+    <a:masterClrMapping/>
+  </p:clrMapOvr>
+</p:sld>
+</file>
+
+<file path=ppt/slides/slide16.xml><?xml version="1.0" encoding="utf-8"?>
+<p:sld xmlns:a="http://schemas.openxmlformats.org/drawingml/2006/main" xmlns:r="http://schemas.openxmlformats.org/officeDocument/2006/relationships" xmlns:p="http://schemas.openxmlformats.org/presentationml/2006/main">
+  <p:cSld name="Slide 16">
+    <p:bg>
+      <p:bgPr>
+        <a:solidFill>
+          <a:srgbClr val="FFFFFF"/>
+        </a:solidFill>
+      </p:bgPr>
+    </p:bg>
+    <p:spTree>
+      <p:nvGrpSpPr>
+        <p:cNvPr id="1" name=""/>
+        <p:cNvGrpSpPr/>
+        <p:nvPr/>
+      </p:nvGrpSpPr>
+      <p:grpSpPr>
+        <a:xfrm>
+          <a:off x="0" y="0"/>
+          <a:ext cx="0" cy="0"/>
+          <a:chOff x="0" y="0"/>
+          <a:chExt cx="0" cy="0"/>
+        </a:xfrm>
+      </p:grpSpPr>
+      <p:sp>
+        <p:nvSpPr>
+          <p:cNvPr id="2" name="Text 0"/>
+          <p:cNvSpPr/>
+          <p:nvPr/>
+        </p:nvSpPr>
+        <p:spPr>
+          <a:xfrm>
+            <a:off x="457200" y="182880"/>
+            <a:ext cx="8229600" cy="502920"/>
+          </a:xfrm>
+          <a:prstGeom prst="rect">
+            <a:avLst/>
+          </a:prstGeom>
+          <a:noFill/>
+          <a:ln/>
+        </p:spPr>
+        <p:txBody>
+          <a:bodyPr wrap="square" rtlCol="0" anchor="ctr"/>
+          <a:lstStyle/>
+          <a:p>
+            <a:pPr indent="0" marL="0">
+              <a:buNone/>
+            </a:pPr>
+            <a:r>
+              <a:rPr lang="en-US" sz="2400" b="1" dirty="0">
+                <a:solidFill>
+                  <a:srgbClr val="1A3C5E"/>
+                </a:solidFill>
+                <a:latin typeface="Microsoft YaHei" pitchFamily="34" charset="0"/>
+                <a:ea typeface="Microsoft YaHei" pitchFamily="34" charset="-122"/>
+                <a:cs typeface="Microsoft YaHei" pitchFamily="34" charset="-120"/>
+              </a:rPr>
+              <a:t>结论与政策启示</a:t>
+            </a:r>
+            <a:endParaRPr lang="en-US" sz="2400" dirty="0"/>
+          </a:p>
+        </p:txBody>
+      </p:sp>
+      <p:sp>
+        <p:nvSpPr>
+          <p:cNvPr id="3" name="Shape 1"/>
+          <p:cNvSpPr/>
+          <p:nvPr/>
+        </p:nvSpPr>
+        <p:spPr>
+          <a:xfrm>
+            <a:off x="457200" y="685800"/>
+            <a:ext cx="914400" cy="27432"/>
+          </a:xfrm>
+          <a:prstGeom prst="rect">
+            <a:avLst/>
+          </a:prstGeom>
+          <a:solidFill>
+            <a:srgbClr val="2E75B6"/>
+          </a:solidFill>
+          <a:ln/>
+        </p:spPr>
+      </p:sp>
+      <p:sp>
+        <p:nvSpPr>
+          <p:cNvPr id="4" name="Shape 2"/>
+          <p:cNvSpPr/>
+          <p:nvPr/>
+        </p:nvSpPr>
+        <p:spPr>
+          <a:xfrm>
+            <a:off x="274320" y="914400"/>
+            <a:ext cx="4114800" cy="347472"/>
+          </a:xfrm>
+          <a:prstGeom prst="rect">
+            <a:avLst/>
+          </a:prstGeom>
+          <a:solidFill>
+            <a:srgbClr val="1F4E79"/>
+          </a:solidFill>
+          <a:ln/>
+        </p:spPr>
+      </p:sp>
+      <p:sp>
+        <p:nvSpPr>
+          <p:cNvPr id="5" name="Text 3"/>
+          <p:cNvSpPr/>
+          <p:nvPr/>
+        </p:nvSpPr>
+        <p:spPr>
+          <a:xfrm>
+            <a:off x="274320" y="914400"/>
+            <a:ext cx="4114800" cy="347472"/>
+          </a:xfrm>
+          <a:prstGeom prst="rect">
+            <a:avLst/>
+          </a:prstGeom>
+          <a:noFill/>
+          <a:ln/>
+        </p:spPr>
+        <p:txBody>
+          <a:bodyPr wrap="square" rtlCol="0" anchor="ctr"/>
+          <a:lstStyle/>
+          <a:p>
+            <a:pPr algn="ctr" indent="0" marL="0">
+              <a:buNone/>
+            </a:pPr>
+            <a:r>
+              <a:rPr lang="en-US" sz="1400" b="1" dirty="0">
+                <a:solidFill>
+                  <a:srgbClr val="FFFFFF"/>
+                </a:solidFill>
+                <a:latin typeface="Microsoft YaHei" pitchFamily="34" charset="0"/>
+                <a:ea typeface="Microsoft YaHei" pitchFamily="34" charset="-122"/>
+                <a:cs typeface="Microsoft YaHei" pitchFamily="34" charset="-120"/>
+              </a:rPr>
+              <a:t>六项核心发现</a:t>
+            </a:r>
+            <a:endParaRPr lang="en-US" sz="1400" dirty="0"/>
+          </a:p>
+        </p:txBody>
+      </p:sp>
+      <p:sp>
+        <p:nvSpPr>
+          <p:cNvPr id="6" name="Text 4"/>
+          <p:cNvSpPr/>
+          <p:nvPr/>
+        </p:nvSpPr>
+        <p:spPr>
+          <a:xfrm>
+            <a:off x="365760" y="1417320"/>
+            <a:ext cx="3931920" cy="365760"/>
+          </a:xfrm>
+          <a:prstGeom prst="rect">
+            <a:avLst/>
+          </a:prstGeom>
+          <a:noFill/>
+          <a:ln/>
+        </p:spPr>
+        <p:txBody>
+          <a:bodyPr wrap="square" rtlCol="0" anchor="ctr"/>
+          <a:lstStyle/>
+          <a:p>
+            <a:pPr indent="0" marL="0">
+              <a:buNone/>
+            </a:pPr>
+            <a:r>
+              <a:rPr lang="en-US" sz="900" dirty="0">
+                <a:solidFill>
+                  <a:srgbClr val="1E293B"/>
+                </a:solidFill>
+                <a:latin typeface="Microsoft YaHei" pitchFamily="34" charset="0"/>
+                <a:ea typeface="Microsoft YaHei" pitchFamily="34" charset="-122"/>
+                <a:cs typeface="Microsoft YaHei" pitchFamily="34" charset="-120"/>
+              </a:rPr>
+              <a:t>① 均等化方向正确：低自给率省份人均转移支付是高自给率的5.4倍</a:t>
+            </a:r>
+            <a:endParaRPr lang="en-US" sz="900" dirty="0"/>
+          </a:p>
+        </p:txBody>
+      </p:sp>
+      <p:sp>
+        <p:nvSpPr>
+          <p:cNvPr id="7" name="Text 5"/>
+          <p:cNvSpPr/>
+          <p:nvPr/>
+        </p:nvSpPr>
+        <p:spPr>
+          <a:xfrm>
+            <a:off x="365760" y="1892808"/>
+            <a:ext cx="3931920" cy="365760"/>
+          </a:xfrm>
+          <a:prstGeom prst="rect">
+            <a:avLst/>
+          </a:prstGeom>
+          <a:noFill/>
+          <a:ln/>
+        </p:spPr>
+        <p:txBody>
+          <a:bodyPr wrap="square" rtlCol="0" anchor="ctr"/>
+          <a:lstStyle/>
+          <a:p>
+            <a:pPr indent="0" marL="0">
+              <a:buNone/>
+            </a:pPr>
+            <a:r>
+              <a:rPr lang="en-US" sz="900" dirty="0">
+                <a:solidFill>
+                  <a:srgbClr val="1E293B"/>
+                </a:solidFill>
+                <a:latin typeface="Microsoft YaHei" pitchFamily="34" charset="0"/>
+                <a:ea typeface="Microsoft YaHei" pitchFamily="34" charset="-122"/>
+                <a:cs typeface="Microsoft YaHei" pitchFamily="34" charset="-120"/>
+              </a:rPr>
+              <a:t>② 地区差距依然严峻：人均GDP京/甘相差4倍，转移支付托底但无法根本改变</a:t>
+            </a:r>
+            <a:endParaRPr lang="en-US" sz="900" dirty="0"/>
+          </a:p>
+        </p:txBody>
+      </p:sp>
+      <p:sp>
+        <p:nvSpPr>
+          <p:cNvPr id="8" name="Text 6"/>
+          <p:cNvSpPr/>
+          <p:nvPr/>
+        </p:nvSpPr>
+        <p:spPr>
+          <a:xfrm>
+            <a:off x="365760" y="2368296"/>
+            <a:ext cx="3931920" cy="365760"/>
+          </a:xfrm>
+          <a:prstGeom prst="rect">
+            <a:avLst/>
+          </a:prstGeom>
+          <a:noFill/>
+          <a:ln/>
+        </p:spPr>
+        <p:txBody>
+          <a:bodyPr wrap="square" rtlCol="0" anchor="ctr"/>
+          <a:lstStyle/>
+          <a:p>
+            <a:pPr indent="0" marL="0">
+              <a:buNone/>
+            </a:pPr>
+            <a:r>
+              <a:rPr lang="en-US" sz="900" dirty="0">
+                <a:solidFill>
+                  <a:srgbClr val="1E293B"/>
+                </a:solidFill>
+                <a:latin typeface="Microsoft YaHei" pitchFamily="34" charset="0"/>
+                <a:ea typeface="Microsoft YaHei" pitchFamily="34" charset="-122"/>
+                <a:cs typeface="Microsoft YaHei" pitchFamily="34" charset="-120"/>
+              </a:rPr>
+              <a:t>③ 整体依赖加深：全国平均依赖度从37%升至47%</a:t>
+            </a:r>
+            <a:endParaRPr lang="en-US" sz="900" dirty="0"/>
+          </a:p>
+        </p:txBody>
+      </p:sp>
+      <p:sp>
+        <p:nvSpPr>
+          <p:cNvPr id="9" name="Text 7"/>
+          <p:cNvSpPr/>
+          <p:nvPr/>
+        </p:nvSpPr>
+        <p:spPr>
+          <a:xfrm>
+            <a:off x="365760" y="2843784"/>
+            <a:ext cx="3931920" cy="365760"/>
+          </a:xfrm>
+          <a:prstGeom prst="rect">
+            <a:avLst/>
+          </a:prstGeom>
+          <a:noFill/>
+          <a:ln/>
+        </p:spPr>
+        <p:txBody>
+          <a:bodyPr wrap="square" rtlCol="0" anchor="ctr"/>
+          <a:lstStyle/>
+          <a:p>
+            <a:pPr indent="0" marL="0">
+              <a:buNone/>
+            </a:pPr>
+            <a:r>
+              <a:rPr lang="en-US" sz="900" dirty="0">
+                <a:solidFill>
+                  <a:srgbClr val="1E293B"/>
+                </a:solidFill>
+                <a:latin typeface="Microsoft YaHei" pitchFamily="34" charset="0"/>
+                <a:ea typeface="Microsoft YaHei" pitchFamily="34" charset="-122"/>
+                <a:cs typeface="Microsoft YaHei" pitchFamily="34" charset="-120"/>
+              </a:rPr>
+              <a:t>④ 三类划分有效：ANOVA F=62.10，组间差异极显著</a:t>
+            </a:r>
+            <a:endParaRPr lang="en-US" sz="900" dirty="0"/>
+          </a:p>
+        </p:txBody>
+      </p:sp>
+      <p:sp>
+        <p:nvSpPr>
+          <p:cNvPr id="10" name="Text 8"/>
+          <p:cNvSpPr/>
+          <p:nvPr/>
+        </p:nvSpPr>
+        <p:spPr>
+          <a:xfrm>
+            <a:off x="365760" y="3319272"/>
+            <a:ext cx="3931920" cy="365760"/>
+          </a:xfrm>
+          <a:prstGeom prst="rect">
+            <a:avLst/>
+          </a:prstGeom>
+          <a:noFill/>
+          <a:ln/>
+        </p:spPr>
+        <p:txBody>
+          <a:bodyPr wrap="square" rtlCol="0" anchor="ctr"/>
+          <a:lstStyle/>
+          <a:p>
+            <a:pPr indent="0" marL="0">
+              <a:buNone/>
+            </a:pPr>
+            <a:r>
+              <a:rPr lang="en-US" sz="900" dirty="0">
+                <a:solidFill>
+                  <a:srgbClr val="1E293B"/>
+                </a:solidFill>
+                <a:latin typeface="Microsoft YaHei" pitchFamily="34" charset="0"/>
+                <a:ea typeface="Microsoft YaHei" pitchFamily="34" charset="-122"/>
+                <a:cs typeface="Microsoft YaHei" pitchFamily="34" charset="-120"/>
+              </a:rPr>
+              <a:t>⑤ 面板回归证实：ln(人均GDP)显著负向，经济越发达依赖度越低</a:t>
+            </a:r>
+            <a:endParaRPr lang="en-US" sz="900" dirty="0"/>
+          </a:p>
+        </p:txBody>
+      </p:sp>
+      <p:sp>
+        <p:nvSpPr>
+          <p:cNvPr id="11" name="Text 9"/>
+          <p:cNvSpPr/>
+          <p:nvPr/>
+        </p:nvSpPr>
+        <p:spPr>
+          <a:xfrm>
+            <a:off x="365760" y="3794760"/>
+            <a:ext cx="3931920" cy="365760"/>
+          </a:xfrm>
+          <a:prstGeom prst="rect">
+            <a:avLst/>
+          </a:prstGeom>
+          <a:noFill/>
+          <a:ln/>
+        </p:spPr>
+        <p:txBody>
+          <a:bodyPr wrap="square" rtlCol="0" anchor="ctr"/>
+          <a:lstStyle/>
+          <a:p>
+            <a:pPr indent="0" marL="0">
+              <a:buNone/>
+            </a:pPr>
+            <a:r>
+              <a:rPr lang="en-US" sz="900" dirty="0">
+                <a:solidFill>
+                  <a:srgbClr val="1E293B"/>
+                </a:solidFill>
+                <a:latin typeface="Microsoft YaHei" pitchFamily="34" charset="0"/>
+                <a:ea typeface="Microsoft YaHei" pitchFamily="34" charset="-122"/>
+                <a:cs typeface="Microsoft YaHei" pitchFamily="34" charset="-120"/>
+              </a:rPr>
+              <a:t>⑥ 空间聚集显著：Moran's I=0.42***，高依赖省份呈现空间集群特征</a:t>
+            </a:r>
+            <a:endParaRPr lang="en-US" sz="900" dirty="0"/>
+          </a:p>
+        </p:txBody>
+      </p:sp>
+      <p:sp>
+        <p:nvSpPr>
+          <p:cNvPr id="12" name="Shape 10"/>
+          <p:cNvSpPr/>
+          <p:nvPr/>
+        </p:nvSpPr>
+        <p:spPr>
+          <a:xfrm>
+            <a:off x="4754880" y="914400"/>
+            <a:ext cx="4114800" cy="347472"/>
+          </a:xfrm>
+          <a:prstGeom prst="rect">
+            <a:avLst/>
+          </a:prstGeom>
+          <a:solidFill>
+            <a:srgbClr val="1A3C5E"/>
+          </a:solidFill>
+          <a:ln/>
+        </p:spPr>
+      </p:sp>
+      <p:sp>
+        <p:nvSpPr>
+          <p:cNvPr id="13" name="Text 11"/>
+          <p:cNvSpPr/>
+          <p:nvPr/>
+        </p:nvSpPr>
+        <p:spPr>
+          <a:xfrm>
+            <a:off x="4754880" y="914400"/>
+            <a:ext cx="4114800" cy="347472"/>
+          </a:xfrm>
+          <a:prstGeom prst="rect">
+            <a:avLst/>
+          </a:prstGeom>
+          <a:noFill/>
+          <a:ln/>
+        </p:spPr>
+        <p:txBody>
+          <a:bodyPr wrap="square" rtlCol="0" anchor="ctr"/>
+          <a:lstStyle/>
+          <a:p>
+            <a:pPr algn="ctr" indent="0" marL="0">
+              <a:buNone/>
+            </a:pPr>
+            <a:r>
+              <a:rPr lang="en-US" sz="1400" b="1" dirty="0">
+                <a:solidFill>
+                  <a:srgbClr val="FFFFFF"/>
+                </a:solidFill>
+                <a:latin typeface="Microsoft YaHei" pitchFamily="34" charset="0"/>
+                <a:ea typeface="Microsoft YaHei" pitchFamily="34" charset="-122"/>
+                <a:cs typeface="Microsoft YaHei" pitchFamily="34" charset="-120"/>
+              </a:rPr>
+              <a:t>政策启示</a:t>
+            </a:r>
+            <a:endParaRPr lang="en-US" sz="1400" dirty="0"/>
+          </a:p>
+        </p:txBody>
+      </p:sp>
+      <p:sp>
+        <p:nvSpPr>
+          <p:cNvPr id="14" name="Text 12"/>
+          <p:cNvSpPr/>
+          <p:nvPr/>
+        </p:nvSpPr>
+        <p:spPr>
+          <a:xfrm>
+            <a:off x="4846320" y="1417320"/>
+            <a:ext cx="3931920" cy="411480"/>
+          </a:xfrm>
+          <a:prstGeom prst="rect">
+            <a:avLst/>
+          </a:prstGeom>
+          <a:noFill/>
+          <a:ln/>
+        </p:spPr>
+        <p:txBody>
+          <a:bodyPr wrap="square" rtlCol="0" anchor="ctr"/>
+          <a:lstStyle/>
+          <a:p>
+            <a:pPr indent="0" marL="0">
+              <a:buNone/>
+            </a:pPr>
+            <a:r>
+              <a:rPr lang="en-US" sz="900" dirty="0">
+                <a:solidFill>
+                  <a:srgbClr val="1E293B"/>
+                </a:solidFill>
+                <a:latin typeface="Microsoft YaHei" pitchFamily="34" charset="0"/>
+                <a:ea typeface="Microsoft YaHei" pitchFamily="34" charset="-122"/>
+                <a:cs typeface="Microsoft YaHei" pitchFamily="34" charset="-120"/>
+              </a:rPr>
+              <a:t>① 优化转移支付结构：一般性向低自给率倾斜，专项引入绩效竞争</a:t>
+            </a:r>
+            <a:endParaRPr lang="en-US" sz="900" dirty="0"/>
+          </a:p>
+        </p:txBody>
+      </p:sp>
+      <p:sp>
+        <p:nvSpPr>
+          <p:cNvPr id="15" name="Text 13"/>
+          <p:cNvSpPr/>
+          <p:nvPr/>
+        </p:nvSpPr>
+        <p:spPr>
+          <a:xfrm>
+            <a:off x="4846320" y="1965960"/>
+            <a:ext cx="3931920" cy="411480"/>
+          </a:xfrm>
+          <a:prstGeom prst="rect">
+            <a:avLst/>
+          </a:prstGeom>
+          <a:noFill/>
+          <a:ln/>
+        </p:spPr>
+        <p:txBody>
+          <a:bodyPr wrap="square" rtlCol="0" anchor="ctr"/>
+          <a:lstStyle/>
+          <a:p>
+            <a:pPr indent="0" marL="0">
+              <a:buNone/>
+            </a:pPr>
+            <a:r>
+              <a:rPr lang="en-US" sz="900" dirty="0">
+                <a:solidFill>
+                  <a:srgbClr val="1E293B"/>
+                </a:solidFill>
+                <a:latin typeface="Microsoft YaHei" pitchFamily="34" charset="0"/>
+                <a:ea typeface="Microsoft YaHei" pitchFamily="34" charset="-122"/>
+                <a:cs typeface="Microsoft YaHei" pitchFamily="34" charset="-120"/>
+              </a:rPr>
+              <a:t>② 推动地方税源建设：培育地方主体税种，增强自主造血能力</a:t>
+            </a:r>
+            <a:endParaRPr lang="en-US" sz="900" dirty="0"/>
+          </a:p>
+        </p:txBody>
+      </p:sp>
+      <p:sp>
+        <p:nvSpPr>
+          <p:cNvPr id="16" name="Text 14"/>
+          <p:cNvSpPr/>
+          <p:nvPr/>
+        </p:nvSpPr>
+        <p:spPr>
+          <a:xfrm>
+            <a:off x="4846320" y="2514600"/>
+            <a:ext cx="3931920" cy="411480"/>
+          </a:xfrm>
+          <a:prstGeom prst="rect">
+            <a:avLst/>
+          </a:prstGeom>
+          <a:noFill/>
+          <a:ln/>
+        </p:spPr>
+        <p:txBody>
+          <a:bodyPr wrap="square" rtlCol="0" anchor="ctr"/>
+          <a:lstStyle/>
+          <a:p>
+            <a:pPr indent="0" marL="0">
+              <a:buNone/>
+            </a:pPr>
+            <a:r>
+              <a:rPr lang="en-US" sz="900" dirty="0">
+                <a:solidFill>
+                  <a:srgbClr val="1E293B"/>
+                </a:solidFill>
+                <a:latin typeface="Microsoft YaHei" pitchFamily="34" charset="0"/>
+                <a:ea typeface="Microsoft YaHei" pitchFamily="34" charset="-122"/>
+                <a:cs typeface="Microsoft YaHei" pitchFamily="34" charset="-120"/>
+              </a:rPr>
+              <a:t>③ 建立动态监测体系：面板数据年度跟踪，差异化帮扶</a:t>
+            </a:r>
+            <a:endParaRPr lang="en-US" sz="900" dirty="0"/>
+          </a:p>
+        </p:txBody>
+      </p:sp>
+      <p:sp>
+        <p:nvSpPr>
+          <p:cNvPr id="17" name="Text 15"/>
+          <p:cNvSpPr/>
+          <p:nvPr/>
+        </p:nvSpPr>
+        <p:spPr>
+          <a:xfrm>
+            <a:off x="4846320" y="3063240"/>
+            <a:ext cx="3931920" cy="411480"/>
+          </a:xfrm>
+          <a:prstGeom prst="rect">
+            <a:avLst/>
+          </a:prstGeom>
+          <a:noFill/>
+          <a:ln/>
+        </p:spPr>
+        <p:txBody>
+          <a:bodyPr wrap="square" rtlCol="0" anchor="ctr"/>
+          <a:lstStyle/>
+          <a:p>
+            <a:pPr indent="0" marL="0">
+              <a:buNone/>
+            </a:pPr>
+            <a:r>
+              <a:rPr lang="en-US" sz="900" dirty="0">
+                <a:solidFill>
+                  <a:srgbClr val="1E293B"/>
+                </a:solidFill>
+                <a:latin typeface="Microsoft YaHei" pitchFamily="34" charset="0"/>
+                <a:ea typeface="Microsoft YaHei" pitchFamily="34" charset="-122"/>
+                <a:cs typeface="Microsoft YaHei" pitchFamily="34" charset="-120"/>
+              </a:rPr>
+              <a:t>④ 考虑空间溢出效应：高依赖集群区域需协同政策支持</a:t>
+            </a:r>
+            <a:endParaRPr lang="en-US" sz="900" dirty="0"/>
+          </a:p>
+        </p:txBody>
+      </p:sp>
+      <p:sp>
+        <p:nvSpPr>
+          <p:cNvPr id="18" name="Text 16"/>
+          <p:cNvSpPr/>
+          <p:nvPr/>
+        </p:nvSpPr>
+        <p:spPr>
+          <a:xfrm>
+            <a:off x="4846320" y="3611880"/>
+            <a:ext cx="3931920" cy="411480"/>
+          </a:xfrm>
+          <a:prstGeom prst="rect">
+            <a:avLst/>
+          </a:prstGeom>
+          <a:noFill/>
+          <a:ln/>
+        </p:spPr>
+        <p:txBody>
+          <a:bodyPr wrap="square" rtlCol="0" anchor="ctr"/>
+          <a:lstStyle/>
+          <a:p>
+            <a:pPr indent="0" marL="0">
+              <a:buNone/>
+            </a:pPr>
+            <a:r>
+              <a:rPr lang="en-US" sz="900" dirty="0">
+                <a:solidFill>
+                  <a:srgbClr val="1E293B"/>
+                </a:solidFill>
+                <a:latin typeface="Microsoft YaHei" pitchFamily="34" charset="0"/>
+                <a:ea typeface="Microsoft YaHei" pitchFamily="34" charset="-122"/>
+                <a:cs typeface="Microsoft YaHei" pitchFamily="34" charset="-120"/>
+              </a:rPr>
+              <a:t>⑤ 完善分配公式：纳入人均GDP、人口、公共服务成本差异</a:t>
+            </a:r>
+            <a:endParaRPr lang="en-US" sz="900" dirty="0"/>
+          </a:p>
+        </p:txBody>
+      </p:sp>
+      <p:sp>
+        <p:nvSpPr>
+          <p:cNvPr id="19" name="Text 17"/>
+          <p:cNvSpPr/>
+          <p:nvPr/>
+        </p:nvSpPr>
+        <p:spPr>
+          <a:xfrm>
+            <a:off x="4846320" y="4160520"/>
+            <a:ext cx="3931920" cy="411480"/>
+          </a:xfrm>
+          <a:prstGeom prst="rect">
+            <a:avLst/>
+          </a:prstGeom>
+          <a:noFill/>
+          <a:ln/>
+        </p:spPr>
+        <p:txBody>
+          <a:bodyPr wrap="square" rtlCol="0" anchor="ctr"/>
+          <a:lstStyle/>
+          <a:p>
+            <a:pPr indent="0" marL="0">
+              <a:buNone/>
+            </a:pPr>
+            <a:r>
+              <a:rPr lang="en-US" sz="900" dirty="0">
+                <a:solidFill>
+                  <a:srgbClr val="1E293B"/>
+                </a:solidFill>
+                <a:latin typeface="Microsoft YaHei" pitchFamily="34" charset="0"/>
+                <a:ea typeface="Microsoft YaHei" pitchFamily="34" charset="-122"/>
+                <a:cs typeface="Microsoft YaHei" pitchFamily="34" charset="-120"/>
+              </a:rPr>
+              <a:t>⑥ 加强绩效评价：结果与资金分配挂钩，确保资金使用效率</a:t>
+            </a:r>
+            <a:endParaRPr lang="en-US" sz="900" dirty="0"/>
+          </a:p>
+        </p:txBody>
+      </p:sp>
+    </p:spTree>
+  </p:cSld>
+  <p:clrMapOvr>
+    <a:masterClrMapping/>
+  </p:clrMapOvr>
+</p:sld>
+</file>
+
+<file path=ppt/slides/slide17.xml><?xml version="1.0" encoding="utf-8"?>
+<p:sld xmlns:a="http://schemas.openxmlformats.org/drawingml/2006/main" xmlns:r="http://schemas.openxmlformats.org/officeDocument/2006/relationships" xmlns:p="http://schemas.openxmlformats.org/presentationml/2006/main">
+  <p:cSld name="Slide 17">
+    <p:bg>
+      <p:bgPr>
+        <a:solidFill>
+          <a:srgbClr val="FFFFFF"/>
+        </a:solidFill>
+      </p:bgPr>
+    </p:bg>
+    <p:spTree>
+      <p:nvGrpSpPr>
+        <p:cNvPr id="1" name=""/>
+        <p:cNvGrpSpPr/>
+        <p:nvPr/>
+      </p:nvGrpSpPr>
+      <p:grpSpPr>
+        <a:xfrm>
+          <a:off x="0" y="0"/>
+          <a:ext cx="0" cy="0"/>
+          <a:chOff x="0" y="0"/>
+          <a:chExt cx="0" cy="0"/>
+        </a:xfrm>
+      </p:grpSpPr>
+      <p:sp>
+        <p:nvSpPr>
+          <p:cNvPr id="2" name="Text 0"/>
+          <p:cNvSpPr/>
+          <p:nvPr/>
+        </p:nvSpPr>
+        <p:spPr>
+          <a:xfrm>
+            <a:off x="457200" y="182880"/>
+            <a:ext cx="8229600" cy="502920"/>
+          </a:xfrm>
+          <a:prstGeom prst="rect">
+            <a:avLst/>
+          </a:prstGeom>
+          <a:noFill/>
+          <a:ln/>
+        </p:spPr>
+        <p:txBody>
+          <a:bodyPr wrap="square" rtlCol="0" anchor="ctr"/>
+          <a:lstStyle/>
+          <a:p>
+            <a:pPr indent="0" marL="0">
+              <a:buNone/>
+            </a:pPr>
+            <a:r>
+              <a:rPr lang="en-US" sz="2400" b="1" dirty="0">
+                <a:solidFill>
+                  <a:srgbClr val="1A3C5E"/>
+                </a:solidFill>
+                <a:latin typeface="Microsoft YaHei" pitchFamily="34" charset="0"/>
+                <a:ea typeface="Microsoft YaHei" pitchFamily="34" charset="-122"/>
+                <a:cs typeface="Microsoft YaHei" pitchFamily="34" charset="-120"/>
+              </a:rPr>
+              <a:t>方法论反思：AI辅助开发的实践启示</a:t>
+            </a:r>
+            <a:endParaRPr lang="en-US" sz="2400" dirty="0"/>
+          </a:p>
+        </p:txBody>
+      </p:sp>
+      <p:sp>
+        <p:nvSpPr>
+          <p:cNvPr id="3" name="Shape 1"/>
+          <p:cNvSpPr/>
+          <p:nvPr/>
+        </p:nvSpPr>
+        <p:spPr>
+          <a:xfrm>
+            <a:off x="457200" y="685800"/>
+            <a:ext cx="914400" cy="27432"/>
+          </a:xfrm>
+          <a:prstGeom prst="rect">
+            <a:avLst/>
+          </a:prstGeom>
+          <a:solidFill>
+            <a:srgbClr val="2E75B6"/>
+          </a:solidFill>
+          <a:ln/>
+        </p:spPr>
+      </p:sp>
       <p:sp>
         <p:nvSpPr>
           <p:cNvPr id="4" name="Shape 2"/>
@@ -3524,7 +5081,7 @@
                 <a:ea typeface="Microsoft YaHei" pitchFamily="34" charset="-122"/>
                 <a:cs typeface="Microsoft YaHei" pitchFamily="34" charset="-120"/>
               </a:rPr>
-              <a:t>选题方向、指标体系、结论判断均由人拍板。AI负责代码生成和技术实现，效率提升约8倍（30h→4h）</a:t>
+              <a:t>选题方向、指标体系、结论判断均由人拍板</a:t>
             </a:r>
             <a:endParaRPr lang="en-US" sz="1000" dirty="0"/>
           </a:p>
@@ -3658,7 +5215,7 @@
                 <a:ea typeface="Microsoft YaHei" pitchFamily="34" charset="-122"/>
                 <a:cs typeface="Microsoft YaHei" pitchFamily="34" charset="-120"/>
               </a:rPr>
-              <a:t>计划单列市跳过规则、决算滞后回退逻辑、西藏88%依赖度的常识校验——人的判断是校准器</a:t>
+              <a:t>计划单列市跳过规则、决算滞后回退逻辑——人的判断是校准器</a:t>
             </a:r>
             <a:endParaRPr lang="en-US" sz="1000" dirty="0"/>
           </a:p>
@@ -3792,7 +5349,7 @@
                 <a:ea typeface="Microsoft YaHei" pitchFamily="34" charset="-122"/>
                 <a:cs typeface="Microsoft YaHei" pitchFamily="34" charset="-120"/>
               </a:rPr>
-              <a:t>可视化模块5轮调试：Plotly→px.choropleth→go.Figure→geopandas PNG，CDP验证通过≠用户本地可用</a:t>
+              <a:t>可视化模块5轮调试：Plotly→geopandas PNG</a:t>
             </a:r>
             <a:endParaRPr lang="en-US" sz="1000" dirty="0"/>
           </a:p>
@@ -3926,7 +5483,7 @@
                 <a:ea typeface="Microsoft YaHei" pitchFamily="34" charset="-122"/>
                 <a:cs typeface="Microsoft YaHei" pitchFamily="34" charset="-120"/>
               </a:rPr>
-              <a:t>分解→协作→验证的循环才是课程核心收获，工具（Python/AI）只是这一思维的载体</a:t>
+              <a:t>分解→协作→验证的循环才是课程核心收获</a:t>
             </a:r>
             <a:endParaRPr lang="en-US" sz="1000" dirty="0"/>
           </a:p>
@@ -4615,7 +6172,7 @@
                 <a:ea typeface="Microsoft YaHei" pitchFamily="34" charset="-122"/>
                 <a:cs typeface="Microsoft YaHei" pitchFamily="34" charset="-120"/>
               </a:rPr>
-              <a:t>研究方法：数据、指标与分析框架</a:t>
+              <a:t>数据来源与分析框架</a:t>
             </a:r>
             <a:endParaRPr lang="en-US" sz="2400" dirty="0"/>
           </a:p>
@@ -4776,23 +6333,6 @@
             </a:r>
             <a:endParaRPr lang="en-US" sz="1000" dirty="0"/>
           </a:p>
-          <a:p>
-            <a:pPr indent="0" marL="0">
-              <a:buNone/>
-            </a:pPr>
-            <a:r>
-              <a:rPr lang="en-US" sz="1000" dirty="0">
-                <a:solidFill>
-                  <a:srgbClr val="64748B"/>
-                </a:solidFill>
-                <a:latin typeface="Microsoft YaHei" pitchFamily="34" charset="0"/>
-                <a:ea typeface="Microsoft YaHei" pitchFamily="34" charset="-122"/>
-                <a:cs typeface="Microsoft YaHei" pitchFamily="34" charset="-120"/>
-              </a:rPr>
-              <a:t>EPS数据平台</a:t>
-            </a:r>
-            <a:endParaRPr lang="en-US" sz="1000" dirty="0"/>
-          </a:p>
         </p:txBody>
       </p:sp>
       <p:sp>
@@ -4891,23 +6431,6 @@
             </a:r>
             <a:endParaRPr lang="en-US" sz="1000" dirty="0"/>
           </a:p>
-          <a:p>
-            <a:pPr indent="0" marL="0">
-              <a:buNone/>
-            </a:pPr>
-            <a:r>
-              <a:rPr lang="en-US" sz="1000" dirty="0">
-                <a:solidFill>
-                  <a:srgbClr val="64748B"/>
-                </a:solidFill>
-                <a:latin typeface="Microsoft YaHei" pitchFamily="34" charset="0"/>
-                <a:ea typeface="Microsoft YaHei" pitchFamily="34" charset="-122"/>
-                <a:cs typeface="Microsoft YaHei" pitchFamily="34" charset="-120"/>
-              </a:rPr>
-              <a:t>EPS数据平台</a:t>
-            </a:r>
-            <a:endParaRPr lang="en-US" sz="1000" dirty="0"/>
-          </a:p>
         </p:txBody>
       </p:sp>
       <p:sp>
@@ -5006,23 +6529,6 @@
             </a:r>
             <a:endParaRPr lang="en-US" sz="1000" dirty="0"/>
           </a:p>
-          <a:p>
-            <a:pPr indent="0" marL="0">
-              <a:buNone/>
-            </a:pPr>
-            <a:r>
-              <a:rPr lang="en-US" sz="1000" dirty="0">
-                <a:solidFill>
-                  <a:srgbClr val="64748B"/>
-                </a:solidFill>
-                <a:latin typeface="Microsoft YaHei" pitchFamily="34" charset="0"/>
-                <a:ea typeface="Microsoft YaHei" pitchFamily="34" charset="-122"/>
-                <a:cs typeface="Microsoft YaHei" pitchFamily="34" charset="-120"/>
-              </a:rPr>
-              <a:t>决算表手工整理</a:t>
-            </a:r>
-            <a:endParaRPr lang="en-US" sz="1000" dirty="0"/>
-          </a:p>
         </p:txBody>
       </p:sp>
       <p:sp>
@@ -5058,7 +6564,7 @@
                 <a:ea typeface="Microsoft YaHei" pitchFamily="34" charset="-122"/>
                 <a:cs typeface="Microsoft YaHei" pitchFamily="34" charset="-120"/>
               </a:rPr>
-              <a:t>六项核心指标</a:t>
+              <a:t>分析框架</a:t>
             </a:r>
             <a:endParaRPr lang="en-US" sz="1400" dirty="0"/>
           </a:p>
@@ -5066,14 +6572,34 @@
       </p:sp>
       <p:sp>
         <p:nvSpPr>
-          <p:cNvPr id="15" name="Text 13"/>
-          <p:cNvSpPr/>
-          <p:nvPr/>
-        </p:nvSpPr>
-        <p:spPr>
-          <a:xfrm>
-            <a:off x="4846320" y="1325880"/>
-            <a:ext cx="2011680" cy="347472"/>
+          <p:cNvPr id="15" name="Shape 13"/>
+          <p:cNvSpPr/>
+          <p:nvPr/>
+        </p:nvSpPr>
+        <p:spPr>
+          <a:xfrm>
+            <a:off x="4846320" y="1371600"/>
+            <a:ext cx="320040" cy="320040"/>
+          </a:xfrm>
+          <a:prstGeom prst="ellipse">
+            <a:avLst/>
+          </a:prstGeom>
+          <a:solidFill>
+            <a:srgbClr val="2E75B6"/>
+          </a:solidFill>
+          <a:ln/>
+        </p:spPr>
+      </p:sp>
+      <p:sp>
+        <p:nvSpPr>
+          <p:cNvPr id="16" name="Text 14"/>
+          <p:cNvSpPr/>
+          <p:nvPr/>
+        </p:nvSpPr>
+        <p:spPr>
+          <a:xfrm>
+            <a:off x="4846320" y="1371600"/>
+            <a:ext cx="320040" cy="320040"/>
           </a:xfrm>
           <a:prstGeom prst="rect">
             <a:avLst/>
@@ -5085,11 +6611,50 @@
           <a:bodyPr wrap="square" rtlCol="0" anchor="ctr"/>
           <a:lstStyle/>
           <a:p>
+            <a:pPr algn="ctr" indent="0" marL="0">
+              <a:buNone/>
+            </a:pPr>
+            <a:r>
+              <a:rPr lang="en-US" sz="1200" b="1" dirty="0">
+                <a:solidFill>
+                  <a:srgbClr val="FFFFFF"/>
+                </a:solidFill>
+                <a:latin typeface="Microsoft YaHei" pitchFamily="34" charset="0"/>
+                <a:ea typeface="Microsoft YaHei" pitchFamily="34" charset="-122"/>
+                <a:cs typeface="Microsoft YaHei" pitchFamily="34" charset="-120"/>
+              </a:rPr>
+              <a:t>①</a:t>
+            </a:r>
+            <a:endParaRPr lang="en-US" sz="1200" dirty="0"/>
+          </a:p>
+        </p:txBody>
+      </p:sp>
+      <p:sp>
+        <p:nvSpPr>
+          <p:cNvPr id="17" name="Text 15"/>
+          <p:cNvSpPr/>
+          <p:nvPr/>
+        </p:nvSpPr>
+        <p:spPr>
+          <a:xfrm>
+            <a:off x="5257800" y="1325880"/>
+            <a:ext cx="1828800" cy="320040"/>
+          </a:xfrm>
+          <a:prstGeom prst="rect">
+            <a:avLst/>
+          </a:prstGeom>
+          <a:noFill/>
+          <a:ln/>
+        </p:spPr>
+        <p:txBody>
+          <a:bodyPr wrap="square" rtlCol="0" anchor="ctr"/>
+          <a:lstStyle/>
+          <a:p>
             <a:pPr indent="0" marL="0">
               <a:buNone/>
             </a:pPr>
             <a:r>
-              <a:rPr lang="en-US" sz="1000" b="1" dirty="0">
+              <a:rPr lang="en-US" sz="1100" b="1" dirty="0">
                 <a:solidFill>
                   <a:srgbClr val="1E293B"/>
                 </a:solidFill>
@@ -5097,7 +6662,46 @@
                 <a:ea typeface="Microsoft YaHei" pitchFamily="34" charset="-122"/>
                 <a:cs typeface="Microsoft YaHei" pitchFamily="34" charset="-120"/>
               </a:rPr>
-              <a:t>转移支付依赖度</a:t>
+              <a:t>描述性分析</a:t>
+            </a:r>
+            <a:endParaRPr lang="en-US" sz="1100" dirty="0"/>
+          </a:p>
+        </p:txBody>
+      </p:sp>
+      <p:sp>
+        <p:nvSpPr>
+          <p:cNvPr id="18" name="Text 16"/>
+          <p:cNvSpPr/>
+          <p:nvPr/>
+        </p:nvSpPr>
+        <p:spPr>
+          <a:xfrm>
+            <a:off x="7132320" y="1325880"/>
+            <a:ext cx="1828800" cy="320040"/>
+          </a:xfrm>
+          <a:prstGeom prst="rect">
+            <a:avLst/>
+          </a:prstGeom>
+          <a:noFill/>
+          <a:ln/>
+        </p:spPr>
+        <p:txBody>
+          <a:bodyPr wrap="square" rtlCol="0" anchor="ctr"/>
+          <a:lstStyle/>
+          <a:p>
+            <a:pPr indent="0" marL="0">
+              <a:buNone/>
+            </a:pPr>
+            <a:r>
+              <a:rPr lang="en-US" sz="1000" dirty="0">
+                <a:solidFill>
+                  <a:srgbClr val="64748B"/>
+                </a:solidFill>
+                <a:latin typeface="Microsoft YaHei" pitchFamily="34" charset="0"/>
+                <a:ea typeface="Microsoft YaHei" pitchFamily="34" charset="-122"/>
+                <a:cs typeface="Microsoft YaHei" pitchFamily="34" charset="-120"/>
+              </a:rPr>
+              <a:t>地区分布 + 时序演变</a:t>
             </a:r>
             <a:endParaRPr lang="en-US" sz="1000" dirty="0"/>
           </a:p>
@@ -5105,14 +6709,34 @@
       </p:sp>
       <p:sp>
         <p:nvSpPr>
-          <p:cNvPr id="16" name="Text 14"/>
-          <p:cNvSpPr/>
-          <p:nvPr/>
-        </p:nvSpPr>
-        <p:spPr>
-          <a:xfrm>
-            <a:off x="6858000" y="1325880"/>
-            <a:ext cx="2011680" cy="347472"/>
+          <p:cNvPr id="19" name="Shape 17"/>
+          <p:cNvSpPr/>
+          <p:nvPr/>
+        </p:nvSpPr>
+        <p:spPr>
+          <a:xfrm>
+            <a:off x="4846320" y="1874520"/>
+            <a:ext cx="320040" cy="320040"/>
+          </a:xfrm>
+          <a:prstGeom prst="ellipse">
+            <a:avLst/>
+          </a:prstGeom>
+          <a:solidFill>
+            <a:srgbClr val="2E75B6"/>
+          </a:solidFill>
+          <a:ln/>
+        </p:spPr>
+      </p:sp>
+      <p:sp>
+        <p:nvSpPr>
+          <p:cNvPr id="20" name="Text 18"/>
+          <p:cNvSpPr/>
+          <p:nvPr/>
+        </p:nvSpPr>
+        <p:spPr>
+          <a:xfrm>
+            <a:off x="4846320" y="1874520"/>
+            <a:ext cx="320040" cy="320040"/>
           </a:xfrm>
           <a:prstGeom prst="rect">
             <a:avLst/>
@@ -5124,34 +6748,132 @@
           <a:bodyPr wrap="square" rtlCol="0" anchor="ctr"/>
           <a:lstStyle/>
           <a:p>
+            <a:pPr algn="ctr" indent="0" marL="0">
+              <a:buNone/>
+            </a:pPr>
+            <a:r>
+              <a:rPr lang="en-US" sz="1200" b="1" dirty="0">
+                <a:solidFill>
+                  <a:srgbClr val="FFFFFF"/>
+                </a:solidFill>
+                <a:latin typeface="Microsoft YaHei" pitchFamily="34" charset="0"/>
+                <a:ea typeface="Microsoft YaHei" pitchFamily="34" charset="-122"/>
+                <a:cs typeface="Microsoft YaHei" pitchFamily="34" charset="-120"/>
+              </a:rPr>
+              <a:t>②</a:t>
+            </a:r>
+            <a:endParaRPr lang="en-US" sz="1200" dirty="0"/>
+          </a:p>
+        </p:txBody>
+      </p:sp>
+      <p:sp>
+        <p:nvSpPr>
+          <p:cNvPr id="21" name="Text 19"/>
+          <p:cNvSpPr/>
+          <p:nvPr/>
+        </p:nvSpPr>
+        <p:spPr>
+          <a:xfrm>
+            <a:off x="5257800" y="1828800"/>
+            <a:ext cx="1828800" cy="320040"/>
+          </a:xfrm>
+          <a:prstGeom prst="rect">
+            <a:avLst/>
+          </a:prstGeom>
+          <a:noFill/>
+          <a:ln/>
+        </p:spPr>
+        <p:txBody>
+          <a:bodyPr wrap="square" rtlCol="0" anchor="ctr"/>
+          <a:lstStyle/>
+          <a:p>
             <a:pPr indent="0" marL="0">
               <a:buNone/>
             </a:pPr>
             <a:r>
-              <a:rPr lang="en-US" sz="900" dirty="0">
+              <a:rPr lang="en-US" sz="1100" b="1" dirty="0">
+                <a:solidFill>
+                  <a:srgbClr val="1E293B"/>
+                </a:solidFill>
+                <a:latin typeface="Microsoft YaHei" pitchFamily="34" charset="0"/>
+                <a:ea typeface="Microsoft YaHei" pitchFamily="34" charset="-122"/>
+                <a:cs typeface="Microsoft YaHei" pitchFamily="34" charset="-120"/>
+              </a:rPr>
+              <a:t>分组对比</a:t>
+            </a:r>
+            <a:endParaRPr lang="en-US" sz="1100" dirty="0"/>
+          </a:p>
+        </p:txBody>
+      </p:sp>
+      <p:sp>
+        <p:nvSpPr>
+          <p:cNvPr id="22" name="Text 20"/>
+          <p:cNvSpPr/>
+          <p:nvPr/>
+        </p:nvSpPr>
+        <p:spPr>
+          <a:xfrm>
+            <a:off x="7132320" y="1828800"/>
+            <a:ext cx="1828800" cy="320040"/>
+          </a:xfrm>
+          <a:prstGeom prst="rect">
+            <a:avLst/>
+          </a:prstGeom>
+          <a:noFill/>
+          <a:ln/>
+        </p:spPr>
+        <p:txBody>
+          <a:bodyPr wrap="square" rtlCol="0" anchor="ctr"/>
+          <a:lstStyle/>
+          <a:p>
+            <a:pPr indent="0" marL="0">
+              <a:buNone/>
+            </a:pPr>
+            <a:r>
+              <a:rPr lang="en-US" sz="1000" dirty="0">
                 <a:solidFill>
                   <a:srgbClr val="64748B"/>
                 </a:solidFill>
-                <a:latin typeface="Consolas" pitchFamily="34" charset="0"/>
-                <a:ea typeface="Consolas" pitchFamily="34" charset="-122"/>
-                <a:cs typeface="Consolas" pitchFamily="34" charset="-120"/>
-              </a:rPr>
-              <a:t>转移支付 ÷ 财政支出</a:t>
-            </a:r>
-            <a:endParaRPr lang="en-US" sz="900" dirty="0"/>
-          </a:p>
-        </p:txBody>
-      </p:sp>
-      <p:sp>
-        <p:nvSpPr>
-          <p:cNvPr id="17" name="Text 15"/>
-          <p:cNvSpPr/>
-          <p:nvPr/>
-        </p:nvSpPr>
-        <p:spPr>
-          <a:xfrm>
-            <a:off x="4846320" y="1746504"/>
-            <a:ext cx="2011680" cy="347472"/>
+                <a:latin typeface="Microsoft YaHei" pitchFamily="34" charset="0"/>
+                <a:ea typeface="Microsoft YaHei" pitchFamily="34" charset="-122"/>
+                <a:cs typeface="Microsoft YaHei" pitchFamily="34" charset="-120"/>
+              </a:rPr>
+              <a:t>三类省份 + 统计检验</a:t>
+            </a:r>
+            <a:endParaRPr lang="en-US" sz="1000" dirty="0"/>
+          </a:p>
+        </p:txBody>
+      </p:sp>
+      <p:sp>
+        <p:nvSpPr>
+          <p:cNvPr id="23" name="Shape 21"/>
+          <p:cNvSpPr/>
+          <p:nvPr/>
+        </p:nvSpPr>
+        <p:spPr>
+          <a:xfrm>
+            <a:off x="4846320" y="2377440"/>
+            <a:ext cx="320040" cy="320040"/>
+          </a:xfrm>
+          <a:prstGeom prst="ellipse">
+            <a:avLst/>
+          </a:prstGeom>
+          <a:solidFill>
+            <a:srgbClr val="2E75B6"/>
+          </a:solidFill>
+          <a:ln/>
+        </p:spPr>
+      </p:sp>
+      <p:sp>
+        <p:nvSpPr>
+          <p:cNvPr id="24" name="Text 22"/>
+          <p:cNvSpPr/>
+          <p:nvPr/>
+        </p:nvSpPr>
+        <p:spPr>
+          <a:xfrm>
+            <a:off x="4846320" y="2377440"/>
+            <a:ext cx="320040" cy="320040"/>
           </a:xfrm>
           <a:prstGeom prst="rect">
             <a:avLst/>
@@ -5163,11 +6885,50 @@
           <a:bodyPr wrap="square" rtlCol="0" anchor="ctr"/>
           <a:lstStyle/>
           <a:p>
+            <a:pPr algn="ctr" indent="0" marL="0">
+              <a:buNone/>
+            </a:pPr>
+            <a:r>
+              <a:rPr lang="en-US" sz="1200" b="1" dirty="0">
+                <a:solidFill>
+                  <a:srgbClr val="FFFFFF"/>
+                </a:solidFill>
+                <a:latin typeface="Microsoft YaHei" pitchFamily="34" charset="0"/>
+                <a:ea typeface="Microsoft YaHei" pitchFamily="34" charset="-122"/>
+                <a:cs typeface="Microsoft YaHei" pitchFamily="34" charset="-120"/>
+              </a:rPr>
+              <a:t>③</a:t>
+            </a:r>
+            <a:endParaRPr lang="en-US" sz="1200" dirty="0"/>
+          </a:p>
+        </p:txBody>
+      </p:sp>
+      <p:sp>
+        <p:nvSpPr>
+          <p:cNvPr id="25" name="Text 23"/>
+          <p:cNvSpPr/>
+          <p:nvPr/>
+        </p:nvSpPr>
+        <p:spPr>
+          <a:xfrm>
+            <a:off x="5257800" y="2331720"/>
+            <a:ext cx="1828800" cy="320040"/>
+          </a:xfrm>
+          <a:prstGeom prst="rect">
+            <a:avLst/>
+          </a:prstGeom>
+          <a:noFill/>
+          <a:ln/>
+        </p:spPr>
+        <p:txBody>
+          <a:bodyPr wrap="square" rtlCol="0" anchor="ctr"/>
+          <a:lstStyle/>
+          <a:p>
             <a:pPr indent="0" marL="0">
               <a:buNone/>
             </a:pPr>
             <a:r>
-              <a:rPr lang="en-US" sz="1000" b="1" dirty="0">
+              <a:rPr lang="en-US" sz="1100" b="1" dirty="0">
                 <a:solidFill>
                   <a:srgbClr val="1E293B"/>
                 </a:solidFill>
@@ -5175,7 +6936,46 @@
                 <a:ea typeface="Microsoft YaHei" pitchFamily="34" charset="-122"/>
                 <a:cs typeface="Microsoft YaHei" pitchFamily="34" charset="-120"/>
               </a:rPr>
-              <a:t>人均转移支付</a:t>
+              <a:t>回归分析</a:t>
+            </a:r>
+            <a:endParaRPr lang="en-US" sz="1100" dirty="0"/>
+          </a:p>
+        </p:txBody>
+      </p:sp>
+      <p:sp>
+        <p:nvSpPr>
+          <p:cNvPr id="26" name="Text 24"/>
+          <p:cNvSpPr/>
+          <p:nvPr/>
+        </p:nvSpPr>
+        <p:spPr>
+          <a:xfrm>
+            <a:off x="7132320" y="2331720"/>
+            <a:ext cx="1828800" cy="320040"/>
+          </a:xfrm>
+          <a:prstGeom prst="rect">
+            <a:avLst/>
+          </a:prstGeom>
+          <a:noFill/>
+          <a:ln/>
+        </p:spPr>
+        <p:txBody>
+          <a:bodyPr wrap="square" rtlCol="0" anchor="ctr"/>
+          <a:lstStyle/>
+          <a:p>
+            <a:pPr indent="0" marL="0">
+              <a:buNone/>
+            </a:pPr>
+            <a:r>
+              <a:rPr lang="en-US" sz="1000" dirty="0">
+                <a:solidFill>
+                  <a:srgbClr val="64748B"/>
+                </a:solidFill>
+                <a:latin typeface="Microsoft YaHei" pitchFamily="34" charset="0"/>
+                <a:ea typeface="Microsoft YaHei" pitchFamily="34" charset="-122"/>
+                <a:cs typeface="Microsoft YaHei" pitchFamily="34" charset="-120"/>
+              </a:rPr>
+              <a:t>面板FE + 分位数回归</a:t>
             </a:r>
             <a:endParaRPr lang="en-US" sz="1000" dirty="0"/>
           </a:p>
@@ -5183,14 +6983,34 @@
       </p:sp>
       <p:sp>
         <p:nvSpPr>
-          <p:cNvPr id="18" name="Text 16"/>
-          <p:cNvSpPr/>
-          <p:nvPr/>
-        </p:nvSpPr>
-        <p:spPr>
-          <a:xfrm>
-            <a:off x="6858000" y="1746504"/>
-            <a:ext cx="2011680" cy="347472"/>
+          <p:cNvPr id="27" name="Shape 25"/>
+          <p:cNvSpPr/>
+          <p:nvPr/>
+        </p:nvSpPr>
+        <p:spPr>
+          <a:xfrm>
+            <a:off x="4846320" y="2880360"/>
+            <a:ext cx="320040" cy="320040"/>
+          </a:xfrm>
+          <a:prstGeom prst="ellipse">
+            <a:avLst/>
+          </a:prstGeom>
+          <a:solidFill>
+            <a:srgbClr val="2E75B6"/>
+          </a:solidFill>
+          <a:ln/>
+        </p:spPr>
+      </p:sp>
+      <p:sp>
+        <p:nvSpPr>
+          <p:cNvPr id="28" name="Text 26"/>
+          <p:cNvSpPr/>
+          <p:nvPr/>
+        </p:nvSpPr>
+        <p:spPr>
+          <a:xfrm>
+            <a:off x="4846320" y="2880360"/>
+            <a:ext cx="320040" cy="320040"/>
           </a:xfrm>
           <a:prstGeom prst="rect">
             <a:avLst/>
@@ -5202,58 +7022,97 @@
           <a:bodyPr wrap="square" rtlCol="0" anchor="ctr"/>
           <a:lstStyle/>
           <a:p>
+            <a:pPr algn="ctr" indent="0" marL="0">
+              <a:buNone/>
+            </a:pPr>
+            <a:r>
+              <a:rPr lang="en-US" sz="1200" b="1" dirty="0">
+                <a:solidFill>
+                  <a:srgbClr val="FFFFFF"/>
+                </a:solidFill>
+                <a:latin typeface="Microsoft YaHei" pitchFamily="34" charset="0"/>
+                <a:ea typeface="Microsoft YaHei" pitchFamily="34" charset="-122"/>
+                <a:cs typeface="Microsoft YaHei" pitchFamily="34" charset="-120"/>
+              </a:rPr>
+              <a:t>④</a:t>
+            </a:r>
+            <a:endParaRPr lang="en-US" sz="1200" dirty="0"/>
+          </a:p>
+        </p:txBody>
+      </p:sp>
+      <p:sp>
+        <p:nvSpPr>
+          <p:cNvPr id="29" name="Text 27"/>
+          <p:cNvSpPr/>
+          <p:nvPr/>
+        </p:nvSpPr>
+        <p:spPr>
+          <a:xfrm>
+            <a:off x="5257800" y="2834640"/>
+            <a:ext cx="1828800" cy="320040"/>
+          </a:xfrm>
+          <a:prstGeom prst="rect">
+            <a:avLst/>
+          </a:prstGeom>
+          <a:noFill/>
+          <a:ln/>
+        </p:spPr>
+        <p:txBody>
+          <a:bodyPr wrap="square" rtlCol="0" anchor="ctr"/>
+          <a:lstStyle/>
+          <a:p>
             <a:pPr indent="0" marL="0">
               <a:buNone/>
             </a:pPr>
             <a:r>
-              <a:rPr lang="en-US" sz="900" dirty="0">
+              <a:rPr lang="en-US" sz="1100" b="1" dirty="0">
+                <a:solidFill>
+                  <a:srgbClr val="1E293B"/>
+                </a:solidFill>
+                <a:latin typeface="Microsoft YaHei" pitchFamily="34" charset="0"/>
+                <a:ea typeface="Microsoft YaHei" pitchFamily="34" charset="-122"/>
+                <a:cs typeface="Microsoft YaHei" pitchFamily="34" charset="-120"/>
+              </a:rPr>
+              <a:t>空间计量</a:t>
+            </a:r>
+            <a:endParaRPr lang="en-US" sz="1100" dirty="0"/>
+          </a:p>
+        </p:txBody>
+      </p:sp>
+      <p:sp>
+        <p:nvSpPr>
+          <p:cNvPr id="30" name="Text 28"/>
+          <p:cNvSpPr/>
+          <p:nvPr/>
+        </p:nvSpPr>
+        <p:spPr>
+          <a:xfrm>
+            <a:off x="7132320" y="2834640"/>
+            <a:ext cx="1828800" cy="320040"/>
+          </a:xfrm>
+          <a:prstGeom prst="rect">
+            <a:avLst/>
+          </a:prstGeom>
+          <a:noFill/>
+          <a:ln/>
+        </p:spPr>
+        <p:txBody>
+          <a:bodyPr wrap="square" rtlCol="0" anchor="ctr"/>
+          <a:lstStyle/>
+          <a:p>
+            <a:pPr indent="0" marL="0">
+              <a:buNone/>
+            </a:pPr>
+            <a:r>
+              <a:rPr lang="en-US" sz="1000" dirty="0">
                 <a:solidFill>
                   <a:srgbClr val="64748B"/>
                 </a:solidFill>
-                <a:latin typeface="Consolas" pitchFamily="34" charset="0"/>
-                <a:ea typeface="Consolas" pitchFamily="34" charset="-122"/>
-                <a:cs typeface="Consolas" pitchFamily="34" charset="-120"/>
-              </a:rPr>
-              <a:t>转移支付 ÷ 常住人口</a:t>
-            </a:r>
-            <a:endParaRPr lang="en-US" sz="900" dirty="0"/>
-          </a:p>
-        </p:txBody>
-      </p:sp>
-      <p:sp>
-        <p:nvSpPr>
-          <p:cNvPr id="19" name="Text 17"/>
-          <p:cNvSpPr/>
-          <p:nvPr/>
-        </p:nvSpPr>
-        <p:spPr>
-          <a:xfrm>
-            <a:off x="4846320" y="2167128"/>
-            <a:ext cx="2011680" cy="347472"/>
-          </a:xfrm>
-          <a:prstGeom prst="rect">
-            <a:avLst/>
-          </a:prstGeom>
-          <a:noFill/>
-          <a:ln/>
-        </p:spPr>
-        <p:txBody>
-          <a:bodyPr wrap="square" rtlCol="0" anchor="ctr"/>
-          <a:lstStyle/>
-          <a:p>
-            <a:pPr indent="0" marL="0">
-              <a:buNone/>
-            </a:pPr>
-            <a:r>
-              <a:rPr lang="en-US" sz="1000" b="1" dirty="0">
-                <a:solidFill>
-                  <a:srgbClr val="1E293B"/>
-                </a:solidFill>
-                <a:latin typeface="Microsoft YaHei" pitchFamily="34" charset="0"/>
-                <a:ea typeface="Microsoft YaHei" pitchFamily="34" charset="-122"/>
-                <a:cs typeface="Microsoft YaHei" pitchFamily="34" charset="-120"/>
-              </a:rPr>
-              <a:t>财政自给率</a:t>
+                <a:latin typeface="Microsoft YaHei" pitchFamily="34" charset="0"/>
+                <a:ea typeface="Microsoft YaHei" pitchFamily="34" charset="-122"/>
+                <a:cs typeface="Microsoft YaHei" pitchFamily="34" charset="-120"/>
+              </a:rPr>
+              <a:t>Moran's I 空间聚集</a:t>
             </a:r>
             <a:endParaRPr lang="en-US" sz="1000" dirty="0"/>
           </a:p>
@@ -5261,287 +7120,14 @@
       </p:sp>
       <p:sp>
         <p:nvSpPr>
-          <p:cNvPr id="20" name="Text 18"/>
-          <p:cNvSpPr/>
-          <p:nvPr/>
-        </p:nvSpPr>
-        <p:spPr>
-          <a:xfrm>
-            <a:off x="6858000" y="2167128"/>
-            <a:ext cx="2011680" cy="347472"/>
-          </a:xfrm>
-          <a:prstGeom prst="rect">
-            <a:avLst/>
-          </a:prstGeom>
-          <a:noFill/>
-          <a:ln/>
-        </p:spPr>
-        <p:txBody>
-          <a:bodyPr wrap="square" rtlCol="0" anchor="ctr"/>
-          <a:lstStyle/>
-          <a:p>
-            <a:pPr indent="0" marL="0">
-              <a:buNone/>
-            </a:pPr>
-            <a:r>
-              <a:rPr lang="en-US" sz="900" dirty="0">
-                <a:solidFill>
-                  <a:srgbClr val="64748B"/>
-                </a:solidFill>
-                <a:latin typeface="Consolas" pitchFamily="34" charset="0"/>
-                <a:ea typeface="Consolas" pitchFamily="34" charset="-122"/>
-                <a:cs typeface="Consolas" pitchFamily="34" charset="-120"/>
-              </a:rPr>
-              <a:t>财政收入 ÷ 财政支出</a:t>
-            </a:r>
-            <a:endParaRPr lang="en-US" sz="900" dirty="0"/>
-          </a:p>
-        </p:txBody>
-      </p:sp>
-      <p:sp>
-        <p:nvSpPr>
-          <p:cNvPr id="21" name="Text 19"/>
-          <p:cNvSpPr/>
-          <p:nvPr/>
-        </p:nvSpPr>
-        <p:spPr>
-          <a:xfrm>
-            <a:off x="4846320" y="2587752"/>
-            <a:ext cx="2011680" cy="347472"/>
-          </a:xfrm>
-          <a:prstGeom prst="rect">
-            <a:avLst/>
-          </a:prstGeom>
-          <a:noFill/>
-          <a:ln/>
-        </p:spPr>
-        <p:txBody>
-          <a:bodyPr wrap="square" rtlCol="0" anchor="ctr"/>
-          <a:lstStyle/>
-          <a:p>
-            <a:pPr indent="0" marL="0">
-              <a:buNone/>
-            </a:pPr>
-            <a:r>
-              <a:rPr lang="en-US" sz="1000" b="1" dirty="0">
-                <a:solidFill>
-                  <a:srgbClr val="1E293B"/>
-                </a:solidFill>
-                <a:latin typeface="Microsoft YaHei" pitchFamily="34" charset="0"/>
-                <a:ea typeface="Microsoft YaHei" pitchFamily="34" charset="-122"/>
-                <a:cs typeface="Microsoft YaHei" pitchFamily="34" charset="-120"/>
-              </a:rPr>
-              <a:t>人均GDP</a:t>
-            </a:r>
-            <a:endParaRPr lang="en-US" sz="1000" dirty="0"/>
-          </a:p>
-        </p:txBody>
-      </p:sp>
-      <p:sp>
-        <p:nvSpPr>
-          <p:cNvPr id="22" name="Text 20"/>
-          <p:cNvSpPr/>
-          <p:nvPr/>
-        </p:nvSpPr>
-        <p:spPr>
-          <a:xfrm>
-            <a:off x="6858000" y="2587752"/>
-            <a:ext cx="2011680" cy="347472"/>
-          </a:xfrm>
-          <a:prstGeom prst="rect">
-            <a:avLst/>
-          </a:prstGeom>
-          <a:noFill/>
-          <a:ln/>
-        </p:spPr>
-        <p:txBody>
-          <a:bodyPr wrap="square" rtlCol="0" anchor="ctr"/>
-          <a:lstStyle/>
-          <a:p>
-            <a:pPr indent="0" marL="0">
-              <a:buNone/>
-            </a:pPr>
-            <a:r>
-              <a:rPr lang="en-US" sz="900" dirty="0">
-                <a:solidFill>
-                  <a:srgbClr val="64748B"/>
-                </a:solidFill>
-                <a:latin typeface="Consolas" pitchFamily="34" charset="0"/>
-                <a:ea typeface="Consolas" pitchFamily="34" charset="-122"/>
-                <a:cs typeface="Consolas" pitchFamily="34" charset="-120"/>
-              </a:rPr>
-              <a:t>GDP ÷ 人口（经济基准）</a:t>
-            </a:r>
-            <a:endParaRPr lang="en-US" sz="900" dirty="0"/>
-          </a:p>
-        </p:txBody>
-      </p:sp>
-      <p:sp>
-        <p:nvSpPr>
-          <p:cNvPr id="23" name="Text 21"/>
-          <p:cNvSpPr/>
-          <p:nvPr/>
-        </p:nvSpPr>
-        <p:spPr>
-          <a:xfrm>
-            <a:off x="4846320" y="3008376"/>
-            <a:ext cx="2011680" cy="347472"/>
-          </a:xfrm>
-          <a:prstGeom prst="rect">
-            <a:avLst/>
-          </a:prstGeom>
-          <a:noFill/>
-          <a:ln/>
-        </p:spPr>
-        <p:txBody>
-          <a:bodyPr wrap="square" rtlCol="0" anchor="ctr"/>
-          <a:lstStyle/>
-          <a:p>
-            <a:pPr indent="0" marL="0">
-              <a:buNone/>
-            </a:pPr>
-            <a:r>
-              <a:rPr lang="en-US" sz="1000" b="1" dirty="0">
-                <a:solidFill>
-                  <a:srgbClr val="1E293B"/>
-                </a:solidFill>
-                <a:latin typeface="Microsoft YaHei" pitchFamily="34" charset="0"/>
-                <a:ea typeface="Microsoft YaHei" pitchFamily="34" charset="-122"/>
-                <a:cs typeface="Microsoft YaHei" pitchFamily="34" charset="-120"/>
-              </a:rPr>
-              <a:t>经济匹配指数</a:t>
-            </a:r>
-            <a:endParaRPr lang="en-US" sz="1000" dirty="0"/>
-          </a:p>
-        </p:txBody>
-      </p:sp>
-      <p:sp>
-        <p:nvSpPr>
-          <p:cNvPr id="24" name="Text 22"/>
-          <p:cNvSpPr/>
-          <p:nvPr/>
-        </p:nvSpPr>
-        <p:spPr>
-          <a:xfrm>
-            <a:off x="6858000" y="3008376"/>
-            <a:ext cx="2011680" cy="347472"/>
-          </a:xfrm>
-          <a:prstGeom prst="rect">
-            <a:avLst/>
-          </a:prstGeom>
-          <a:noFill/>
-          <a:ln/>
-        </p:spPr>
-        <p:txBody>
-          <a:bodyPr wrap="square" rtlCol="0" anchor="ctr"/>
-          <a:lstStyle/>
-          <a:p>
-            <a:pPr indent="0" marL="0">
-              <a:buNone/>
-            </a:pPr>
-            <a:r>
-              <a:rPr lang="en-US" sz="900" dirty="0">
-                <a:solidFill>
-                  <a:srgbClr val="64748B"/>
-                </a:solidFill>
-                <a:latin typeface="Consolas" pitchFamily="34" charset="0"/>
-                <a:ea typeface="Consolas" pitchFamily="34" charset="-122"/>
-                <a:cs typeface="Consolas" pitchFamily="34" charset="-120"/>
-              </a:rPr>
-              <a:t>人均转移支付 ÷ 人均GDP</a:t>
-            </a:r>
-            <a:endParaRPr lang="en-US" sz="900" dirty="0"/>
-          </a:p>
-        </p:txBody>
-      </p:sp>
-      <p:sp>
-        <p:nvSpPr>
-          <p:cNvPr id="25" name="Text 23"/>
-          <p:cNvSpPr/>
-          <p:nvPr/>
-        </p:nvSpPr>
-        <p:spPr>
-          <a:xfrm>
-            <a:off x="4846320" y="3429000"/>
-            <a:ext cx="2011680" cy="347472"/>
-          </a:xfrm>
-          <a:prstGeom prst="rect">
-            <a:avLst/>
-          </a:prstGeom>
-          <a:noFill/>
-          <a:ln/>
-        </p:spPr>
-        <p:txBody>
-          <a:bodyPr wrap="square" rtlCol="0" anchor="ctr"/>
-          <a:lstStyle/>
-          <a:p>
-            <a:pPr indent="0" marL="0">
-              <a:buNone/>
-            </a:pPr>
-            <a:r>
-              <a:rPr lang="en-US" sz="1000" b="1" dirty="0">
-                <a:solidFill>
-                  <a:srgbClr val="1E293B"/>
-                </a:solidFill>
-                <a:latin typeface="Microsoft YaHei" pitchFamily="34" charset="0"/>
-                <a:ea typeface="Microsoft YaHei" pitchFamily="34" charset="-122"/>
-                <a:cs typeface="Microsoft YaHei" pitchFamily="34" charset="-120"/>
-              </a:rPr>
-              <a:t>增速差</a:t>
-            </a:r>
-            <a:endParaRPr lang="en-US" sz="1000" dirty="0"/>
-          </a:p>
-        </p:txBody>
-      </p:sp>
-      <p:sp>
-        <p:nvSpPr>
-          <p:cNvPr id="26" name="Text 24"/>
-          <p:cNvSpPr/>
-          <p:nvPr/>
-        </p:nvSpPr>
-        <p:spPr>
-          <a:xfrm>
-            <a:off x="6858000" y="3429000"/>
-            <a:ext cx="2011680" cy="347472"/>
-          </a:xfrm>
-          <a:prstGeom prst="rect">
-            <a:avLst/>
-          </a:prstGeom>
-          <a:noFill/>
-          <a:ln/>
-        </p:spPr>
-        <p:txBody>
-          <a:bodyPr wrap="square" rtlCol="0" anchor="ctr"/>
-          <a:lstStyle/>
-          <a:p>
-            <a:pPr indent="0" marL="0">
-              <a:buNone/>
-            </a:pPr>
-            <a:r>
-              <a:rPr lang="en-US" sz="900" dirty="0">
-                <a:solidFill>
-                  <a:srgbClr val="64748B"/>
-                </a:solidFill>
-                <a:latin typeface="Consolas" pitchFamily="34" charset="0"/>
-                <a:ea typeface="Consolas" pitchFamily="34" charset="-122"/>
-                <a:cs typeface="Consolas" pitchFamily="34" charset="-120"/>
-              </a:rPr>
-              <a:t>转移支付增速 − GDP增速</a:t>
-            </a:r>
-            <a:endParaRPr lang="en-US" sz="900" dirty="0"/>
-          </a:p>
-        </p:txBody>
-      </p:sp>
-      <p:sp>
-        <p:nvSpPr>
-          <p:cNvPr id="27" name="Shape 25"/>
-          <p:cNvSpPr/>
-          <p:nvPr/>
-        </p:nvSpPr>
-        <p:spPr>
-          <a:xfrm>
-            <a:off x="457200" y="3931920"/>
-            <a:ext cx="8229600" cy="365760"/>
+          <p:cNvPr id="31" name="Shape 29"/>
+          <p:cNvSpPr/>
+          <p:nvPr/>
+        </p:nvSpPr>
+        <p:spPr>
+          <a:xfrm>
+            <a:off x="457200" y="4480560"/>
+            <a:ext cx="8229600" cy="237744"/>
           </a:xfrm>
           <a:prstGeom prst="rect">
             <a:avLst/>
@@ -5554,66 +7140,7 @@
       </p:sp>
       <p:sp>
         <p:nvSpPr>
-          <p:cNvPr id="28" name="Text 26"/>
-          <p:cNvSpPr/>
-          <p:nvPr/>
-        </p:nvSpPr>
-        <p:spPr>
-          <a:xfrm>
-            <a:off x="548640" y="3931920"/>
-            <a:ext cx="8046720" cy="365760"/>
-          </a:xfrm>
-          <a:prstGeom prst="rect">
-            <a:avLst/>
-          </a:prstGeom>
-          <a:noFill/>
-          <a:ln/>
-        </p:spPr>
-        <p:txBody>
-          <a:bodyPr wrap="square" rtlCol="0" anchor="ctr"/>
-          <a:lstStyle/>
-          <a:p>
-            <a:pPr indent="0" marL="0">
-              <a:buNone/>
-            </a:pPr>
-            <a:r>
-              <a:rPr lang="en-US" sz="1100" dirty="0">
-                <a:solidFill>
-                  <a:srgbClr val="1F4E79"/>
-                </a:solidFill>
-                <a:latin typeface="Microsoft YaHei" pitchFamily="34" charset="0"/>
-                <a:ea typeface="Microsoft YaHei" pitchFamily="34" charset="-122"/>
-                <a:cs typeface="Microsoft YaHei" pitchFamily="34" charset="-120"/>
-              </a:rPr>
-              <a:t>分析框架：描述性统计 → 分组对比（三类省份）→ 统计检验（Pearson r / Spearman ρ / ANOVA）→ 政策启示</a:t>
-            </a:r>
-            <a:endParaRPr lang="en-US" sz="1100" dirty="0"/>
-          </a:p>
-        </p:txBody>
-      </p:sp>
-      <p:sp>
-        <p:nvSpPr>
-          <p:cNvPr id="29" name="Shape 27"/>
-          <p:cNvSpPr/>
-          <p:nvPr/>
-        </p:nvSpPr>
-        <p:spPr>
-          <a:xfrm>
-            <a:off x="457200" y="4480560"/>
-            <a:ext cx="8229600" cy="237744"/>
-          </a:xfrm>
-          <a:prstGeom prst="rect">
-            <a:avLst/>
-          </a:prstGeom>
-          <a:solidFill>
-            <a:srgbClr val="D5E8F0"/>
-          </a:solidFill>
-          <a:ln/>
-        </p:spPr>
-      </p:sp>
-      <p:sp>
-        <p:nvSpPr>
-          <p:cNvPr id="30" name="Text 28"/>
+          <p:cNvPr id="32" name="Text 30"/>
           <p:cNvSpPr/>
           <p:nvPr/>
         </p:nvSpPr>
@@ -5664,7 +7191,7 @@
     <p:bg>
       <p:bgPr>
         <a:solidFill>
-          <a:srgbClr val="FFFFFF"/>
+          <a:srgbClr val="1A3C5E"/>
         </a:solidFill>
       </p:bgPr>
     </p:bg>
@@ -5684,121 +7211,14 @@
       </p:grpSpPr>
       <p:sp>
         <p:nvSpPr>
-          <p:cNvPr id="2" name="Text 0"/>
-          <p:cNvSpPr/>
-          <p:nvPr/>
-        </p:nvSpPr>
-        <p:spPr>
-          <a:xfrm>
-            <a:off x="457200" y="182880"/>
-            <a:ext cx="8229600" cy="502920"/>
-          </a:xfrm>
-          <a:prstGeom prst="rect">
-            <a:avLst/>
-          </a:prstGeom>
-          <a:noFill/>
-          <a:ln/>
-        </p:spPr>
-        <p:txBody>
-          <a:bodyPr wrap="square" rtlCol="0" anchor="ctr"/>
-          <a:lstStyle/>
-          <a:p>
-            <a:pPr indent="0" marL="0">
-              <a:buNone/>
-            </a:pPr>
-            <a:r>
-              <a:rPr lang="en-US" sz="2400" b="1" dirty="0">
-                <a:solidFill>
-                  <a:srgbClr val="1A3C5E"/>
-                </a:solidFill>
-                <a:latin typeface="Microsoft YaHei" pitchFamily="34" charset="0"/>
-                <a:ea typeface="Microsoft YaHei" pitchFamily="34" charset="-122"/>
-                <a:cs typeface="Microsoft YaHei" pitchFamily="34" charset="-120"/>
-              </a:rPr>
-              <a:t>结果①：转移支付依赖度的地区分布</a:t>
-            </a:r>
-            <a:endParaRPr lang="en-US" sz="2400" dirty="0"/>
-          </a:p>
-        </p:txBody>
-      </p:sp>
-      <p:sp>
-        <p:nvSpPr>
-          <p:cNvPr id="3" name="Shape 1"/>
-          <p:cNvSpPr/>
-          <p:nvPr/>
-        </p:nvSpPr>
-        <p:spPr>
-          <a:xfrm>
-            <a:off x="457200" y="685800"/>
-            <a:ext cx="914400" cy="27432"/>
-          </a:xfrm>
-          <a:prstGeom prst="rect">
-            <a:avLst/>
-          </a:prstGeom>
-          <a:solidFill>
-            <a:srgbClr val="2E75B6"/>
-          </a:solidFill>
-          <a:ln/>
-        </p:spPr>
-      </p:sp>
-      <p:pic>
-        <p:nvPicPr>
-          <p:cNvPr id="4" name="Image 0" descr="preencoded.png">    </p:cNvPr>
-          <p:cNvPicPr>
-            <a:picLocks noChangeAspect="1"/>
-          </p:cNvPicPr>
-          <p:nvPr/>
-        </p:nvPicPr>
-        <p:blipFill>
-          <a:blip r:embed="rId1"/>
-          <a:stretch>
-            <a:fillRect/>
-          </a:stretch>
-        </p:blipFill>
-        <p:spPr>
-          <a:xfrm>
-            <a:off x="91440" y="868680"/>
-            <a:ext cx="4572000" cy="3017520"/>
-          </a:xfrm>
-          <a:prstGeom prst="rect">
-            <a:avLst/>
-          </a:prstGeom>
-        </p:spPr>
-      </p:pic>
-      <p:pic>
-        <p:nvPicPr>
-          <p:cNvPr id="5" name="Image 1" descr="preencoded.png">    </p:cNvPr>
-          <p:cNvPicPr>
-            <a:picLocks noChangeAspect="1"/>
-          </p:cNvPicPr>
-          <p:nvPr/>
-        </p:nvPicPr>
-        <p:blipFill>
-          <a:blip r:embed="rId2"/>
-          <a:stretch>
-            <a:fillRect/>
-          </a:stretch>
-        </p:blipFill>
-        <p:spPr>
-          <a:xfrm>
-            <a:off x="4663440" y="868680"/>
-            <a:ext cx="4297680" cy="3017520"/>
-          </a:xfrm>
-          <a:prstGeom prst="rect">
-            <a:avLst/>
-          </a:prstGeom>
-        </p:spPr>
-      </p:pic>
-      <p:sp>
-        <p:nvSpPr>
-          <p:cNvPr id="6" name="Shape 2"/>
-          <p:cNvSpPr/>
-          <p:nvPr/>
-        </p:nvSpPr>
-        <p:spPr>
-          <a:xfrm>
-            <a:off x="457200" y="4069080"/>
-            <a:ext cx="4114800" cy="411480"/>
+          <p:cNvPr id="2" name="Shape 0"/>
+          <p:cNvSpPr/>
+          <p:nvPr/>
+        </p:nvSpPr>
+        <p:spPr>
+          <a:xfrm>
+            <a:off x="457200" y="2286000"/>
+            <a:ext cx="54864" cy="914400"/>
           </a:xfrm>
           <a:prstGeom prst="rect">
             <a:avLst/>
@@ -5811,14 +7231,14 @@
       </p:sp>
       <p:sp>
         <p:nvSpPr>
-          <p:cNvPr id="7" name="Text 3"/>
-          <p:cNvSpPr/>
-          <p:nvPr/>
-        </p:nvSpPr>
-        <p:spPr>
-          <a:xfrm>
-            <a:off x="457200" y="4069080"/>
-            <a:ext cx="4114800" cy="411480"/>
+          <p:cNvPr id="3" name="Text 1"/>
+          <p:cNvSpPr/>
+          <p:nvPr/>
+        </p:nvSpPr>
+        <p:spPr>
+          <a:xfrm>
+            <a:off x="731520" y="2286000"/>
+            <a:ext cx="7315200" cy="914400"/>
           </a:xfrm>
           <a:prstGeom prst="rect">
             <a:avLst/>
@@ -5830,11 +7250,11 @@
           <a:bodyPr wrap="square" rtlCol="0" anchor="ctr"/>
           <a:lstStyle/>
           <a:p>
-            <a:pPr algn="ctr" indent="0" marL="0">
-              <a:buNone/>
-            </a:pPr>
-            <a:r>
-              <a:rPr lang="en-US" sz="1200" b="1" dirty="0">
+            <a:pPr indent="0" marL="0">
+              <a:buNone/>
+            </a:pPr>
+            <a:r>
+              <a:rPr lang="en-US" sz="3200" b="1" dirty="0">
                 <a:solidFill>
                   <a:srgbClr val="FFFFFF"/>
                 </a:solidFill>
@@ -5842,127 +7262,9 @@
                 <a:ea typeface="Microsoft YaHei" pitchFamily="34" charset="-122"/>
                 <a:cs typeface="Microsoft YaHei" pitchFamily="34" charset="-120"/>
               </a:rPr>
-              <a:t>西藏依赖度 88.0%  vs  上海 9.6%  ·  极差 78.4 个百分点</a:t>
-            </a:r>
-            <a:endParaRPr lang="en-US" sz="1200" dirty="0"/>
-          </a:p>
-        </p:txBody>
-      </p:sp>
-      <p:sp>
-        <p:nvSpPr>
-          <p:cNvPr id="8" name="Shape 4"/>
-          <p:cNvSpPr/>
-          <p:nvPr/>
-        </p:nvSpPr>
-        <p:spPr>
-          <a:xfrm>
-            <a:off x="4754880" y="4069080"/>
-            <a:ext cx="4114800" cy="411480"/>
-          </a:xfrm>
-          <a:prstGeom prst="rect">
-            <a:avLst/>
-          </a:prstGeom>
-          <a:solidFill>
-            <a:srgbClr val="1F4E79"/>
-          </a:solidFill>
-          <a:ln/>
-        </p:spPr>
-      </p:sp>
-      <p:sp>
-        <p:nvSpPr>
-          <p:cNvPr id="9" name="Text 5"/>
-          <p:cNvSpPr/>
-          <p:nvPr/>
-        </p:nvSpPr>
-        <p:spPr>
-          <a:xfrm>
-            <a:off x="4754880" y="4069080"/>
-            <a:ext cx="4114800" cy="411480"/>
-          </a:xfrm>
-          <a:prstGeom prst="rect">
-            <a:avLst/>
-          </a:prstGeom>
-          <a:noFill/>
-          <a:ln/>
-        </p:spPr>
-        <p:txBody>
-          <a:bodyPr wrap="square" rtlCol="0" anchor="ctr"/>
-          <a:lstStyle/>
-          <a:p>
-            <a:pPr algn="ctr" indent="0" marL="0">
-              <a:buNone/>
-            </a:pPr>
-            <a:r>
-              <a:rPr lang="en-US" sz="1200" b="1" dirty="0">
-                <a:solidFill>
-                  <a:srgbClr val="FFFFFF"/>
-                </a:solidFill>
-                <a:latin typeface="Microsoft YaHei" pitchFamily="34" charset="0"/>
-                <a:ea typeface="Microsoft YaHei" pitchFamily="34" charset="-122"/>
-                <a:cs typeface="Microsoft YaHei" pitchFamily="34" charset="-120"/>
-              </a:rPr>
-              <a:t>整体呈东低西高格局  高依赖省份集中在西部</a:t>
-            </a:r>
-            <a:endParaRPr lang="en-US" sz="1200" dirty="0"/>
-          </a:p>
-        </p:txBody>
-      </p:sp>
-      <p:sp>
-        <p:nvSpPr>
-          <p:cNvPr id="10" name="Shape 6"/>
-          <p:cNvSpPr/>
-          <p:nvPr/>
-        </p:nvSpPr>
-        <p:spPr>
-          <a:xfrm>
-            <a:off x="457200" y="4663440"/>
-            <a:ext cx="8229600" cy="237744"/>
-          </a:xfrm>
-          <a:prstGeom prst="rect">
-            <a:avLst/>
-          </a:prstGeom>
-          <a:solidFill>
-            <a:srgbClr val="D5E8F0"/>
-          </a:solidFill>
-          <a:ln/>
-        </p:spPr>
-      </p:sp>
-      <p:sp>
-        <p:nvSpPr>
-          <p:cNvPr id="11" name="Text 7"/>
-          <p:cNvSpPr/>
-          <p:nvPr/>
-        </p:nvSpPr>
-        <p:spPr>
-          <a:xfrm>
-            <a:off x="512064" y="4663440"/>
-            <a:ext cx="8119872" cy="237744"/>
-          </a:xfrm>
-          <a:prstGeom prst="rect">
-            <a:avLst/>
-          </a:prstGeom>
-          <a:noFill/>
-          <a:ln/>
-        </p:spPr>
-        <p:txBody>
-          <a:bodyPr wrap="square" rtlCol="0" anchor="ctr"/>
-          <a:lstStyle/>
-          <a:p>
-            <a:pPr indent="0" marL="0">
-              <a:buNone/>
-            </a:pPr>
-            <a:r>
-              <a:rPr lang="en-US" sz="750" dirty="0">
-                <a:solidFill>
-                  <a:srgbClr val="1F4E79"/>
-                </a:solidFill>
-                <a:latin typeface="Microsoft YaHei" pitchFamily="34" charset="0"/>
-                <a:ea typeface="Microsoft YaHei" pitchFamily="34" charset="-122"/>
-                <a:cs typeface="Microsoft YaHei" pitchFamily="34" charset="-120"/>
-              </a:rPr>
-              <a:t>AI协作：geopandas choropleth 地图 + 红蓝双色时序变化量（较上年差额，百分点）</a:t>
-            </a:r>
-            <a:endParaRPr lang="en-US" sz="750" dirty="0"/>
+              <a:t>第一部分：描述性分析</a:t>
+            </a:r>
+            <a:endParaRPr lang="en-US" sz="3200" dirty="0"/>
           </a:p>
         </p:txBody>
       </p:sp>
@@ -6031,7 +7333,7 @@
                 <a:ea typeface="Microsoft YaHei" pitchFamily="34" charset="-122"/>
                 <a:cs typeface="Microsoft YaHei" pitchFamily="34" charset="-120"/>
               </a:rPr>
-              <a:t>结果②：财政自给率与转移支付-经济关系</a:t>
+              <a:t>发现一：转移支付依赖度的空间格局</a:t>
             </a:r>
             <a:endParaRPr lang="en-US" sz="2400" dirty="0"/>
           </a:p>
@@ -6073,8 +7375,8 @@
         </p:blipFill>
         <p:spPr>
           <a:xfrm>
-            <a:off x="91440" y="822960"/>
-            <a:ext cx="4206240" cy="3657600"/>
+            <a:off x="91440" y="868680"/>
+            <a:ext cx="4572000" cy="3017520"/>
           </a:xfrm>
           <a:prstGeom prst="rect">
             <a:avLst/>
@@ -6097,8 +7399,8 @@
         </p:blipFill>
         <p:spPr>
           <a:xfrm>
-            <a:off x="4480560" y="822960"/>
-            <a:ext cx="4663440" cy="3657600"/>
+            <a:off x="4663440" y="868680"/>
+            <a:ext cx="4297680" cy="3017520"/>
           </a:xfrm>
           <a:prstGeom prst="rect">
             <a:avLst/>
@@ -6107,14 +7409,34 @@
       </p:pic>
       <p:sp>
         <p:nvSpPr>
-          <p:cNvPr id="6" name="Text 2"/>
-          <p:cNvSpPr/>
-          <p:nvPr/>
-        </p:nvSpPr>
-        <p:spPr>
-          <a:xfrm>
-            <a:off x="457200" y="4572000"/>
-            <a:ext cx="8229600" cy="320040"/>
+          <p:cNvPr id="6" name="Shape 2"/>
+          <p:cNvSpPr/>
+          <p:nvPr/>
+        </p:nvSpPr>
+        <p:spPr>
+          <a:xfrm>
+            <a:off x="457200" y="4069080"/>
+            <a:ext cx="4114800" cy="411480"/>
+          </a:xfrm>
+          <a:prstGeom prst="rect">
+            <a:avLst/>
+          </a:prstGeom>
+          <a:solidFill>
+            <a:srgbClr val="C0392B"/>
+          </a:solidFill>
+          <a:ln/>
+        </p:spPr>
+      </p:sp>
+      <p:sp>
+        <p:nvSpPr>
+          <p:cNvPr id="7" name="Text 3"/>
+          <p:cNvSpPr/>
+          <p:nvPr/>
+        </p:nvSpPr>
+        <p:spPr>
+          <a:xfrm>
+            <a:off x="457200" y="4069080"/>
+            <a:ext cx="4114800" cy="411480"/>
           </a:xfrm>
           <a:prstGeom prst="rect">
             <a:avLst/>
@@ -6126,54 +7448,54 @@
           <a:bodyPr wrap="square" rtlCol="0" anchor="ctr"/>
           <a:lstStyle/>
           <a:p>
-            <a:pPr indent="0" marL="0">
-              <a:buNone/>
-            </a:pPr>
-            <a:r>
-              <a:rPr lang="en-US" sz="1000" dirty="0">
-                <a:solidFill>
-                  <a:srgbClr val="64748B"/>
-                </a:solidFill>
-                <a:latin typeface="Microsoft YaHei" pitchFamily="34" charset="0"/>
-                <a:ea typeface="Microsoft YaHei" pitchFamily="34" charset="-122"/>
-                <a:cs typeface="Microsoft YaHei" pitchFamily="34" charset="-120"/>
-              </a:rPr>
-              <a:t>左：31省财政自给率排名。红/橙/蓝三色对应低/中/高三类自给率。上海84.8% → 西藏9.5%，差距悬殊</a:t>
-            </a:r>
-            <a:endParaRPr lang="en-US" sz="1000" dirty="0"/>
-          </a:p>
-        </p:txBody>
-      </p:sp>
-      <p:sp>
-        <p:nvSpPr>
-          <p:cNvPr id="7" name="Shape 3"/>
-          <p:cNvSpPr/>
-          <p:nvPr/>
-        </p:nvSpPr>
-        <p:spPr>
-          <a:xfrm>
-            <a:off x="457200" y="4892040"/>
-            <a:ext cx="8229600" cy="237744"/>
+            <a:pPr algn="ctr" indent="0" marL="0">
+              <a:buNone/>
+            </a:pPr>
+            <a:r>
+              <a:rPr lang="en-US" sz="1200" b="1" dirty="0">
+                <a:solidFill>
+                  <a:srgbClr val="FFFFFF"/>
+                </a:solidFill>
+                <a:latin typeface="Microsoft YaHei" pitchFamily="34" charset="0"/>
+                <a:ea typeface="Microsoft YaHei" pitchFamily="34" charset="-122"/>
+                <a:cs typeface="Microsoft YaHei" pitchFamily="34" charset="-120"/>
+              </a:rPr>
+              <a:t>西藏依赖度 88.0%  vs  上海 9.6%  ·  极差 78.4 个百分点</a:t>
+            </a:r>
+            <a:endParaRPr lang="en-US" sz="1200" dirty="0"/>
+          </a:p>
+        </p:txBody>
+      </p:sp>
+      <p:sp>
+        <p:nvSpPr>
+          <p:cNvPr id="8" name="Shape 4"/>
+          <p:cNvSpPr/>
+          <p:nvPr/>
+        </p:nvSpPr>
+        <p:spPr>
+          <a:xfrm>
+            <a:off x="4754880" y="4069080"/>
+            <a:ext cx="4114800" cy="411480"/>
           </a:xfrm>
           <a:prstGeom prst="rect">
             <a:avLst/>
           </a:prstGeom>
           <a:solidFill>
-            <a:srgbClr val="D5E8F0"/>
+            <a:srgbClr val="1F4E79"/>
           </a:solidFill>
           <a:ln/>
         </p:spPr>
       </p:sp>
       <p:sp>
         <p:nvSpPr>
-          <p:cNvPr id="8" name="Text 4"/>
-          <p:cNvSpPr/>
-          <p:nvPr/>
-        </p:nvSpPr>
-        <p:spPr>
-          <a:xfrm>
-            <a:off x="512064" y="4892040"/>
-            <a:ext cx="8119872" cy="237744"/>
+          <p:cNvPr id="9" name="Text 5"/>
+          <p:cNvSpPr/>
+          <p:nvPr/>
+        </p:nvSpPr>
+        <p:spPr>
+          <a:xfrm>
+            <a:off x="4754880" y="4069080"/>
+            <a:ext cx="4114800" cy="411480"/>
           </a:xfrm>
           <a:prstGeom prst="rect">
             <a:avLst/>
@@ -6185,21 +7507,21 @@
           <a:bodyPr wrap="square" rtlCol="0" anchor="ctr"/>
           <a:lstStyle/>
           <a:p>
-            <a:pPr indent="0" marL="0">
-              <a:buNone/>
-            </a:pPr>
-            <a:r>
-              <a:rPr lang="en-US" sz="750" dirty="0">
-                <a:solidFill>
-                  <a:srgbClr val="1F4E79"/>
-                </a:solidFill>
-                <a:latin typeface="Microsoft YaHei" pitchFamily="34" charset="0"/>
-                <a:ea typeface="Microsoft YaHei" pitchFamily="34" charset="-122"/>
-                <a:cs typeface="Microsoft YaHei" pitchFamily="34" charset="-120"/>
-              </a:rPr>
-              <a:t>AI协作：geopandas + matplotlib 生成，气泡大小=人口量，颜色=自给率等级</a:t>
-            </a:r>
-            <a:endParaRPr lang="en-US" sz="750" dirty="0"/>
+            <a:pPr algn="ctr" indent="0" marL="0">
+              <a:buNone/>
+            </a:pPr>
+            <a:r>
+              <a:rPr lang="en-US" sz="1200" b="1" dirty="0">
+                <a:solidFill>
+                  <a:srgbClr val="FFFFFF"/>
+                </a:solidFill>
+                <a:latin typeface="Microsoft YaHei" pitchFamily="34" charset="0"/>
+                <a:ea typeface="Microsoft YaHei" pitchFamily="34" charset="-122"/>
+                <a:cs typeface="Microsoft YaHei" pitchFamily="34" charset="-120"/>
+              </a:rPr>
+              <a:t>整体呈东低西高格局  ·  高依赖省份集中在西部</a:t>
+            </a:r>
+            <a:endParaRPr lang="en-US" sz="1200" dirty="0"/>
           </a:p>
         </p:txBody>
       </p:sp>
@@ -6268,7 +7590,7 @@
                 <a:ea typeface="Microsoft YaHei" pitchFamily="34" charset="-122"/>
                 <a:cs typeface="Microsoft YaHei" pitchFamily="34" charset="-120"/>
               </a:rPr>
-              <a:t>结果③：三类财政自给率省份的关键指标</a:t>
+              <a:t>发现二：全国趋势与依赖度时序演变</a:t>
             </a:r>
             <a:endParaRPr lang="en-US" sz="2400" dirty="0"/>
           </a:p>
@@ -6294,56 +7616,84 @@
           <a:ln/>
         </p:spPr>
       </p:sp>
-      <p:sp>
-        <p:nvSpPr>
-          <p:cNvPr id="4" name="Shape 2"/>
-          <p:cNvSpPr/>
-          <p:nvPr/>
-        </p:nvSpPr>
-        <p:spPr>
-          <a:xfrm>
-            <a:off x="365760" y="960120"/>
-            <a:ext cx="2697480" cy="2834640"/>
+      <p:pic>
+        <p:nvPicPr>
+          <p:cNvPr id="4" name="Image 0" descr="preencoded.png">    </p:cNvPr>
+          <p:cNvPicPr>
+            <a:picLocks noChangeAspect="1"/>
+          </p:cNvPicPr>
+          <p:nvPr/>
+        </p:nvPicPr>
+        <p:blipFill>
+          <a:blip r:embed="rId1"/>
+          <a:stretch>
+            <a:fillRect/>
+          </a:stretch>
+        </p:blipFill>
+        <p:spPr>
+          <a:xfrm>
+            <a:off x="91440" y="822960"/>
+            <a:ext cx="4389120" cy="3200400"/>
+          </a:xfrm>
+          <a:prstGeom prst="rect">
+            <a:avLst/>
+          </a:prstGeom>
+        </p:spPr>
+      </p:pic>
+      <p:pic>
+        <p:nvPicPr>
+          <p:cNvPr id="5" name="Image 1" descr="preencoded.png">    </p:cNvPr>
+          <p:cNvPicPr>
+            <a:picLocks noChangeAspect="1"/>
+          </p:cNvPicPr>
+          <p:nvPr/>
+        </p:nvPicPr>
+        <p:blipFill>
+          <a:blip r:embed="rId2"/>
+          <a:stretch>
+            <a:fillRect/>
+          </a:stretch>
+        </p:blipFill>
+        <p:spPr>
+          <a:xfrm>
+            <a:off x="4663440" y="822960"/>
+            <a:ext cx="4297680" cy="3200400"/>
+          </a:xfrm>
+          <a:prstGeom prst="rect">
+            <a:avLst/>
+          </a:prstGeom>
+        </p:spPr>
+      </p:pic>
+      <p:sp>
+        <p:nvSpPr>
+          <p:cNvPr id="6" name="Shape 2"/>
+          <p:cNvSpPr/>
+          <p:nvPr/>
+        </p:nvSpPr>
+        <p:spPr>
+          <a:xfrm>
+            <a:off x="274320" y="4206240"/>
+            <a:ext cx="4114800" cy="457200"/>
           </a:xfrm>
           <a:prstGeom prst="rect">
             <a:avLst/>
           </a:prstGeom>
           <a:solidFill>
-            <a:srgbClr val="F5F7FA"/>
+            <a:srgbClr val="1F4E79"/>
           </a:solidFill>
           <a:ln/>
         </p:spPr>
       </p:sp>
       <p:sp>
         <p:nvSpPr>
-          <p:cNvPr id="5" name="Shape 3"/>
-          <p:cNvSpPr/>
-          <p:nvPr/>
-        </p:nvSpPr>
-        <p:spPr>
-          <a:xfrm>
-            <a:off x="365760" y="960120"/>
-            <a:ext cx="2697480" cy="54864"/>
-          </a:xfrm>
-          <a:prstGeom prst="rect">
-            <a:avLst/>
-          </a:prstGeom>
-          <a:solidFill>
-            <a:srgbClr val="27AE60"/>
-          </a:solidFill>
-          <a:ln/>
-        </p:spPr>
-      </p:sp>
-      <p:sp>
-        <p:nvSpPr>
-          <p:cNvPr id="6" name="Text 4"/>
-          <p:cNvSpPr/>
-          <p:nvPr/>
-        </p:nvSpPr>
-        <p:spPr>
-          <a:xfrm>
-            <a:off x="475488" y="1051560"/>
-            <a:ext cx="2468880" cy="292608"/>
+          <p:cNvPr id="7" name="Text 3"/>
+          <p:cNvSpPr/>
+          <p:nvPr/>
+        </p:nvSpPr>
+        <p:spPr>
+          <a:xfrm>
+            <a:off x="274320" y="4206240"/>
+            <a:ext cx="4114800" cy="457200"/>
           </a:xfrm>
           <a:prstGeom prst="rect">
             <a:avLst/>
@@ -6355,487 +7705,34 @@
           <a:bodyPr wrap="square" rtlCol="0" anchor="ctr"/>
           <a:lstStyle/>
           <a:p>
-            <a:pPr indent="0" marL="0">
-              <a:buNone/>
-            </a:pPr>
-            <a:r>
-              <a:rPr lang="en-US" sz="1300" b="1" dirty="0">
-                <a:solidFill>
-                  <a:srgbClr val="27AE60"/>
-                </a:solidFill>
-                <a:latin typeface="Microsoft YaHei" pitchFamily="34" charset="0"/>
-                <a:ea typeface="Microsoft YaHei" pitchFamily="34" charset="-122"/>
-                <a:cs typeface="Microsoft YaHei" pitchFamily="34" charset="-120"/>
-              </a:rPr>
-              <a:t>高自给率 ≥60%</a:t>
-            </a:r>
-            <a:endParaRPr lang="en-US" sz="1300" dirty="0"/>
-          </a:p>
-        </p:txBody>
-      </p:sp>
-      <p:sp>
-        <p:nvSpPr>
-          <p:cNvPr id="7" name="Text 5"/>
-          <p:cNvSpPr/>
-          <p:nvPr/>
-        </p:nvSpPr>
-        <p:spPr>
-          <a:xfrm>
-            <a:off x="475488" y="1325880"/>
-            <a:ext cx="2468880" cy="256032"/>
-          </a:xfrm>
-          <a:prstGeom prst="rect">
-            <a:avLst/>
-          </a:prstGeom>
-          <a:noFill/>
-          <a:ln/>
-        </p:spPr>
-        <p:txBody>
-          <a:bodyPr wrap="square" rtlCol="0" anchor="ctr"/>
-          <a:lstStyle/>
-          <a:p>
-            <a:pPr indent="0" marL="0">
-              <a:buNone/>
-            </a:pPr>
-            <a:r>
-              <a:rPr lang="en-US" sz="2200" b="1" dirty="0">
-                <a:solidFill>
-                  <a:srgbClr val="1E293B"/>
-                </a:solidFill>
-                <a:latin typeface="Microsoft YaHei" pitchFamily="34" charset="0"/>
-                <a:ea typeface="Microsoft YaHei" pitchFamily="34" charset="-122"/>
-                <a:cs typeface="Microsoft YaHei" pitchFamily="34" charset="-120"/>
-              </a:rPr>
-              <a:t>5省</a:t>
-            </a:r>
-            <a:endParaRPr lang="en-US" sz="2200" dirty="0"/>
-          </a:p>
-        </p:txBody>
-      </p:sp>
-      <p:sp>
-        <p:nvSpPr>
-          <p:cNvPr id="8" name="Text 6"/>
-          <p:cNvSpPr/>
-          <p:nvPr/>
-        </p:nvSpPr>
-        <p:spPr>
-          <a:xfrm>
-            <a:off x="475488" y="1645920"/>
-            <a:ext cx="2468880" cy="1280160"/>
-          </a:xfrm>
-          <a:prstGeom prst="rect">
-            <a:avLst/>
-          </a:prstGeom>
-          <a:noFill/>
-          <a:ln/>
-        </p:spPr>
-        <p:txBody>
-          <a:bodyPr wrap="square" rtlCol="0" anchor="ctr"/>
-          <a:lstStyle/>
-          <a:p>
-            <a:pPr indent="0" marL="0">
-              <a:lnSpc>
-                <a:spcPct val="160000"/>
-              </a:lnSpc>
+            <a:pPr algn="ctr" indent="0" marL="0">
               <a:buNone/>
             </a:pPr>
             <a:r>
               <a:rPr lang="en-US" sz="1100" dirty="0">
                 <a:solidFill>
-                  <a:srgbClr val="1E293B"/>
-                </a:solidFill>
-                <a:latin typeface="Microsoft YaHei" pitchFamily="34" charset="0"/>
-                <a:ea typeface="Microsoft YaHei" pitchFamily="34" charset="-122"/>
-                <a:cs typeface="Microsoft YaHei" pitchFamily="34" charset="-120"/>
-              </a:rPr>
-              <a:t>依赖度: 13.9%</a:t>
+                  <a:srgbClr val="FFFFFF"/>
+                </a:solidFill>
+                <a:latin typeface="Microsoft YaHei" pitchFamily="34" charset="0"/>
+                <a:ea typeface="Microsoft YaHei" pitchFamily="34" charset="-122"/>
+                <a:cs typeface="Microsoft YaHei" pitchFamily="34" charset="-120"/>
+              </a:rPr>
+              <a:t>全国平均依赖度从37%升至47%，转移支付总额从6万亿增至10万亿</a:t>
             </a:r>
             <a:endParaRPr lang="en-US" sz="1100" dirty="0"/>
           </a:p>
-          <a:p>
-            <a:pPr indent="0" marL="0">
-              <a:lnSpc>
-                <a:spcPct val="160000"/>
-              </a:lnSpc>
-              <a:buNone/>
-            </a:pPr>
-            <a:r>
-              <a:rPr lang="en-US" sz="1100" dirty="0">
-                <a:solidFill>
-                  <a:srgbClr val="1E293B"/>
-                </a:solidFill>
-                <a:latin typeface="Microsoft YaHei" pitchFamily="34" charset="0"/>
-                <a:ea typeface="Microsoft YaHei" pitchFamily="34" charset="-122"/>
-                <a:cs typeface="Microsoft YaHei" pitchFamily="34" charset="-120"/>
-              </a:rPr>
-              <a:t>人均转移支付: 3,672元</a:t>
-            </a:r>
-            <a:endParaRPr lang="en-US" sz="1100" dirty="0"/>
-          </a:p>
-          <a:p>
-            <a:pPr indent="0" marL="0">
-              <a:lnSpc>
-                <a:spcPct val="160000"/>
-              </a:lnSpc>
-              <a:buNone/>
-            </a:pPr>
-            <a:r>
-              <a:rPr lang="en-US" sz="1100" dirty="0">
-                <a:solidFill>
-                  <a:srgbClr val="1E293B"/>
-                </a:solidFill>
-                <a:latin typeface="Microsoft YaHei" pitchFamily="34" charset="0"/>
-                <a:ea typeface="Microsoft YaHei" pitchFamily="34" charset="-122"/>
-                <a:cs typeface="Microsoft YaHei" pitchFamily="34" charset="-120"/>
-              </a:rPr>
-              <a:t>人均GDP: 170,057元</a:t>
-            </a:r>
-            <a:endParaRPr lang="en-US" sz="1100" dirty="0"/>
-          </a:p>
-        </p:txBody>
-      </p:sp>
-      <p:sp>
-        <p:nvSpPr>
-          <p:cNvPr id="9" name="Text 7"/>
-          <p:cNvSpPr/>
-          <p:nvPr/>
-        </p:nvSpPr>
-        <p:spPr>
-          <a:xfrm>
-            <a:off x="475488" y="3108960"/>
-            <a:ext cx="2468880" cy="548640"/>
-          </a:xfrm>
-          <a:prstGeom prst="rect">
-            <a:avLst/>
-          </a:prstGeom>
-          <a:noFill/>
-          <a:ln/>
-        </p:spPr>
-        <p:txBody>
-          <a:bodyPr wrap="square" rtlCol="0" anchor="ctr"/>
-          <a:lstStyle/>
-          <a:p>
-            <a:pPr indent="0" marL="0">
-              <a:buNone/>
-            </a:pPr>
-            <a:r>
-              <a:rPr lang="en-US" sz="900" dirty="0">
-                <a:solidFill>
-                  <a:srgbClr val="64748B"/>
-                </a:solidFill>
-                <a:latin typeface="Microsoft YaHei" pitchFamily="34" charset="0"/>
-                <a:ea typeface="Microsoft YaHei" pitchFamily="34" charset="-122"/>
-                <a:cs typeface="Microsoft YaHei" pitchFamily="34" charset="-120"/>
-              </a:rPr>
-              <a:t>上海、北京、广东</a:t>
-            </a:r>
-            <a:endParaRPr lang="en-US" sz="900" dirty="0"/>
-          </a:p>
-          <a:p>
-            <a:pPr indent="0" marL="0">
-              <a:buNone/>
-            </a:pPr>
-            <a:r>
-              <a:rPr lang="en-US" sz="900" dirty="0">
-                <a:solidFill>
-                  <a:srgbClr val="64748B"/>
-                </a:solidFill>
-                <a:latin typeface="Microsoft YaHei" pitchFamily="34" charset="0"/>
-                <a:ea typeface="Microsoft YaHei" pitchFamily="34" charset="-122"/>
-                <a:cs typeface="Microsoft YaHei" pitchFamily="34" charset="-120"/>
-              </a:rPr>
-              <a:t>浙江、江苏</a:t>
-            </a:r>
-            <a:endParaRPr lang="en-US" sz="900" dirty="0"/>
-          </a:p>
-        </p:txBody>
-      </p:sp>
-      <p:sp>
-        <p:nvSpPr>
-          <p:cNvPr id="10" name="Shape 8"/>
-          <p:cNvSpPr/>
-          <p:nvPr/>
-        </p:nvSpPr>
-        <p:spPr>
-          <a:xfrm>
-            <a:off x="3246120" y="960120"/>
-            <a:ext cx="2697480" cy="2834640"/>
-          </a:xfrm>
-          <a:prstGeom prst="rect">
-            <a:avLst/>
-          </a:prstGeom>
-          <a:solidFill>
-            <a:srgbClr val="F5F7FA"/>
-          </a:solidFill>
-          <a:ln/>
-        </p:spPr>
-      </p:sp>
-      <p:sp>
-        <p:nvSpPr>
-          <p:cNvPr id="11" name="Shape 9"/>
-          <p:cNvSpPr/>
-          <p:nvPr/>
-        </p:nvSpPr>
-        <p:spPr>
-          <a:xfrm>
-            <a:off x="3246120" y="960120"/>
-            <a:ext cx="2697480" cy="54864"/>
-          </a:xfrm>
-          <a:prstGeom prst="rect">
-            <a:avLst/>
-          </a:prstGeom>
-          <a:solidFill>
-            <a:srgbClr val="E67E22"/>
-          </a:solidFill>
-          <a:ln/>
-        </p:spPr>
-      </p:sp>
-      <p:sp>
-        <p:nvSpPr>
-          <p:cNvPr id="12" name="Text 10"/>
-          <p:cNvSpPr/>
-          <p:nvPr/>
-        </p:nvSpPr>
-        <p:spPr>
-          <a:xfrm>
-            <a:off x="3355848" y="1051560"/>
-            <a:ext cx="2468880" cy="292608"/>
-          </a:xfrm>
-          <a:prstGeom prst="rect">
-            <a:avLst/>
-          </a:prstGeom>
-          <a:noFill/>
-          <a:ln/>
-        </p:spPr>
-        <p:txBody>
-          <a:bodyPr wrap="square" rtlCol="0" anchor="ctr"/>
-          <a:lstStyle/>
-          <a:p>
-            <a:pPr indent="0" marL="0">
-              <a:buNone/>
-            </a:pPr>
-            <a:r>
-              <a:rPr lang="en-US" sz="1300" b="1" dirty="0">
-                <a:solidFill>
-                  <a:srgbClr val="E67E22"/>
-                </a:solidFill>
-                <a:latin typeface="Microsoft YaHei" pitchFamily="34" charset="0"/>
-                <a:ea typeface="Microsoft YaHei" pitchFamily="34" charset="-122"/>
-                <a:cs typeface="Microsoft YaHei" pitchFamily="34" charset="-120"/>
-              </a:rPr>
-              <a:t>中自给率 35-60%</a:t>
-            </a:r>
-            <a:endParaRPr lang="en-US" sz="1300" dirty="0"/>
-          </a:p>
-        </p:txBody>
-      </p:sp>
-      <p:sp>
-        <p:nvSpPr>
-          <p:cNvPr id="13" name="Text 11"/>
-          <p:cNvSpPr/>
-          <p:nvPr/>
-        </p:nvSpPr>
-        <p:spPr>
-          <a:xfrm>
-            <a:off x="3355848" y="1325880"/>
-            <a:ext cx="2468880" cy="256032"/>
-          </a:xfrm>
-          <a:prstGeom prst="rect">
-            <a:avLst/>
-          </a:prstGeom>
-          <a:noFill/>
-          <a:ln/>
-        </p:spPr>
-        <p:txBody>
-          <a:bodyPr wrap="square" rtlCol="0" anchor="ctr"/>
-          <a:lstStyle/>
-          <a:p>
-            <a:pPr indent="0" marL="0">
-              <a:buNone/>
-            </a:pPr>
-            <a:r>
-              <a:rPr lang="en-US" sz="2200" b="1" dirty="0">
-                <a:solidFill>
-                  <a:srgbClr val="1E293B"/>
-                </a:solidFill>
-                <a:latin typeface="Microsoft YaHei" pitchFamily="34" charset="0"/>
-                <a:ea typeface="Microsoft YaHei" pitchFamily="34" charset="-122"/>
-                <a:cs typeface="Microsoft YaHei" pitchFamily="34" charset="-120"/>
-              </a:rPr>
-              <a:t>16省</a:t>
-            </a:r>
-            <a:endParaRPr lang="en-US" sz="2200" dirty="0"/>
-          </a:p>
-        </p:txBody>
-      </p:sp>
-      <p:sp>
-        <p:nvSpPr>
-          <p:cNvPr id="14" name="Text 12"/>
-          <p:cNvSpPr/>
-          <p:nvPr/>
-        </p:nvSpPr>
-        <p:spPr>
-          <a:xfrm>
-            <a:off x="3355848" y="1645920"/>
-            <a:ext cx="2468880" cy="1280160"/>
-          </a:xfrm>
-          <a:prstGeom prst="rect">
-            <a:avLst/>
-          </a:prstGeom>
-          <a:noFill/>
-          <a:ln/>
-        </p:spPr>
-        <p:txBody>
-          <a:bodyPr wrap="square" rtlCol="0" anchor="ctr"/>
-          <a:lstStyle/>
-          <a:p>
-            <a:pPr indent="0" marL="0">
-              <a:lnSpc>
-                <a:spcPct val="160000"/>
-              </a:lnSpc>
-              <a:buNone/>
-            </a:pPr>
-            <a:r>
-              <a:rPr lang="en-US" sz="1100" dirty="0">
-                <a:solidFill>
-                  <a:srgbClr val="1E293B"/>
-                </a:solidFill>
-                <a:latin typeface="Microsoft YaHei" pitchFamily="34" charset="0"/>
-                <a:ea typeface="Microsoft YaHei" pitchFamily="34" charset="-122"/>
-                <a:cs typeface="Microsoft YaHei" pitchFamily="34" charset="-120"/>
-              </a:rPr>
-              <a:t>依赖度: 44.2%</a:t>
-            </a:r>
-            <a:endParaRPr lang="en-US" sz="1100" dirty="0"/>
-          </a:p>
-          <a:p>
-            <a:pPr indent="0" marL="0">
-              <a:lnSpc>
-                <a:spcPct val="160000"/>
-              </a:lnSpc>
-              <a:buNone/>
-            </a:pPr>
-            <a:r>
-              <a:rPr lang="en-US" sz="1100" dirty="0">
-                <a:solidFill>
-                  <a:srgbClr val="1E293B"/>
-                </a:solidFill>
-                <a:latin typeface="Microsoft YaHei" pitchFamily="34" charset="0"/>
-                <a:ea typeface="Microsoft YaHei" pitchFamily="34" charset="-122"/>
-                <a:cs typeface="Microsoft YaHei" pitchFamily="34" charset="-120"/>
-              </a:rPr>
-              <a:t>人均转移支付: 7,729元</a:t>
-            </a:r>
-            <a:endParaRPr lang="en-US" sz="1100" dirty="0"/>
-          </a:p>
-          <a:p>
-            <a:pPr indent="0" marL="0">
-              <a:lnSpc>
-                <a:spcPct val="160000"/>
-              </a:lnSpc>
-              <a:buNone/>
-            </a:pPr>
-            <a:r>
-              <a:rPr lang="en-US" sz="1100" dirty="0">
-                <a:solidFill>
-                  <a:srgbClr val="1E293B"/>
-                </a:solidFill>
-                <a:latin typeface="Microsoft YaHei" pitchFamily="34" charset="0"/>
-                <a:ea typeface="Microsoft YaHei" pitchFamily="34" charset="-122"/>
-                <a:cs typeface="Microsoft YaHei" pitchFamily="34" charset="-120"/>
-              </a:rPr>
-              <a:t>人均GDP: 90,195元</a:t>
-            </a:r>
-            <a:endParaRPr lang="en-US" sz="1100" dirty="0"/>
-          </a:p>
-        </p:txBody>
-      </p:sp>
-      <p:sp>
-        <p:nvSpPr>
-          <p:cNvPr id="15" name="Text 13"/>
-          <p:cNvSpPr/>
-          <p:nvPr/>
-        </p:nvSpPr>
-        <p:spPr>
-          <a:xfrm>
-            <a:off x="3355848" y="3108960"/>
-            <a:ext cx="2468880" cy="548640"/>
-          </a:xfrm>
-          <a:prstGeom prst="rect">
-            <a:avLst/>
-          </a:prstGeom>
-          <a:noFill/>
-          <a:ln/>
-        </p:spPr>
-        <p:txBody>
-          <a:bodyPr wrap="square" rtlCol="0" anchor="ctr"/>
-          <a:lstStyle/>
-          <a:p>
-            <a:pPr indent="0" marL="0">
-              <a:buNone/>
-            </a:pPr>
-            <a:r>
-              <a:rPr lang="en-US" sz="900" dirty="0">
-                <a:solidFill>
-                  <a:srgbClr val="64748B"/>
-                </a:solidFill>
-                <a:latin typeface="Microsoft YaHei" pitchFamily="34" charset="0"/>
-                <a:ea typeface="Microsoft YaHei" pitchFamily="34" charset="-122"/>
-                <a:cs typeface="Microsoft YaHei" pitchFamily="34" charset="-120"/>
-              </a:rPr>
-              <a:t>山东、福建、山西</a:t>
-            </a:r>
-            <a:endParaRPr lang="en-US" sz="900" dirty="0"/>
-          </a:p>
-          <a:p>
-            <a:pPr indent="0" marL="0">
-              <a:buNone/>
-            </a:pPr>
-            <a:r>
-              <a:rPr lang="en-US" sz="900" dirty="0">
-                <a:solidFill>
-                  <a:srgbClr val="64748B"/>
-                </a:solidFill>
-                <a:latin typeface="Microsoft YaHei" pitchFamily="34" charset="0"/>
-                <a:ea typeface="Microsoft YaHei" pitchFamily="34" charset="-122"/>
-                <a:cs typeface="Microsoft YaHei" pitchFamily="34" charset="-120"/>
-              </a:rPr>
-              <a:t>内蒙古、辽宁等</a:t>
-            </a:r>
-            <a:endParaRPr lang="en-US" sz="900" dirty="0"/>
-          </a:p>
-        </p:txBody>
-      </p:sp>
-      <p:sp>
-        <p:nvSpPr>
-          <p:cNvPr id="16" name="Shape 14"/>
-          <p:cNvSpPr/>
-          <p:nvPr/>
-        </p:nvSpPr>
-        <p:spPr>
-          <a:xfrm>
-            <a:off x="6126480" y="960120"/>
-            <a:ext cx="2697480" cy="2834640"/>
-          </a:xfrm>
-          <a:prstGeom prst="rect">
-            <a:avLst/>
-          </a:prstGeom>
-          <a:solidFill>
-            <a:srgbClr val="F5F7FA"/>
-          </a:solidFill>
-          <a:ln/>
-        </p:spPr>
-      </p:sp>
-      <p:sp>
-        <p:nvSpPr>
-          <p:cNvPr id="17" name="Shape 15"/>
-          <p:cNvSpPr/>
-          <p:nvPr/>
-        </p:nvSpPr>
-        <p:spPr>
-          <a:xfrm>
-            <a:off x="6126480" y="960120"/>
-            <a:ext cx="2697480" cy="54864"/>
+        </p:txBody>
+      </p:sp>
+      <p:sp>
+        <p:nvSpPr>
+          <p:cNvPr id="8" name="Shape 4"/>
+          <p:cNvSpPr/>
+          <p:nvPr/>
+        </p:nvSpPr>
+        <p:spPr>
+          <a:xfrm>
+            <a:off x="4572000" y="4206240"/>
+            <a:ext cx="4297680" cy="457200"/>
           </a:xfrm>
           <a:prstGeom prst="rect">
             <a:avLst/>
@@ -6848,14 +7745,14 @@
       </p:sp>
       <p:sp>
         <p:nvSpPr>
-          <p:cNvPr id="18" name="Text 16"/>
-          <p:cNvSpPr/>
-          <p:nvPr/>
-        </p:nvSpPr>
-        <p:spPr>
-          <a:xfrm>
-            <a:off x="6236208" y="1051560"/>
-            <a:ext cx="2468880" cy="292608"/>
+          <p:cNvPr id="9" name="Text 5"/>
+          <p:cNvSpPr/>
+          <p:nvPr/>
+        </p:nvSpPr>
+        <p:spPr>
+          <a:xfrm>
+            <a:off x="4572000" y="4206240"/>
+            <a:ext cx="4297680" cy="457200"/>
           </a:xfrm>
           <a:prstGeom prst="rect">
             <a:avLst/>
@@ -6867,296 +7764,21 @@
           <a:bodyPr wrap="square" rtlCol="0" anchor="ctr"/>
           <a:lstStyle/>
           <a:p>
-            <a:pPr indent="0" marL="0">
-              <a:buNone/>
-            </a:pPr>
-            <a:r>
-              <a:rPr lang="en-US" sz="1300" b="1" dirty="0">
-                <a:solidFill>
-                  <a:srgbClr val="C0392B"/>
-                </a:solidFill>
-                <a:latin typeface="Microsoft YaHei" pitchFamily="34" charset="0"/>
-                <a:ea typeface="Microsoft YaHei" pitchFamily="34" charset="-122"/>
-                <a:cs typeface="Microsoft YaHei" pitchFamily="34" charset="-120"/>
-              </a:rPr>
-              <a:t>低自给率 &lt;35%</a:t>
-            </a:r>
-            <a:endParaRPr lang="en-US" sz="1300" dirty="0"/>
-          </a:p>
-        </p:txBody>
-      </p:sp>
-      <p:sp>
-        <p:nvSpPr>
-          <p:cNvPr id="19" name="Text 17"/>
-          <p:cNvSpPr/>
-          <p:nvPr/>
-        </p:nvSpPr>
-        <p:spPr>
-          <a:xfrm>
-            <a:off x="6236208" y="1325880"/>
-            <a:ext cx="2468880" cy="256032"/>
-          </a:xfrm>
-          <a:prstGeom prst="rect">
-            <a:avLst/>
-          </a:prstGeom>
-          <a:noFill/>
-          <a:ln/>
-        </p:spPr>
-        <p:txBody>
-          <a:bodyPr wrap="square" rtlCol="0" anchor="ctr"/>
-          <a:lstStyle/>
-          <a:p>
-            <a:pPr indent="0" marL="0">
-              <a:buNone/>
-            </a:pPr>
-            <a:r>
-              <a:rPr lang="en-US" sz="2200" b="1" dirty="0">
-                <a:solidFill>
-                  <a:srgbClr val="1E293B"/>
-                </a:solidFill>
-                <a:latin typeface="Microsoft YaHei" pitchFamily="34" charset="0"/>
-                <a:ea typeface="Microsoft YaHei" pitchFamily="34" charset="-122"/>
-                <a:cs typeface="Microsoft YaHei" pitchFamily="34" charset="-120"/>
-              </a:rPr>
-              <a:t>10省</a:t>
-            </a:r>
-            <a:endParaRPr lang="en-US" sz="2200" dirty="0"/>
-          </a:p>
-        </p:txBody>
-      </p:sp>
-      <p:sp>
-        <p:nvSpPr>
-          <p:cNvPr id="20" name="Text 18"/>
-          <p:cNvSpPr/>
-          <p:nvPr/>
-        </p:nvSpPr>
-        <p:spPr>
-          <a:xfrm>
-            <a:off x="6236208" y="1645920"/>
-            <a:ext cx="2468880" cy="1280160"/>
-          </a:xfrm>
-          <a:prstGeom prst="rect">
-            <a:avLst/>
-          </a:prstGeom>
-          <a:noFill/>
-          <a:ln/>
-        </p:spPr>
-        <p:txBody>
-          <a:bodyPr wrap="square" rtlCol="0" anchor="ctr"/>
-          <a:lstStyle/>
-          <a:p>
-            <a:pPr indent="0" marL="0">
-              <a:lnSpc>
-                <a:spcPct val="160000"/>
-              </a:lnSpc>
+            <a:pPr algn="ctr" indent="0" marL="0">
               <a:buNone/>
             </a:pPr>
             <a:r>
               <a:rPr lang="en-US" sz="1100" dirty="0">
                 <a:solidFill>
-                  <a:srgbClr val="1E293B"/>
-                </a:solidFill>
-                <a:latin typeface="Microsoft YaHei" pitchFamily="34" charset="0"/>
-                <a:ea typeface="Microsoft YaHei" pitchFamily="34" charset="-122"/>
-                <a:cs typeface="Microsoft YaHei" pitchFamily="34" charset="-120"/>
-              </a:rPr>
-              <a:t>依赖度: 68.0%</a:t>
+                  <a:srgbClr val="FFFFFF"/>
+                </a:solidFill>
+                <a:latin typeface="Microsoft YaHei" pitchFamily="34" charset="0"/>
+                <a:ea typeface="Microsoft YaHei" pitchFamily="34" charset="-122"/>
+                <a:cs typeface="Microsoft YaHei" pitchFamily="34" charset="-120"/>
+              </a:rPr>
+              <a:t>依赖度分布整体右移，中位数上升约10个百分点</a:t>
             </a:r>
             <a:endParaRPr lang="en-US" sz="1100" dirty="0"/>
-          </a:p>
-          <a:p>
-            <a:pPr indent="0" marL="0">
-              <a:lnSpc>
-                <a:spcPct val="160000"/>
-              </a:lnSpc>
-              <a:buNone/>
-            </a:pPr>
-            <a:r>
-              <a:rPr lang="en-US" sz="1100" dirty="0">
-                <a:solidFill>
-                  <a:srgbClr val="1E293B"/>
-                </a:solidFill>
-                <a:latin typeface="Microsoft YaHei" pitchFamily="34" charset="0"/>
-                <a:ea typeface="Microsoft YaHei" pitchFamily="34" charset="-122"/>
-                <a:cs typeface="Microsoft YaHei" pitchFamily="34" charset="-120"/>
-              </a:rPr>
-              <a:t>人均转移支付: 19,916元</a:t>
-            </a:r>
-            <a:endParaRPr lang="en-US" sz="1100" dirty="0"/>
-          </a:p>
-          <a:p>
-            <a:pPr indent="0" marL="0">
-              <a:lnSpc>
-                <a:spcPct val="160000"/>
-              </a:lnSpc>
-              <a:buNone/>
-            </a:pPr>
-            <a:r>
-              <a:rPr lang="en-US" sz="1100" dirty="0">
-                <a:solidFill>
-                  <a:srgbClr val="1E293B"/>
-                </a:solidFill>
-                <a:latin typeface="Microsoft YaHei" pitchFamily="34" charset="0"/>
-                <a:ea typeface="Microsoft YaHei" pitchFamily="34" charset="-122"/>
-                <a:cs typeface="Microsoft YaHei" pitchFamily="34" charset="-120"/>
-              </a:rPr>
-              <a:t>人均GDP: 64,863元</a:t>
-            </a:r>
-            <a:endParaRPr lang="en-US" sz="1100" dirty="0"/>
-          </a:p>
-        </p:txBody>
-      </p:sp>
-      <p:sp>
-        <p:nvSpPr>
-          <p:cNvPr id="21" name="Text 19"/>
-          <p:cNvSpPr/>
-          <p:nvPr/>
-        </p:nvSpPr>
-        <p:spPr>
-          <a:xfrm>
-            <a:off x="6236208" y="3108960"/>
-            <a:ext cx="2468880" cy="548640"/>
-          </a:xfrm>
-          <a:prstGeom prst="rect">
-            <a:avLst/>
-          </a:prstGeom>
-          <a:noFill/>
-          <a:ln/>
-        </p:spPr>
-        <p:txBody>
-          <a:bodyPr wrap="square" rtlCol="0" anchor="ctr"/>
-          <a:lstStyle/>
-          <a:p>
-            <a:pPr indent="0" marL="0">
-              <a:buNone/>
-            </a:pPr>
-            <a:r>
-              <a:rPr lang="en-US" sz="900" dirty="0">
-                <a:solidFill>
-                  <a:srgbClr val="64748B"/>
-                </a:solidFill>
-                <a:latin typeface="Microsoft YaHei" pitchFamily="34" charset="0"/>
-                <a:ea typeface="Microsoft YaHei" pitchFamily="34" charset="-122"/>
-                <a:cs typeface="Microsoft YaHei" pitchFamily="34" charset="-120"/>
-              </a:rPr>
-              <a:t>西藏、甘肃、青海</a:t>
-            </a:r>
-            <a:endParaRPr lang="en-US" sz="900" dirty="0"/>
-          </a:p>
-          <a:p>
-            <a:pPr indent="0" marL="0">
-              <a:buNone/>
-            </a:pPr>
-            <a:r>
-              <a:rPr lang="en-US" sz="900" dirty="0">
-                <a:solidFill>
-                  <a:srgbClr val="64748B"/>
-                </a:solidFill>
-                <a:latin typeface="Microsoft YaHei" pitchFamily="34" charset="0"/>
-                <a:ea typeface="Microsoft YaHei" pitchFamily="34" charset="-122"/>
-                <a:cs typeface="Microsoft YaHei" pitchFamily="34" charset="-120"/>
-              </a:rPr>
-              <a:t>宁夏、黑龙江等</a:t>
-            </a:r>
-            <a:endParaRPr lang="en-US" sz="900" dirty="0"/>
-          </a:p>
-        </p:txBody>
-      </p:sp>
-      <p:sp>
-        <p:nvSpPr>
-          <p:cNvPr id="22" name="Text 20"/>
-          <p:cNvSpPr/>
-          <p:nvPr/>
-        </p:nvSpPr>
-        <p:spPr>
-          <a:xfrm>
-            <a:off x="457200" y="4023360"/>
-            <a:ext cx="8229600" cy="640080"/>
-          </a:xfrm>
-          <a:prstGeom prst="rect">
-            <a:avLst/>
-          </a:prstGeom>
-          <a:noFill/>
-          <a:ln/>
-        </p:spPr>
-        <p:txBody>
-          <a:bodyPr wrap="square" rtlCol="0" anchor="ctr"/>
-          <a:lstStyle/>
-          <a:p>
-            <a:pPr indent="0" marL="0">
-              <a:buNone/>
-            </a:pPr>
-            <a:r>
-              <a:rPr lang="en-US" sz="1200" i="1" dirty="0">
-                <a:solidFill>
-                  <a:srgbClr val="64748B"/>
-                </a:solidFill>
-                <a:latin typeface="Microsoft YaHei" pitchFamily="34" charset="0"/>
-                <a:ea typeface="Microsoft YaHei" pitchFamily="34" charset="-122"/>
-                <a:cs typeface="Microsoft YaHei" pitchFamily="34" charset="-120"/>
-              </a:rPr>
-              <a:t>低自给率省份人均转移支付是高自给率的5.4倍 → 转移支付向财力薄弱地区倾斜。但人均GDP差距（17.0万 vs 6.5万）同样显著</a:t>
-            </a:r>
-            <a:endParaRPr lang="en-US" sz="1200" dirty="0"/>
-          </a:p>
-        </p:txBody>
-      </p:sp>
-      <p:sp>
-        <p:nvSpPr>
-          <p:cNvPr id="23" name="Shape 21"/>
-          <p:cNvSpPr/>
-          <p:nvPr/>
-        </p:nvSpPr>
-        <p:spPr>
-          <a:xfrm>
-            <a:off x="457200" y="4754880"/>
-            <a:ext cx="8229600" cy="237744"/>
-          </a:xfrm>
-          <a:prstGeom prst="rect">
-            <a:avLst/>
-          </a:prstGeom>
-          <a:solidFill>
-            <a:srgbClr val="D5E8F0"/>
-          </a:solidFill>
-          <a:ln/>
-        </p:spPr>
-      </p:sp>
-      <p:sp>
-        <p:nvSpPr>
-          <p:cNvPr id="24" name="Text 22"/>
-          <p:cNvSpPr/>
-          <p:nvPr/>
-        </p:nvSpPr>
-        <p:spPr>
-          <a:xfrm>
-            <a:off x="512064" y="4754880"/>
-            <a:ext cx="8119872" cy="237744"/>
-          </a:xfrm>
-          <a:prstGeom prst="rect">
-            <a:avLst/>
-          </a:prstGeom>
-          <a:noFill/>
-          <a:ln/>
-        </p:spPr>
-        <p:txBody>
-          <a:bodyPr wrap="square" rtlCol="0" anchor="ctr"/>
-          <a:lstStyle/>
-          <a:p>
-            <a:pPr indent="0" marL="0">
-              <a:buNone/>
-            </a:pPr>
-            <a:r>
-              <a:rPr lang="en-US" sz="750" dirty="0">
-                <a:solidFill>
-                  <a:srgbClr val="1F4E79"/>
-                </a:solidFill>
-                <a:latin typeface="Microsoft YaHei" pitchFamily="34" charset="0"/>
-                <a:ea typeface="Microsoft YaHei" pitchFamily="34" charset="-122"/>
-                <a:cs typeface="Microsoft YaHei" pitchFamily="34" charset="-120"/>
-              </a:rPr>
-              <a:t>AI协作：AI自动计算三类均值并对齐结论 → 人补充政策解读：专项与一般性转移支付分配逻辑不同</a:t>
-            </a:r>
-            <a:endParaRPr lang="en-US" sz="750" dirty="0"/>
           </a:p>
         </p:txBody>
       </p:sp>
@@ -7174,7 +7796,7 @@
     <p:bg>
       <p:bgPr>
         <a:solidFill>
-          <a:srgbClr val="FFFFFF"/>
+          <a:srgbClr val="1A3C5E"/>
         </a:solidFill>
       </p:bgPr>
     </p:bg>
@@ -7194,14 +7816,34 @@
       </p:grpSpPr>
       <p:sp>
         <p:nvSpPr>
-          <p:cNvPr id="2" name="Text 0"/>
-          <p:cNvSpPr/>
-          <p:nvPr/>
-        </p:nvSpPr>
-        <p:spPr>
-          <a:xfrm>
-            <a:off x="457200" y="182880"/>
-            <a:ext cx="8229600" cy="502920"/>
+          <p:cNvPr id="2" name="Shape 0"/>
+          <p:cNvSpPr/>
+          <p:nvPr/>
+        </p:nvSpPr>
+        <p:spPr>
+          <a:xfrm>
+            <a:off x="457200" y="2286000"/>
+            <a:ext cx="54864" cy="914400"/>
+          </a:xfrm>
+          <a:prstGeom prst="rect">
+            <a:avLst/>
+          </a:prstGeom>
+          <a:solidFill>
+            <a:srgbClr val="C0392B"/>
+          </a:solidFill>
+          <a:ln/>
+        </p:spPr>
+      </p:sp>
+      <p:sp>
+        <p:nvSpPr>
+          <p:cNvPr id="3" name="Text 1"/>
+          <p:cNvSpPr/>
+          <p:nvPr/>
+        </p:nvSpPr>
+        <p:spPr>
+          <a:xfrm>
+            <a:off x="731520" y="2286000"/>
+            <a:ext cx="7315200" cy="914400"/>
           </a:xfrm>
           <a:prstGeom prst="rect">
             <a:avLst/>
@@ -7217,250 +7859,17 @@
               <a:buNone/>
             </a:pPr>
             <a:r>
-              <a:rPr lang="en-US" sz="2400" b="1" dirty="0">
-                <a:solidFill>
-                  <a:srgbClr val="1A3C5E"/>
-                </a:solidFill>
-                <a:latin typeface="Microsoft YaHei" pitchFamily="34" charset="0"/>
-                <a:ea typeface="Microsoft YaHei" pitchFamily="34" charset="-122"/>
-                <a:cs typeface="Microsoft YaHei" pitchFamily="34" charset="-120"/>
-              </a:rPr>
-              <a:t>结果④：全国趋势与逐年变化</a:t>
-            </a:r>
-            <a:endParaRPr lang="en-US" sz="2400" dirty="0"/>
-          </a:p>
-        </p:txBody>
-      </p:sp>
-      <p:sp>
-        <p:nvSpPr>
-          <p:cNvPr id="3" name="Shape 1"/>
-          <p:cNvSpPr/>
-          <p:nvPr/>
-        </p:nvSpPr>
-        <p:spPr>
-          <a:xfrm>
-            <a:off x="457200" y="685800"/>
-            <a:ext cx="914400" cy="27432"/>
-          </a:xfrm>
-          <a:prstGeom prst="rect">
-            <a:avLst/>
-          </a:prstGeom>
-          <a:solidFill>
-            <a:srgbClr val="2E75B6"/>
-          </a:solidFill>
-          <a:ln/>
-        </p:spPr>
-      </p:sp>
-      <p:pic>
-        <p:nvPicPr>
-          <p:cNvPr id="4" name="Image 0" descr="preencoded.png">    </p:cNvPr>
-          <p:cNvPicPr>
-            <a:picLocks noChangeAspect="1"/>
-          </p:cNvPicPr>
-          <p:nvPr/>
-        </p:nvPicPr>
-        <p:blipFill>
-          <a:blip r:embed="rId1"/>
-          <a:stretch>
-            <a:fillRect/>
-          </a:stretch>
-        </p:blipFill>
-        <p:spPr>
-          <a:xfrm>
-            <a:off x="91440" y="822960"/>
-            <a:ext cx="4389120" cy="3200400"/>
-          </a:xfrm>
-          <a:prstGeom prst="rect">
-            <a:avLst/>
-          </a:prstGeom>
-        </p:spPr>
-      </p:pic>
-      <p:pic>
-        <p:nvPicPr>
-          <p:cNvPr id="5" name="Image 1" descr="preencoded.png">    </p:cNvPr>
-          <p:cNvPicPr>
-            <a:picLocks noChangeAspect="1"/>
-          </p:cNvPicPr>
-          <p:nvPr/>
-        </p:nvPicPr>
-        <p:blipFill>
-          <a:blip r:embed="rId2"/>
-          <a:stretch>
-            <a:fillRect/>
-          </a:stretch>
-        </p:blipFill>
-        <p:spPr>
-          <a:xfrm>
-            <a:off x="4663440" y="822960"/>
-            <a:ext cx="4297680" cy="3200400"/>
-          </a:xfrm>
-          <a:prstGeom prst="rect">
-            <a:avLst/>
-          </a:prstGeom>
-        </p:spPr>
-      </p:pic>
-      <p:sp>
-        <p:nvSpPr>
-          <p:cNvPr id="6" name="Text 2"/>
-          <p:cNvSpPr/>
-          <p:nvPr/>
-        </p:nvSpPr>
-        <p:spPr>
-          <a:xfrm>
-            <a:off x="457200" y="4206240"/>
-            <a:ext cx="4206240" cy="640080"/>
-          </a:xfrm>
-          <a:prstGeom prst="rect">
-            <a:avLst/>
-          </a:prstGeom>
-          <a:noFill/>
-          <a:ln/>
-        </p:spPr>
-        <p:txBody>
-          <a:bodyPr wrap="square" rtlCol="0" anchor="ctr"/>
-          <a:lstStyle/>
-          <a:p>
-            <a:pPr indent="0" marL="0">
-              <a:buNone/>
-            </a:pPr>
-            <a:r>
-              <a:rPr lang="en-US" sz="1100" b="1" dirty="0">
-                <a:solidFill>
-                  <a:srgbClr val="64748B"/>
-                </a:solidFill>
-                <a:latin typeface="Microsoft YaHei" pitchFamily="34" charset="0"/>
-                <a:ea typeface="Microsoft YaHei" pitchFamily="34" charset="-122"/>
-                <a:cs typeface="Microsoft YaHei" pitchFamily="34" charset="-120"/>
-              </a:rPr>
-              <a:t>左图：</a:t>
-            </a:r>
-            <a:pPr indent="0" marL="0">
-              <a:buNone/>
-            </a:pPr>
-            <a:r>
-              <a:rPr lang="en-US" sz="1100" dirty="0">
-                <a:solidFill>
-                  <a:srgbClr val="64748B"/>
-                </a:solidFill>
-                <a:latin typeface="Microsoft YaHei" pitchFamily="34" charset="0"/>
-                <a:ea typeface="Microsoft YaHei" pitchFamily="34" charset="-122"/>
-                <a:cs typeface="Microsoft YaHei" pitchFamily="34" charset="-120"/>
-              </a:rPr>
-              <a:t>全国平均依赖度从37.4%(2018)升至47.0%(2024)，增长约10个百分点。转移支付总额从6万亿增至10万亿，年均增速约9%。</a:t>
-            </a:r>
-            <a:endParaRPr lang="en-US" sz="1100" dirty="0"/>
-          </a:p>
-        </p:txBody>
-      </p:sp>
-      <p:sp>
-        <p:nvSpPr>
-          <p:cNvPr id="7" name="Text 3"/>
-          <p:cNvSpPr/>
-          <p:nvPr/>
-        </p:nvSpPr>
-        <p:spPr>
-          <a:xfrm>
-            <a:off x="4754880" y="4206240"/>
-            <a:ext cx="4114800" cy="640080"/>
-          </a:xfrm>
-          <a:prstGeom prst="rect">
-            <a:avLst/>
-          </a:prstGeom>
-          <a:noFill/>
-          <a:ln/>
-        </p:spPr>
-        <p:txBody>
-          <a:bodyPr wrap="square" rtlCol="0" anchor="ctr"/>
-          <a:lstStyle/>
-          <a:p>
-            <a:pPr indent="0" marL="0">
-              <a:buNone/>
-            </a:pPr>
-            <a:r>
-              <a:rPr lang="en-US" sz="1100" b="1" dirty="0">
-                <a:solidFill>
-                  <a:srgbClr val="64748B"/>
-                </a:solidFill>
-                <a:latin typeface="Microsoft YaHei" pitchFamily="34" charset="0"/>
-                <a:ea typeface="Microsoft YaHei" pitchFamily="34" charset="-122"/>
-                <a:cs typeface="Microsoft YaHei" pitchFamily="34" charset="-120"/>
-              </a:rPr>
-              <a:t>右图：</a:t>
-            </a:r>
-            <a:pPr indent="0" marL="0">
-              <a:buNone/>
-            </a:pPr>
-            <a:r>
-              <a:rPr lang="en-US" sz="1100" dirty="0">
-                <a:solidFill>
-                  <a:srgbClr val="64748B"/>
-                </a:solidFill>
-                <a:latin typeface="Microsoft YaHei" pitchFamily="34" charset="0"/>
-                <a:ea typeface="Microsoft YaHei" pitchFamily="34" charset="-122"/>
-                <a:cs typeface="Microsoft YaHei" pitchFamily="34" charset="-120"/>
-              </a:rPr>
-              <a:t>逐年变化量 = 当年依赖度 − 上年依赖度。红色=加深依赖，蓝色=减轻依赖。多数中西部省份波动在±5个百分点之间。</a:t>
-            </a:r>
-            <a:endParaRPr lang="en-US" sz="1100" dirty="0"/>
-          </a:p>
-        </p:txBody>
-      </p:sp>
-      <p:sp>
-        <p:nvSpPr>
-          <p:cNvPr id="8" name="Shape 4"/>
-          <p:cNvSpPr/>
-          <p:nvPr/>
-        </p:nvSpPr>
-        <p:spPr>
-          <a:xfrm>
-            <a:off x="457200" y="4937760"/>
-            <a:ext cx="8229600" cy="237744"/>
-          </a:xfrm>
-          <a:prstGeom prst="rect">
-            <a:avLst/>
-          </a:prstGeom>
-          <a:solidFill>
-            <a:srgbClr val="D5E8F0"/>
-          </a:solidFill>
-          <a:ln/>
-        </p:spPr>
-      </p:sp>
-      <p:sp>
-        <p:nvSpPr>
-          <p:cNvPr id="9" name="Text 5"/>
-          <p:cNvSpPr/>
-          <p:nvPr/>
-        </p:nvSpPr>
-        <p:spPr>
-          <a:xfrm>
-            <a:off x="512064" y="4937760"/>
-            <a:ext cx="8119872" cy="237744"/>
-          </a:xfrm>
-          <a:prstGeom prst="rect">
-            <a:avLst/>
-          </a:prstGeom>
-          <a:noFill/>
-          <a:ln/>
-        </p:spPr>
-        <p:txBody>
-          <a:bodyPr wrap="square" rtlCol="0" anchor="ctr"/>
-          <a:lstStyle/>
-          <a:p>
-            <a:pPr indent="0" marL="0">
-              <a:buNone/>
-            </a:pPr>
-            <a:r>
-              <a:rPr lang="en-US" sz="750" dirty="0">
-                <a:solidFill>
-                  <a:srgbClr val="1F4E79"/>
-                </a:solidFill>
-                <a:latin typeface="Microsoft YaHei" pitchFamily="34" charset="0"/>
-                <a:ea typeface="Microsoft YaHei" pitchFamily="34" charset="-122"/>
-                <a:cs typeface="Microsoft YaHei" pitchFamily="34" charset="-120"/>
-              </a:rPr>
-              <a:t>AI协作：matplotlib折线+面积图 / geopandas 6子图红蓝时序变化量（设计由绝对值改为较上年差额）</a:t>
-            </a:r>
-            <a:endParaRPr lang="en-US" sz="750" dirty="0"/>
+              <a:rPr lang="en-US" sz="3200" b="1" dirty="0">
+                <a:solidFill>
+                  <a:srgbClr val="FFFFFF"/>
+                </a:solidFill>
+                <a:latin typeface="Microsoft YaHei" pitchFamily="34" charset="0"/>
+                <a:ea typeface="Microsoft YaHei" pitchFamily="34" charset="-122"/>
+                <a:cs typeface="Microsoft YaHei" pitchFamily="34" charset="-120"/>
+              </a:rPr>
+              <a:t>第二部分：分组对比与统计检验</a:t>
+            </a:r>
+            <a:endParaRPr lang="en-US" sz="3200" dirty="0"/>
           </a:p>
         </p:txBody>
       </p:sp>
@@ -7529,7 +7938,7 @@
                 <a:ea typeface="Microsoft YaHei" pitchFamily="34" charset="-122"/>
                 <a:cs typeface="Microsoft YaHei" pitchFamily="34" charset="-120"/>
               </a:rPr>
-              <a:t>结果⑤：统计检验 — 显著性验证</a:t>
+              <a:t>发现三：三类财政自给率省份的关键差异</a:t>
             </a:r>
             <a:endParaRPr lang="en-US" sz="2400" dirty="0"/>
           </a:p>
@@ -7555,40 +7964,16 @@
           <a:ln/>
         </p:spPr>
       </p:sp>
-      <p:pic>
-        <p:nvPicPr>
-          <p:cNvPr id="4" name="Image 0" descr="preencoded.png">    </p:cNvPr>
-          <p:cNvPicPr>
-            <a:picLocks noChangeAspect="1"/>
-          </p:cNvPicPr>
-          <p:nvPr/>
-        </p:nvPicPr>
-        <p:blipFill>
-          <a:blip r:embed="rId1"/>
-          <a:stretch>
-            <a:fillRect/>
-          </a:stretch>
-        </p:blipFill>
-        <p:spPr>
-          <a:xfrm>
-            <a:off x="91440" y="914400"/>
-            <a:ext cx="4206240" cy="3474720"/>
-          </a:xfrm>
-          <a:prstGeom prst="rect">
-            <a:avLst/>
-          </a:prstGeom>
-        </p:spPr>
-      </p:pic>
-      <p:sp>
-        <p:nvSpPr>
-          <p:cNvPr id="5" name="Shape 2"/>
-          <p:cNvSpPr/>
-          <p:nvPr/>
-        </p:nvSpPr>
-        <p:spPr>
-          <a:xfrm>
-            <a:off x="4572000" y="1005840"/>
-            <a:ext cx="4297680" cy="566928"/>
+      <p:sp>
+        <p:nvSpPr>
+          <p:cNvPr id="4" name="Shape 2"/>
+          <p:cNvSpPr/>
+          <p:nvPr/>
+        </p:nvSpPr>
+        <p:spPr>
+          <a:xfrm>
+            <a:off x="365760" y="960120"/>
+            <a:ext cx="2697480" cy="2834640"/>
           </a:xfrm>
           <a:prstGeom prst="rect">
             <a:avLst/>
@@ -7601,50 +7986,89 @@
       </p:sp>
       <p:sp>
         <p:nvSpPr>
-          <p:cNvPr id="6" name="Shape 3"/>
-          <p:cNvSpPr/>
-          <p:nvPr/>
-        </p:nvSpPr>
-        <p:spPr>
-          <a:xfrm>
-            <a:off x="4572000" y="1005840"/>
-            <a:ext cx="45720" cy="566928"/>
+          <p:cNvPr id="5" name="Shape 3"/>
+          <p:cNvSpPr/>
+          <p:nvPr/>
+        </p:nvSpPr>
+        <p:spPr>
+          <a:xfrm>
+            <a:off x="365760" y="960120"/>
+            <a:ext cx="2697480" cy="54864"/>
           </a:xfrm>
           <a:prstGeom prst="rect">
             <a:avLst/>
           </a:prstGeom>
           <a:solidFill>
-            <a:srgbClr val="2E75B6"/>
+            <a:srgbClr val="27AE60"/>
           </a:solidFill>
           <a:ln/>
         </p:spPr>
       </p:sp>
       <p:sp>
         <p:nvSpPr>
-          <p:cNvPr id="7" name="Text 4"/>
-          <p:cNvSpPr/>
-          <p:nvPr/>
-        </p:nvSpPr>
-        <p:spPr>
-          <a:xfrm>
-            <a:off x="4709160" y="1024128"/>
-            <a:ext cx="4023360" cy="320040"/>
-          </a:xfrm>
-          <a:prstGeom prst="rect">
-            <a:avLst/>
-          </a:prstGeom>
-          <a:noFill/>
-          <a:ln/>
-        </p:spPr>
-        <p:txBody>
-          <a:bodyPr wrap="square" rtlCol="0" anchor="b"/>
+          <p:cNvPr id="6" name="Text 4"/>
+          <p:cNvSpPr/>
+          <p:nvPr/>
+        </p:nvSpPr>
+        <p:spPr>
+          <a:xfrm>
+            <a:off x="475488" y="1051560"/>
+            <a:ext cx="2468880" cy="292608"/>
+          </a:xfrm>
+          <a:prstGeom prst="rect">
+            <a:avLst/>
+          </a:prstGeom>
+          <a:noFill/>
+          <a:ln/>
+        </p:spPr>
+        <p:txBody>
+          <a:bodyPr wrap="square" rtlCol="0" anchor="ctr"/>
           <a:lstStyle/>
           <a:p>
             <a:pPr indent="0" marL="0">
               <a:buNone/>
             </a:pPr>
             <a:r>
-              <a:rPr lang="en-US" sz="1100" b="1" dirty="0">
+              <a:rPr lang="en-US" sz="1300" b="1" dirty="0">
+                <a:solidFill>
+                  <a:srgbClr val="27AE60"/>
+                </a:solidFill>
+                <a:latin typeface="Microsoft YaHei" pitchFamily="34" charset="0"/>
+                <a:ea typeface="Microsoft YaHei" pitchFamily="34" charset="-122"/>
+                <a:cs typeface="Microsoft YaHei" pitchFamily="34" charset="-120"/>
+              </a:rPr>
+              <a:t>高自给率 ≥60%</a:t>
+            </a:r>
+            <a:endParaRPr lang="en-US" sz="1300" dirty="0"/>
+          </a:p>
+        </p:txBody>
+      </p:sp>
+      <p:sp>
+        <p:nvSpPr>
+          <p:cNvPr id="7" name="Text 5"/>
+          <p:cNvSpPr/>
+          <p:nvPr/>
+        </p:nvSpPr>
+        <p:spPr>
+          <a:xfrm>
+            <a:off x="475488" y="1325880"/>
+            <a:ext cx="2468880" cy="256032"/>
+          </a:xfrm>
+          <a:prstGeom prst="rect">
+            <a:avLst/>
+          </a:prstGeom>
+          <a:noFill/>
+          <a:ln/>
+        </p:spPr>
+        <p:txBody>
+          <a:bodyPr wrap="square" rtlCol="0" anchor="ctr"/>
+          <a:lstStyle/>
+          <a:p>
+            <a:pPr indent="0" marL="0">
+              <a:buNone/>
+            </a:pPr>
+            <a:r>
+              <a:rPr lang="en-US" sz="2200" b="1" dirty="0">
                 <a:solidFill>
                   <a:srgbClr val="1E293B"/>
                 </a:solidFill>
@@ -7652,34 +8076,116 @@
                 <a:ea typeface="Microsoft YaHei" pitchFamily="34" charset="-122"/>
                 <a:cs typeface="Microsoft YaHei" pitchFamily="34" charset="-120"/>
               </a:rPr>
-              <a:t>依赖度 vs 自给率: r = -0.9749</a:t>
+              <a:t>5省</a:t>
+            </a:r>
+            <a:endParaRPr lang="en-US" sz="2200" dirty="0"/>
+          </a:p>
+        </p:txBody>
+      </p:sp>
+      <p:sp>
+        <p:nvSpPr>
+          <p:cNvPr id="8" name="Text 6"/>
+          <p:cNvSpPr/>
+          <p:nvPr/>
+        </p:nvSpPr>
+        <p:spPr>
+          <a:xfrm>
+            <a:off x="475488" y="1645920"/>
+            <a:ext cx="2468880" cy="1280160"/>
+          </a:xfrm>
+          <a:prstGeom prst="rect">
+            <a:avLst/>
+          </a:prstGeom>
+          <a:noFill/>
+          <a:ln/>
+        </p:spPr>
+        <p:txBody>
+          <a:bodyPr wrap="square" rtlCol="0" anchor="ctr"/>
+          <a:lstStyle/>
+          <a:p>
+            <a:pPr indent="0" marL="0">
+              <a:lnSpc>
+                <a:spcPct val="160000"/>
+              </a:lnSpc>
+              <a:buNone/>
+            </a:pPr>
+            <a:r>
+              <a:rPr lang="en-US" sz="1100" dirty="0">
+                <a:solidFill>
+                  <a:srgbClr val="1E293B"/>
+                </a:solidFill>
+                <a:latin typeface="Microsoft YaHei" pitchFamily="34" charset="0"/>
+                <a:ea typeface="Microsoft YaHei" pitchFamily="34" charset="-122"/>
+                <a:cs typeface="Microsoft YaHei" pitchFamily="34" charset="-120"/>
+              </a:rPr>
+              <a:t>依赖度: 13.9%</a:t>
             </a:r>
             <a:endParaRPr lang="en-US" sz="1100" dirty="0"/>
           </a:p>
-        </p:txBody>
-      </p:sp>
-      <p:sp>
-        <p:nvSpPr>
-          <p:cNvPr id="8" name="Text 5"/>
-          <p:cNvSpPr/>
-          <p:nvPr/>
-        </p:nvSpPr>
-        <p:spPr>
-          <a:xfrm>
-            <a:off x="4709160" y="1298448"/>
-            <a:ext cx="4023360" cy="256032"/>
-          </a:xfrm>
-          <a:prstGeom prst="rect">
-            <a:avLst/>
-          </a:prstGeom>
-          <a:noFill/>
-          <a:ln/>
-        </p:spPr>
-        <p:txBody>
-          <a:bodyPr wrap="square" rtlCol="0" anchor="t"/>
-          <a:lstStyle/>
           <a:p>
             <a:pPr indent="0" marL="0">
+              <a:lnSpc>
+                <a:spcPct val="160000"/>
+              </a:lnSpc>
+              <a:buNone/>
+            </a:pPr>
+            <a:r>
+              <a:rPr lang="en-US" sz="1100" dirty="0">
+                <a:solidFill>
+                  <a:srgbClr val="1E293B"/>
+                </a:solidFill>
+                <a:latin typeface="Microsoft YaHei" pitchFamily="34" charset="0"/>
+                <a:ea typeface="Microsoft YaHei" pitchFamily="34" charset="-122"/>
+                <a:cs typeface="Microsoft YaHei" pitchFamily="34" charset="-120"/>
+              </a:rPr>
+              <a:t>人均转移支付: 3,672元</a:t>
+            </a:r>
+            <a:endParaRPr lang="en-US" sz="1100" dirty="0"/>
+          </a:p>
+          <a:p>
+            <a:pPr indent="0" marL="0">
+              <a:lnSpc>
+                <a:spcPct val="160000"/>
+              </a:lnSpc>
+              <a:buNone/>
+            </a:pPr>
+            <a:r>
+              <a:rPr lang="en-US" sz="1100" dirty="0">
+                <a:solidFill>
+                  <a:srgbClr val="1E293B"/>
+                </a:solidFill>
+                <a:latin typeface="Microsoft YaHei" pitchFamily="34" charset="0"/>
+                <a:ea typeface="Microsoft YaHei" pitchFamily="34" charset="-122"/>
+                <a:cs typeface="Microsoft YaHei" pitchFamily="34" charset="-120"/>
+              </a:rPr>
+              <a:t>人均GDP: 170,057元</a:t>
+            </a:r>
+            <a:endParaRPr lang="en-US" sz="1100" dirty="0"/>
+          </a:p>
+        </p:txBody>
+      </p:sp>
+      <p:sp>
+        <p:nvSpPr>
+          <p:cNvPr id="9" name="Text 7"/>
+          <p:cNvSpPr/>
+          <p:nvPr/>
+        </p:nvSpPr>
+        <p:spPr>
+          <a:xfrm>
+            <a:off x="475488" y="3108960"/>
+            <a:ext cx="2468880" cy="548640"/>
+          </a:xfrm>
+          <a:prstGeom prst="rect">
+            <a:avLst/>
+          </a:prstGeom>
+          <a:noFill/>
+          <a:ln/>
+        </p:spPr>
+        <p:txBody>
+          <a:bodyPr wrap="square" rtlCol="0" anchor="ctr"/>
+          <a:lstStyle/>
+          <a:p>
+            <a:pPr indent="0" marL="0">
               <a:buNone/>
             </a:pPr>
             <a:r>
@@ -7691,22 +8197,39 @@
                 <a:ea typeface="Microsoft YaHei" pitchFamily="34" charset="-122"/>
                 <a:cs typeface="Microsoft YaHei" pitchFamily="34" charset="-120"/>
               </a:rPr>
-              <a:t>近乎完全负相关</a:t>
+              <a:t>上海、北京、广东</a:t>
             </a:r>
             <a:endParaRPr lang="en-US" sz="900" dirty="0"/>
           </a:p>
-        </p:txBody>
-      </p:sp>
-      <p:sp>
-        <p:nvSpPr>
-          <p:cNvPr id="9" name="Shape 6"/>
-          <p:cNvSpPr/>
-          <p:nvPr/>
-        </p:nvSpPr>
-        <p:spPr>
-          <a:xfrm>
-            <a:off x="4572000" y="1664208"/>
-            <a:ext cx="4297680" cy="566928"/>
+          <a:p>
+            <a:pPr indent="0" marL="0">
+              <a:buNone/>
+            </a:pPr>
+            <a:r>
+              <a:rPr lang="en-US" sz="900" dirty="0">
+                <a:solidFill>
+                  <a:srgbClr val="64748B"/>
+                </a:solidFill>
+                <a:latin typeface="Microsoft YaHei" pitchFamily="34" charset="0"/>
+                <a:ea typeface="Microsoft YaHei" pitchFamily="34" charset="-122"/>
+                <a:cs typeface="Microsoft YaHei" pitchFamily="34" charset="-120"/>
+              </a:rPr>
+              <a:t>浙江、江苏</a:t>
+            </a:r>
+            <a:endParaRPr lang="en-US" sz="900" dirty="0"/>
+          </a:p>
+        </p:txBody>
+      </p:sp>
+      <p:sp>
+        <p:nvSpPr>
+          <p:cNvPr id="10" name="Shape 8"/>
+          <p:cNvSpPr/>
+          <p:nvPr/>
+        </p:nvSpPr>
+        <p:spPr>
+          <a:xfrm>
+            <a:off x="3246120" y="960120"/>
+            <a:ext cx="2697480" cy="2834640"/>
           </a:xfrm>
           <a:prstGeom prst="rect">
             <a:avLst/>
@@ -7719,50 +8242,89 @@
       </p:sp>
       <p:sp>
         <p:nvSpPr>
-          <p:cNvPr id="10" name="Shape 7"/>
-          <p:cNvSpPr/>
-          <p:nvPr/>
-        </p:nvSpPr>
-        <p:spPr>
-          <a:xfrm>
-            <a:off x="4572000" y="1664208"/>
-            <a:ext cx="45720" cy="566928"/>
+          <p:cNvPr id="11" name="Shape 9"/>
+          <p:cNvSpPr/>
+          <p:nvPr/>
+        </p:nvSpPr>
+        <p:spPr>
+          <a:xfrm>
+            <a:off x="3246120" y="960120"/>
+            <a:ext cx="2697480" cy="54864"/>
           </a:xfrm>
           <a:prstGeom prst="rect">
             <a:avLst/>
           </a:prstGeom>
           <a:solidFill>
-            <a:srgbClr val="2E75B6"/>
+            <a:srgbClr val="E67E22"/>
           </a:solidFill>
           <a:ln/>
         </p:spPr>
       </p:sp>
       <p:sp>
         <p:nvSpPr>
-          <p:cNvPr id="11" name="Text 8"/>
-          <p:cNvSpPr/>
-          <p:nvPr/>
-        </p:nvSpPr>
-        <p:spPr>
-          <a:xfrm>
-            <a:off x="4709160" y="1682496"/>
-            <a:ext cx="4023360" cy="320040"/>
-          </a:xfrm>
-          <a:prstGeom prst="rect">
-            <a:avLst/>
-          </a:prstGeom>
-          <a:noFill/>
-          <a:ln/>
-        </p:spPr>
-        <p:txBody>
-          <a:bodyPr wrap="square" rtlCol="0" anchor="b"/>
+          <p:cNvPr id="12" name="Text 10"/>
+          <p:cNvSpPr/>
+          <p:nvPr/>
+        </p:nvSpPr>
+        <p:spPr>
+          <a:xfrm>
+            <a:off x="3355848" y="1051560"/>
+            <a:ext cx="2468880" cy="292608"/>
+          </a:xfrm>
+          <a:prstGeom prst="rect">
+            <a:avLst/>
+          </a:prstGeom>
+          <a:noFill/>
+          <a:ln/>
+        </p:spPr>
+        <p:txBody>
+          <a:bodyPr wrap="square" rtlCol="0" anchor="ctr"/>
           <a:lstStyle/>
           <a:p>
             <a:pPr indent="0" marL="0">
               <a:buNone/>
             </a:pPr>
             <a:r>
-              <a:rPr lang="en-US" sz="1100" b="1" dirty="0">
+              <a:rPr lang="en-US" sz="1300" b="1" dirty="0">
+                <a:solidFill>
+                  <a:srgbClr val="E67E22"/>
+                </a:solidFill>
+                <a:latin typeface="Microsoft YaHei" pitchFamily="34" charset="0"/>
+                <a:ea typeface="Microsoft YaHei" pitchFamily="34" charset="-122"/>
+                <a:cs typeface="Microsoft YaHei" pitchFamily="34" charset="-120"/>
+              </a:rPr>
+              <a:t>中自给率 35-60%</a:t>
+            </a:r>
+            <a:endParaRPr lang="en-US" sz="1300" dirty="0"/>
+          </a:p>
+        </p:txBody>
+      </p:sp>
+      <p:sp>
+        <p:nvSpPr>
+          <p:cNvPr id="13" name="Text 11"/>
+          <p:cNvSpPr/>
+          <p:nvPr/>
+        </p:nvSpPr>
+        <p:spPr>
+          <a:xfrm>
+            <a:off x="3355848" y="1325880"/>
+            <a:ext cx="2468880" cy="256032"/>
+          </a:xfrm>
+          <a:prstGeom prst="rect">
+            <a:avLst/>
+          </a:prstGeom>
+          <a:noFill/>
+          <a:ln/>
+        </p:spPr>
+        <p:txBody>
+          <a:bodyPr wrap="square" rtlCol="0" anchor="ctr"/>
+          <a:lstStyle/>
+          <a:p>
+            <a:pPr indent="0" marL="0">
+              <a:buNone/>
+            </a:pPr>
+            <a:r>
+              <a:rPr lang="en-US" sz="2200" b="1" dirty="0">
                 <a:solidFill>
                   <a:srgbClr val="1E293B"/>
                 </a:solidFill>
@@ -7770,34 +8332,116 @@
                 <a:ea typeface="Microsoft YaHei" pitchFamily="34" charset="-122"/>
                 <a:cs typeface="Microsoft YaHei" pitchFamily="34" charset="-120"/>
               </a:rPr>
-              <a:t>依赖度 vs 人均GDP: r = -0.7751</a:t>
+              <a:t>16省</a:t>
+            </a:r>
+            <a:endParaRPr lang="en-US" sz="2200" dirty="0"/>
+          </a:p>
+        </p:txBody>
+      </p:sp>
+      <p:sp>
+        <p:nvSpPr>
+          <p:cNvPr id="14" name="Text 12"/>
+          <p:cNvSpPr/>
+          <p:nvPr/>
+        </p:nvSpPr>
+        <p:spPr>
+          <a:xfrm>
+            <a:off x="3355848" y="1645920"/>
+            <a:ext cx="2468880" cy="1280160"/>
+          </a:xfrm>
+          <a:prstGeom prst="rect">
+            <a:avLst/>
+          </a:prstGeom>
+          <a:noFill/>
+          <a:ln/>
+        </p:spPr>
+        <p:txBody>
+          <a:bodyPr wrap="square" rtlCol="0" anchor="ctr"/>
+          <a:lstStyle/>
+          <a:p>
+            <a:pPr indent="0" marL="0">
+              <a:lnSpc>
+                <a:spcPct val="160000"/>
+              </a:lnSpc>
+              <a:buNone/>
+            </a:pPr>
+            <a:r>
+              <a:rPr lang="en-US" sz="1100" dirty="0">
+                <a:solidFill>
+                  <a:srgbClr val="1E293B"/>
+                </a:solidFill>
+                <a:latin typeface="Microsoft YaHei" pitchFamily="34" charset="0"/>
+                <a:ea typeface="Microsoft YaHei" pitchFamily="34" charset="-122"/>
+                <a:cs typeface="Microsoft YaHei" pitchFamily="34" charset="-120"/>
+              </a:rPr>
+              <a:t>依赖度: 44.2%</a:t>
             </a:r>
             <a:endParaRPr lang="en-US" sz="1100" dirty="0"/>
           </a:p>
-        </p:txBody>
-      </p:sp>
-      <p:sp>
-        <p:nvSpPr>
-          <p:cNvPr id="12" name="Text 9"/>
-          <p:cNvSpPr/>
-          <p:nvPr/>
-        </p:nvSpPr>
-        <p:spPr>
-          <a:xfrm>
-            <a:off x="4709160" y="1956816"/>
-            <a:ext cx="4023360" cy="256032"/>
-          </a:xfrm>
-          <a:prstGeom prst="rect">
-            <a:avLst/>
-          </a:prstGeom>
-          <a:noFill/>
-          <a:ln/>
-        </p:spPr>
-        <p:txBody>
-          <a:bodyPr wrap="square" rtlCol="0" anchor="t"/>
-          <a:lstStyle/>
           <a:p>
             <a:pPr indent="0" marL="0">
+              <a:lnSpc>
+                <a:spcPct val="160000"/>
+              </a:lnSpc>
+              <a:buNone/>
+            </a:pPr>
+            <a:r>
+              <a:rPr lang="en-US" sz="1100" dirty="0">
+                <a:solidFill>
+                  <a:srgbClr val="1E293B"/>
+                </a:solidFill>
+                <a:latin typeface="Microsoft YaHei" pitchFamily="34" charset="0"/>
+                <a:ea typeface="Microsoft YaHei" pitchFamily="34" charset="-122"/>
+                <a:cs typeface="Microsoft YaHei" pitchFamily="34" charset="-120"/>
+              </a:rPr>
+              <a:t>人均转移支付: 7,729元</a:t>
+            </a:r>
+            <a:endParaRPr lang="en-US" sz="1100" dirty="0"/>
+          </a:p>
+          <a:p>
+            <a:pPr indent="0" marL="0">
+              <a:lnSpc>
+                <a:spcPct val="160000"/>
+              </a:lnSpc>
+              <a:buNone/>
+            </a:pPr>
+            <a:r>
+              <a:rPr lang="en-US" sz="1100" dirty="0">
+                <a:solidFill>
+                  <a:srgbClr val="1E293B"/>
+                </a:solidFill>
+                <a:latin typeface="Microsoft YaHei" pitchFamily="34" charset="0"/>
+                <a:ea typeface="Microsoft YaHei" pitchFamily="34" charset="-122"/>
+                <a:cs typeface="Microsoft YaHei" pitchFamily="34" charset="-120"/>
+              </a:rPr>
+              <a:t>人均GDP: 90,195元</a:t>
+            </a:r>
+            <a:endParaRPr lang="en-US" sz="1100" dirty="0"/>
+          </a:p>
+        </p:txBody>
+      </p:sp>
+      <p:sp>
+        <p:nvSpPr>
+          <p:cNvPr id="15" name="Text 13"/>
+          <p:cNvSpPr/>
+          <p:nvPr/>
+        </p:nvSpPr>
+        <p:spPr>
+          <a:xfrm>
+            <a:off x="3355848" y="3108960"/>
+            <a:ext cx="2468880" cy="548640"/>
+          </a:xfrm>
+          <a:prstGeom prst="rect">
+            <a:avLst/>
+          </a:prstGeom>
+          <a:noFill/>
+          <a:ln/>
+        </p:spPr>
+        <p:txBody>
+          <a:bodyPr wrap="square" rtlCol="0" anchor="ctr"/>
+          <a:lstStyle/>
+          <a:p>
+            <a:pPr indent="0" marL="0">
               <a:buNone/>
             </a:pPr>
             <a:r>
@@ -7809,22 +8453,39 @@
                 <a:ea typeface="Microsoft YaHei" pitchFamily="34" charset="-122"/>
                 <a:cs typeface="Microsoft YaHei" pitchFamily="34" charset="-120"/>
               </a:rPr>
-              <a:t>强负相关</a:t>
+              <a:t>山东、福建、山西</a:t>
             </a:r>
             <a:endParaRPr lang="en-US" sz="900" dirty="0"/>
           </a:p>
-        </p:txBody>
-      </p:sp>
-      <p:sp>
-        <p:nvSpPr>
-          <p:cNvPr id="13" name="Shape 10"/>
-          <p:cNvSpPr/>
-          <p:nvPr/>
-        </p:nvSpPr>
-        <p:spPr>
-          <a:xfrm>
-            <a:off x="4572000" y="2322576"/>
-            <a:ext cx="4297680" cy="566928"/>
+          <a:p>
+            <a:pPr indent="0" marL="0">
+              <a:buNone/>
+            </a:pPr>
+            <a:r>
+              <a:rPr lang="en-US" sz="900" dirty="0">
+                <a:solidFill>
+                  <a:srgbClr val="64748B"/>
+                </a:solidFill>
+                <a:latin typeface="Microsoft YaHei" pitchFamily="34" charset="0"/>
+                <a:ea typeface="Microsoft YaHei" pitchFamily="34" charset="-122"/>
+                <a:cs typeface="Microsoft YaHei" pitchFamily="34" charset="-120"/>
+              </a:rPr>
+              <a:t>内蒙古、辽宁等</a:t>
+            </a:r>
+            <a:endParaRPr lang="en-US" sz="900" dirty="0"/>
+          </a:p>
+        </p:txBody>
+      </p:sp>
+      <p:sp>
+        <p:nvSpPr>
+          <p:cNvPr id="16" name="Shape 14"/>
+          <p:cNvSpPr/>
+          <p:nvPr/>
+        </p:nvSpPr>
+        <p:spPr>
+          <a:xfrm>
+            <a:off x="6126480" y="960120"/>
+            <a:ext cx="2697480" cy="2834640"/>
           </a:xfrm>
           <a:prstGeom prst="rect">
             <a:avLst/>
@@ -7837,50 +8498,89 @@
       </p:sp>
       <p:sp>
         <p:nvSpPr>
-          <p:cNvPr id="14" name="Shape 11"/>
-          <p:cNvSpPr/>
-          <p:nvPr/>
-        </p:nvSpPr>
-        <p:spPr>
-          <a:xfrm>
-            <a:off x="4572000" y="2322576"/>
-            <a:ext cx="45720" cy="566928"/>
+          <p:cNvPr id="17" name="Shape 15"/>
+          <p:cNvSpPr/>
+          <p:nvPr/>
+        </p:nvSpPr>
+        <p:spPr>
+          <a:xfrm>
+            <a:off x="6126480" y="960120"/>
+            <a:ext cx="2697480" cy="54864"/>
           </a:xfrm>
           <a:prstGeom prst="rect">
             <a:avLst/>
           </a:prstGeom>
           <a:solidFill>
-            <a:srgbClr val="2E75B6"/>
+            <a:srgbClr val="C0392B"/>
           </a:solidFill>
           <a:ln/>
         </p:spPr>
       </p:sp>
       <p:sp>
         <p:nvSpPr>
-          <p:cNvPr id="15" name="Text 12"/>
-          <p:cNvSpPr/>
-          <p:nvPr/>
-        </p:nvSpPr>
-        <p:spPr>
-          <a:xfrm>
-            <a:off x="4709160" y="2340864"/>
-            <a:ext cx="4023360" cy="320040"/>
-          </a:xfrm>
-          <a:prstGeom prst="rect">
-            <a:avLst/>
-          </a:prstGeom>
-          <a:noFill/>
-          <a:ln/>
-        </p:spPr>
-        <p:txBody>
-          <a:bodyPr wrap="square" rtlCol="0" anchor="b"/>
+          <p:cNvPr id="18" name="Text 16"/>
+          <p:cNvSpPr/>
+          <p:nvPr/>
+        </p:nvSpPr>
+        <p:spPr>
+          <a:xfrm>
+            <a:off x="6236208" y="1051560"/>
+            <a:ext cx="2468880" cy="292608"/>
+          </a:xfrm>
+          <a:prstGeom prst="rect">
+            <a:avLst/>
+          </a:prstGeom>
+          <a:noFill/>
+          <a:ln/>
+        </p:spPr>
+        <p:txBody>
+          <a:bodyPr wrap="square" rtlCol="0" anchor="ctr"/>
           <a:lstStyle/>
           <a:p>
             <a:pPr indent="0" marL="0">
               <a:buNone/>
             </a:pPr>
             <a:r>
-              <a:rPr lang="en-US" sz="1100" b="1" dirty="0">
+              <a:rPr lang="en-US" sz="1300" b="1" dirty="0">
+                <a:solidFill>
+                  <a:srgbClr val="C0392B"/>
+                </a:solidFill>
+                <a:latin typeface="Microsoft YaHei" pitchFamily="34" charset="0"/>
+                <a:ea typeface="Microsoft YaHei" pitchFamily="34" charset="-122"/>
+                <a:cs typeface="Microsoft YaHei" pitchFamily="34" charset="-120"/>
+              </a:rPr>
+              <a:t>低自给率 &lt;35%</a:t>
+            </a:r>
+            <a:endParaRPr lang="en-US" sz="1300" dirty="0"/>
+          </a:p>
+        </p:txBody>
+      </p:sp>
+      <p:sp>
+        <p:nvSpPr>
+          <p:cNvPr id="19" name="Text 17"/>
+          <p:cNvSpPr/>
+          <p:nvPr/>
+        </p:nvSpPr>
+        <p:spPr>
+          <a:xfrm>
+            <a:off x="6236208" y="1325880"/>
+            <a:ext cx="2468880" cy="256032"/>
+          </a:xfrm>
+          <a:prstGeom prst="rect">
+            <a:avLst/>
+          </a:prstGeom>
+          <a:noFill/>
+          <a:ln/>
+        </p:spPr>
+        <p:txBody>
+          <a:bodyPr wrap="square" rtlCol="0" anchor="ctr"/>
+          <a:lstStyle/>
+          <a:p>
+            <a:pPr indent="0" marL="0">
+              <a:buNone/>
+            </a:pPr>
+            <a:r>
+              <a:rPr lang="en-US" sz="2200" b="1" dirty="0">
                 <a:solidFill>
                   <a:srgbClr val="1E293B"/>
                 </a:solidFill>
@@ -7888,34 +8588,116 @@
                 <a:ea typeface="Microsoft YaHei" pitchFamily="34" charset="-122"/>
                 <a:cs typeface="Microsoft YaHei" pitchFamily="34" charset="-120"/>
               </a:rPr>
-              <a:t>ρ = -0.8129, p &lt; 0.001</a:t>
+              <a:t>10省</a:t>
+            </a:r>
+            <a:endParaRPr lang="en-US" sz="2200" dirty="0"/>
+          </a:p>
+        </p:txBody>
+      </p:sp>
+      <p:sp>
+        <p:nvSpPr>
+          <p:cNvPr id="20" name="Text 18"/>
+          <p:cNvSpPr/>
+          <p:nvPr/>
+        </p:nvSpPr>
+        <p:spPr>
+          <a:xfrm>
+            <a:off x="6236208" y="1645920"/>
+            <a:ext cx="2468880" cy="1280160"/>
+          </a:xfrm>
+          <a:prstGeom prst="rect">
+            <a:avLst/>
+          </a:prstGeom>
+          <a:noFill/>
+          <a:ln/>
+        </p:spPr>
+        <p:txBody>
+          <a:bodyPr wrap="square" rtlCol="0" anchor="ctr"/>
+          <a:lstStyle/>
+          <a:p>
+            <a:pPr indent="0" marL="0">
+              <a:lnSpc>
+                <a:spcPct val="160000"/>
+              </a:lnSpc>
+              <a:buNone/>
+            </a:pPr>
+            <a:r>
+              <a:rPr lang="en-US" sz="1100" dirty="0">
+                <a:solidFill>
+                  <a:srgbClr val="1E293B"/>
+                </a:solidFill>
+                <a:latin typeface="Microsoft YaHei" pitchFamily="34" charset="0"/>
+                <a:ea typeface="Microsoft YaHei" pitchFamily="34" charset="-122"/>
+                <a:cs typeface="Microsoft YaHei" pitchFamily="34" charset="-120"/>
+              </a:rPr>
+              <a:t>依赖度: 68.0%</a:t>
             </a:r>
             <a:endParaRPr lang="en-US" sz="1100" dirty="0"/>
           </a:p>
-        </p:txBody>
-      </p:sp>
-      <p:sp>
-        <p:nvSpPr>
-          <p:cNvPr id="16" name="Text 13"/>
-          <p:cNvSpPr/>
-          <p:nvPr/>
-        </p:nvSpPr>
-        <p:spPr>
-          <a:xfrm>
-            <a:off x="4709160" y="2615184"/>
-            <a:ext cx="4023360" cy="256032"/>
-          </a:xfrm>
-          <a:prstGeom prst="rect">
-            <a:avLst/>
-          </a:prstGeom>
-          <a:noFill/>
-          <a:ln/>
-        </p:spPr>
-        <p:txBody>
-          <a:bodyPr wrap="square" rtlCol="0" anchor="t"/>
-          <a:lstStyle/>
           <a:p>
             <a:pPr indent="0" marL="0">
+              <a:lnSpc>
+                <a:spcPct val="160000"/>
+              </a:lnSpc>
+              <a:buNone/>
+            </a:pPr>
+            <a:r>
+              <a:rPr lang="en-US" sz="1100" dirty="0">
+                <a:solidFill>
+                  <a:srgbClr val="1E293B"/>
+                </a:solidFill>
+                <a:latin typeface="Microsoft YaHei" pitchFamily="34" charset="0"/>
+                <a:ea typeface="Microsoft YaHei" pitchFamily="34" charset="-122"/>
+                <a:cs typeface="Microsoft YaHei" pitchFamily="34" charset="-120"/>
+              </a:rPr>
+              <a:t>人均转移支付: 19,916元</a:t>
+            </a:r>
+            <a:endParaRPr lang="en-US" sz="1100" dirty="0"/>
+          </a:p>
+          <a:p>
+            <a:pPr indent="0" marL="0">
+              <a:lnSpc>
+                <a:spcPct val="160000"/>
+              </a:lnSpc>
+              <a:buNone/>
+            </a:pPr>
+            <a:r>
+              <a:rPr lang="en-US" sz="1100" dirty="0">
+                <a:solidFill>
+                  <a:srgbClr val="1E293B"/>
+                </a:solidFill>
+                <a:latin typeface="Microsoft YaHei" pitchFamily="34" charset="0"/>
+                <a:ea typeface="Microsoft YaHei" pitchFamily="34" charset="-122"/>
+                <a:cs typeface="Microsoft YaHei" pitchFamily="34" charset="-120"/>
+              </a:rPr>
+              <a:t>人均GDP: 64,863元</a:t>
+            </a:r>
+            <a:endParaRPr lang="en-US" sz="1100" dirty="0"/>
+          </a:p>
+        </p:txBody>
+      </p:sp>
+      <p:sp>
+        <p:nvSpPr>
+          <p:cNvPr id="21" name="Text 19"/>
+          <p:cNvSpPr/>
+          <p:nvPr/>
+        </p:nvSpPr>
+        <p:spPr>
+          <a:xfrm>
+            <a:off x="6236208" y="3108960"/>
+            <a:ext cx="2468880" cy="548640"/>
+          </a:xfrm>
+          <a:prstGeom prst="rect">
+            <a:avLst/>
+          </a:prstGeom>
+          <a:noFill/>
+          <a:ln/>
+        </p:spPr>
+        <p:txBody>
+          <a:bodyPr wrap="square" rtlCol="0" anchor="ctr"/>
+          <a:lstStyle/>
+          <a:p>
+            <a:pPr indent="0" marL="0">
               <a:buNone/>
             </a:pPr>
             <a:r>
@@ -7927,117 +8709,55 @@
                 <a:ea typeface="Microsoft YaHei" pitchFamily="34" charset="-122"/>
                 <a:cs typeface="Microsoft YaHei" pitchFamily="34" charset="-120"/>
               </a:rPr>
-              <a:t>单调关系极显著</a:t>
+              <a:t>西藏、甘肃、青海</a:t>
             </a:r>
             <a:endParaRPr lang="en-US" sz="900" dirty="0"/>
           </a:p>
-        </p:txBody>
-      </p:sp>
-      <p:sp>
-        <p:nvSpPr>
-          <p:cNvPr id="17" name="Shape 14"/>
-          <p:cNvSpPr/>
-          <p:nvPr/>
-        </p:nvSpPr>
-        <p:spPr>
-          <a:xfrm>
-            <a:off x="4572000" y="2980944"/>
-            <a:ext cx="4297680" cy="566928"/>
-          </a:xfrm>
-          <a:prstGeom prst="rect">
-            <a:avLst/>
-          </a:prstGeom>
-          <a:solidFill>
-            <a:srgbClr val="F5F7FA"/>
-          </a:solidFill>
-          <a:ln/>
-        </p:spPr>
-      </p:sp>
-      <p:sp>
-        <p:nvSpPr>
-          <p:cNvPr id="18" name="Shape 15"/>
-          <p:cNvSpPr/>
-          <p:nvPr/>
-        </p:nvSpPr>
-        <p:spPr>
-          <a:xfrm>
-            <a:off x="4572000" y="2980944"/>
-            <a:ext cx="45720" cy="566928"/>
-          </a:xfrm>
-          <a:prstGeom prst="rect">
-            <a:avLst/>
-          </a:prstGeom>
-          <a:solidFill>
-            <a:srgbClr val="2E75B6"/>
-          </a:solidFill>
-          <a:ln/>
-        </p:spPr>
-      </p:sp>
-      <p:sp>
-        <p:nvSpPr>
-          <p:cNvPr id="19" name="Text 16"/>
-          <p:cNvSpPr/>
-          <p:nvPr/>
-        </p:nvSpPr>
-        <p:spPr>
-          <a:xfrm>
-            <a:off x="4709160" y="2999232"/>
-            <a:ext cx="4023360" cy="320040"/>
-          </a:xfrm>
-          <a:prstGeom prst="rect">
-            <a:avLst/>
-          </a:prstGeom>
-          <a:noFill/>
-          <a:ln/>
-        </p:spPr>
-        <p:txBody>
-          <a:bodyPr wrap="square" rtlCol="0" anchor="b"/>
-          <a:lstStyle/>
           <a:p>
             <a:pPr indent="0" marL="0">
               <a:buNone/>
             </a:pPr>
             <a:r>
-              <a:rPr lang="en-US" sz="1100" b="1" dirty="0">
-                <a:solidFill>
-                  <a:srgbClr val="1E293B"/>
-                </a:solidFill>
-                <a:latin typeface="Microsoft YaHei" pitchFamily="34" charset="0"/>
-                <a:ea typeface="Microsoft YaHei" pitchFamily="34" charset="-122"/>
-                <a:cs typeface="Microsoft YaHei" pitchFamily="34" charset="-120"/>
-              </a:rPr>
-              <a:t>F = 62.10, p &lt; 0.001</a:t>
-            </a:r>
-            <a:endParaRPr lang="en-US" sz="1100" dirty="0"/>
-          </a:p>
-        </p:txBody>
-      </p:sp>
-      <p:sp>
-        <p:nvSpPr>
-          <p:cNvPr id="20" name="Text 17"/>
-          <p:cNvSpPr/>
-          <p:nvPr/>
-        </p:nvSpPr>
-        <p:spPr>
-          <a:xfrm>
-            <a:off x="4709160" y="3273552"/>
-            <a:ext cx="4023360" cy="256032"/>
-          </a:xfrm>
-          <a:prstGeom prst="rect">
-            <a:avLst/>
-          </a:prstGeom>
-          <a:noFill/>
-          <a:ln/>
-        </p:spPr>
-        <p:txBody>
-          <a:bodyPr wrap="square" rtlCol="0" anchor="t"/>
+              <a:rPr lang="en-US" sz="900" dirty="0">
+                <a:solidFill>
+                  <a:srgbClr val="64748B"/>
+                </a:solidFill>
+                <a:latin typeface="Microsoft YaHei" pitchFamily="34" charset="0"/>
+                <a:ea typeface="Microsoft YaHei" pitchFamily="34" charset="-122"/>
+                <a:cs typeface="Microsoft YaHei" pitchFamily="34" charset="-120"/>
+              </a:rPr>
+              <a:t>宁夏、黑龙江等</a:t>
+            </a:r>
+            <a:endParaRPr lang="en-US" sz="900" dirty="0"/>
+          </a:p>
+        </p:txBody>
+      </p:sp>
+      <p:sp>
+        <p:nvSpPr>
+          <p:cNvPr id="22" name="Text 20"/>
+          <p:cNvSpPr/>
+          <p:nvPr/>
+        </p:nvSpPr>
+        <p:spPr>
+          <a:xfrm>
+            <a:off x="457200" y="4023360"/>
+            <a:ext cx="8229600" cy="640080"/>
+          </a:xfrm>
+          <a:prstGeom prst="rect">
+            <a:avLst/>
+          </a:prstGeom>
+          <a:noFill/>
+          <a:ln/>
+        </p:spPr>
+        <p:txBody>
+          <a:bodyPr wrap="square" rtlCol="0" anchor="ctr"/>
           <a:lstStyle/>
           <a:p>
             <a:pPr indent="0" marL="0">
               <a:buNone/>
             </a:pPr>
             <a:r>
-              <a:rPr lang="en-US" sz="900" dirty="0">
+              <a:rPr lang="en-US" sz="1200" i="1" dirty="0">
                 <a:solidFill>
                   <a:srgbClr val="64748B"/>
                 </a:solidFill>
@@ -8045,186 +8765,9 @@
                 <a:ea typeface="Microsoft YaHei" pitchFamily="34" charset="-122"/>
                 <a:cs typeface="Microsoft YaHei" pitchFamily="34" charset="-120"/>
               </a:rPr>
-              <a:t>三类省份差异极显著</a:t>
-            </a:r>
-            <a:endParaRPr lang="en-US" sz="900" dirty="0"/>
-          </a:p>
-        </p:txBody>
-      </p:sp>
-      <p:sp>
-        <p:nvSpPr>
-          <p:cNvPr id="21" name="Shape 18"/>
-          <p:cNvSpPr/>
-          <p:nvPr/>
-        </p:nvSpPr>
-        <p:spPr>
-          <a:xfrm>
-            <a:off x="4572000" y="3639312"/>
-            <a:ext cx="4297680" cy="566928"/>
-          </a:xfrm>
-          <a:prstGeom prst="rect">
-            <a:avLst/>
-          </a:prstGeom>
-          <a:solidFill>
-            <a:srgbClr val="F5F7FA"/>
-          </a:solidFill>
-          <a:ln/>
-        </p:spPr>
-      </p:sp>
-      <p:sp>
-        <p:nvSpPr>
-          <p:cNvPr id="22" name="Shape 19"/>
-          <p:cNvSpPr/>
-          <p:nvPr/>
-        </p:nvSpPr>
-        <p:spPr>
-          <a:xfrm>
-            <a:off x="4572000" y="3639312"/>
-            <a:ext cx="45720" cy="566928"/>
-          </a:xfrm>
-          <a:prstGeom prst="rect">
-            <a:avLst/>
-          </a:prstGeom>
-          <a:solidFill>
-            <a:srgbClr val="2E75B6"/>
-          </a:solidFill>
-          <a:ln/>
-        </p:spPr>
-      </p:sp>
-      <p:sp>
-        <p:nvSpPr>
-          <p:cNvPr id="23" name="Text 20"/>
-          <p:cNvSpPr/>
-          <p:nvPr/>
-        </p:nvSpPr>
-        <p:spPr>
-          <a:xfrm>
-            <a:off x="4709160" y="3657600"/>
-            <a:ext cx="4023360" cy="320040"/>
-          </a:xfrm>
-          <a:prstGeom prst="rect">
-            <a:avLst/>
-          </a:prstGeom>
-          <a:noFill/>
-          <a:ln/>
-        </p:spPr>
-        <p:txBody>
-          <a:bodyPr wrap="square" rtlCol="0" anchor="b"/>
-          <a:lstStyle/>
-          <a:p>
-            <a:pPr indent="0" marL="0">
-              <a:buNone/>
-            </a:pPr>
-            <a:r>
-              <a:rPr lang="en-US" sz="1100" b="1" dirty="0">
-                <a:solidFill>
-                  <a:srgbClr val="1E293B"/>
-                </a:solidFill>
-                <a:latin typeface="Microsoft YaHei" pitchFamily="34" charset="0"/>
-                <a:ea typeface="Microsoft YaHei" pitchFamily="34" charset="-122"/>
-                <a:cs typeface="Microsoft YaHei" pitchFamily="34" charset="-120"/>
-              </a:rPr>
-              <a:t>高/中/低 两两比较 p &lt; 0.001</a:t>
-            </a:r>
-            <a:endParaRPr lang="en-US" sz="1100" dirty="0"/>
-          </a:p>
-        </p:txBody>
-      </p:sp>
-      <p:sp>
-        <p:nvSpPr>
-          <p:cNvPr id="24" name="Text 21"/>
-          <p:cNvSpPr/>
-          <p:nvPr/>
-        </p:nvSpPr>
-        <p:spPr>
-          <a:xfrm>
-            <a:off x="4709160" y="3931920"/>
-            <a:ext cx="4023360" cy="256032"/>
-          </a:xfrm>
-          <a:prstGeom prst="rect">
-            <a:avLst/>
-          </a:prstGeom>
-          <a:noFill/>
-          <a:ln/>
-        </p:spPr>
-        <p:txBody>
-          <a:bodyPr wrap="square" rtlCol="0" anchor="t"/>
-          <a:lstStyle/>
-          <a:p>
-            <a:pPr indent="0" marL="0">
-              <a:buNone/>
-            </a:pPr>
-            <a:r>
-              <a:rPr lang="en-US" sz="900" dirty="0">
-                <a:solidFill>
-                  <a:srgbClr val="64748B"/>
-                </a:solidFill>
-                <a:latin typeface="Microsoft YaHei" pitchFamily="34" charset="0"/>
-                <a:ea typeface="Microsoft YaHei" pitchFamily="34" charset="-122"/>
-                <a:cs typeface="Microsoft YaHei" pitchFamily="34" charset="-120"/>
-              </a:rPr>
-              <a:t>Bonferroni校正全部显著</a:t>
-            </a:r>
-            <a:endParaRPr lang="en-US" sz="900" dirty="0"/>
-          </a:p>
-        </p:txBody>
-      </p:sp>
-      <p:sp>
-        <p:nvSpPr>
-          <p:cNvPr id="25" name="Shape 22"/>
-          <p:cNvSpPr/>
-          <p:nvPr/>
-        </p:nvSpPr>
-        <p:spPr>
-          <a:xfrm>
-            <a:off x="457200" y="4846320"/>
-            <a:ext cx="8229600" cy="237744"/>
-          </a:xfrm>
-          <a:prstGeom prst="rect">
-            <a:avLst/>
-          </a:prstGeom>
-          <a:solidFill>
-            <a:srgbClr val="D5E8F0"/>
-          </a:solidFill>
-          <a:ln/>
-        </p:spPr>
-      </p:sp>
-      <p:sp>
-        <p:nvSpPr>
-          <p:cNvPr id="26" name="Text 23"/>
-          <p:cNvSpPr/>
-          <p:nvPr/>
-        </p:nvSpPr>
-        <p:spPr>
-          <a:xfrm>
-            <a:off x="512064" y="4846320"/>
-            <a:ext cx="8119872" cy="237744"/>
-          </a:xfrm>
-          <a:prstGeom prst="rect">
-            <a:avLst/>
-          </a:prstGeom>
-          <a:noFill/>
-          <a:ln/>
-        </p:spPr>
-        <p:txBody>
-          <a:bodyPr wrap="square" rtlCol="0" anchor="ctr"/>
-          <a:lstStyle/>
-          <a:p>
-            <a:pPr indent="0" marL="0">
-              <a:buNone/>
-            </a:pPr>
-            <a:r>
-              <a:rPr lang="en-US" sz="750" dirty="0">
-                <a:solidFill>
-                  <a:srgbClr val="1F4E79"/>
-                </a:solidFill>
-                <a:latin typeface="Microsoft YaHei" pitchFamily="34" charset="0"/>
-                <a:ea typeface="Microsoft YaHei" pitchFamily="34" charset="-122"/>
-                <a:cs typeface="Microsoft YaHei" pitchFamily="34" charset="-120"/>
-              </a:rPr>
-              <a:t>AI协作：scipy Pearson/Spearman/ANOVA → 为描述性发现提供统计显著性支撑 → 增强结论可信度</a:t>
-            </a:r>
-            <a:endParaRPr lang="en-US" sz="750" dirty="0"/>
+              <a:t>低自给率省份人均转移支付是高自给率的5.4倍 → 转移支付向财力薄弱地区倾斜</a:t>
+            </a:r>
+            <a:endParaRPr lang="en-US" sz="1200" dirty="0"/>
           </a:p>
         </p:txBody>
       </p:sp>
@@ -8293,7 +8836,7 @@
                 <a:ea typeface="Microsoft YaHei" pitchFamily="34" charset="-122"/>
                 <a:cs typeface="Microsoft YaHei" pitchFamily="34" charset="-120"/>
               </a:rPr>
-              <a:t>结果⑥：面板固定效应回归与异质性分析</a:t>
+              <a:t>发现四：转移支付与经济发展水平的关系</a:t>
             </a:r>
             <a:endParaRPr lang="en-US" sz="2400" dirty="0"/>
           </a:p>
@@ -8336,47 +8879,23 @@
         <p:spPr>
           <a:xfrm>
             <a:off x="91440" y="822960"/>
-            <a:ext cx="4297680" cy="3200400"/>
+            <a:ext cx="9144000" cy="3840480"/>
           </a:xfrm>
           <a:prstGeom prst="rect">
             <a:avLst/>
           </a:prstGeom>
         </p:spPr>
       </p:pic>
-      <p:pic>
-        <p:nvPicPr>
-          <p:cNvPr id="5" name="Image 1" descr="preencoded.png">    </p:cNvPr>
-          <p:cNvPicPr>
-            <a:picLocks noChangeAspect="1"/>
-          </p:cNvPicPr>
-          <p:nvPr/>
-        </p:nvPicPr>
-        <p:blipFill>
-          <a:blip r:embed="rId2"/>
-          <a:stretch>
-            <a:fillRect/>
-          </a:stretch>
-        </p:blipFill>
-        <p:spPr>
-          <a:xfrm>
-            <a:off x="4663440" y="822960"/>
-            <a:ext cx="4297680" cy="3200400"/>
-          </a:xfrm>
-          <a:prstGeom prst="rect">
-            <a:avLst/>
-          </a:prstGeom>
-        </p:spPr>
-      </p:pic>
-      <p:sp>
-        <p:nvSpPr>
-          <p:cNvPr id="6" name="Shape 2"/>
-          <p:cNvSpPr/>
-          <p:nvPr/>
-        </p:nvSpPr>
-        <p:spPr>
-          <a:xfrm>
-            <a:off x="274320" y="4206240"/>
-            <a:ext cx="4114800" cy="457200"/>
+      <p:sp>
+        <p:nvSpPr>
+          <p:cNvPr id="5" name="Shape 2"/>
+          <p:cNvSpPr/>
+          <p:nvPr/>
+        </p:nvSpPr>
+        <p:spPr>
+          <a:xfrm>
+            <a:off x="274320" y="4846320"/>
+            <a:ext cx="8595360" cy="411480"/>
           </a:xfrm>
           <a:prstGeom prst="rect">
             <a:avLst/>
@@ -8389,14 +8908,14 @@
       </p:sp>
       <p:sp>
         <p:nvSpPr>
-          <p:cNvPr id="7" name="Text 3"/>
-          <p:cNvSpPr/>
-          <p:nvPr/>
-        </p:nvSpPr>
-        <p:spPr>
-          <a:xfrm>
-            <a:off x="274320" y="4206240"/>
-            <a:ext cx="4114800" cy="457200"/>
+          <p:cNvPr id="6" name="Text 3"/>
+          <p:cNvSpPr/>
+          <p:nvPr/>
+        </p:nvSpPr>
+        <p:spPr>
+          <a:xfrm>
+            <a:off x="457200" y="4846320"/>
+            <a:ext cx="8229600" cy="411480"/>
           </a:xfrm>
           <a:prstGeom prst="rect">
             <a:avLst/>
@@ -8412,7 +8931,7 @@
               <a:buNone/>
             </a:pPr>
             <a:r>
-              <a:rPr lang="en-US" sz="1100" dirty="0">
+              <a:rPr lang="en-US" sz="1200" b="1" dirty="0">
                 <a:solidFill>
                   <a:srgbClr val="FFFFFF"/>
                 </a:solidFill>
@@ -8420,127 +8939,9 @@
                 <a:ea typeface="Microsoft YaHei" pitchFamily="34" charset="-122"/>
                 <a:cs typeface="Microsoft YaHei" pitchFamily="34" charset="-120"/>
               </a:rPr>
-              <a:t>左：面板FE回归系数森林图 | ln(人均GDP)显著负向，ln(人口)显著正向</a:t>
-            </a:r>
-            <a:endParaRPr lang="en-US" sz="1100" dirty="0"/>
-          </a:p>
-        </p:txBody>
-      </p:sp>
-      <p:sp>
-        <p:nvSpPr>
-          <p:cNvPr id="8" name="Shape 4"/>
-          <p:cNvSpPr/>
-          <p:nvPr/>
-        </p:nvSpPr>
-        <p:spPr>
-          <a:xfrm>
-            <a:off x="4572000" y="4206240"/>
-            <a:ext cx="4297680" cy="457200"/>
-          </a:xfrm>
-          <a:prstGeom prst="rect">
-            <a:avLst/>
-          </a:prstGeom>
-          <a:solidFill>
-            <a:srgbClr val="C0392B"/>
-          </a:solidFill>
-          <a:ln/>
-        </p:spPr>
-      </p:sp>
-      <p:sp>
-        <p:nvSpPr>
-          <p:cNvPr id="9" name="Text 5"/>
-          <p:cNvSpPr/>
-          <p:nvPr/>
-        </p:nvSpPr>
-        <p:spPr>
-          <a:xfrm>
-            <a:off x="4572000" y="4206240"/>
-            <a:ext cx="4297680" cy="457200"/>
-          </a:xfrm>
-          <a:prstGeom prst="rect">
-            <a:avLst/>
-          </a:prstGeom>
-          <a:noFill/>
-          <a:ln/>
-        </p:spPr>
-        <p:txBody>
-          <a:bodyPr wrap="square" rtlCol="0" anchor="ctr"/>
-          <a:lstStyle/>
-          <a:p>
-            <a:pPr algn="ctr" indent="0" marL="0">
-              <a:buNone/>
-            </a:pPr>
-            <a:r>
-              <a:rPr lang="en-US" sz="1100" dirty="0">
-                <a:solidFill>
-                  <a:srgbClr val="FFFFFF"/>
-                </a:solidFill>
-                <a:latin typeface="Microsoft YaHei" pitchFamily="34" charset="0"/>
-                <a:ea typeface="Microsoft YaHei" pitchFamily="34" charset="-122"/>
-                <a:cs typeface="Microsoft YaHei" pitchFamily="34" charset="-120"/>
-              </a:rPr>
-              <a:t>右：分位数回归系数变化 | 低依赖分位点GDP效应更强，高依赖分位点人口效应显著</a:t>
-            </a:r>
-            <a:endParaRPr lang="en-US" sz="1100" dirty="0"/>
-          </a:p>
-        </p:txBody>
-      </p:sp>
-      <p:sp>
-        <p:nvSpPr>
-          <p:cNvPr id="10" name="Shape 6"/>
-          <p:cNvSpPr/>
-          <p:nvPr/>
-        </p:nvSpPr>
-        <p:spPr>
-          <a:xfrm>
-            <a:off x="457200" y="4846320"/>
-            <a:ext cx="8229600" cy="237744"/>
-          </a:xfrm>
-          <a:prstGeom prst="rect">
-            <a:avLst/>
-          </a:prstGeom>
-          <a:solidFill>
-            <a:srgbClr val="D5E8F0"/>
-          </a:solidFill>
-          <a:ln/>
-        </p:spPr>
-      </p:sp>
-      <p:sp>
-        <p:nvSpPr>
-          <p:cNvPr id="11" name="Text 7"/>
-          <p:cNvSpPr/>
-          <p:nvPr/>
-        </p:nvSpPr>
-        <p:spPr>
-          <a:xfrm>
-            <a:off x="512064" y="4846320"/>
-            <a:ext cx="8119872" cy="237744"/>
-          </a:xfrm>
-          <a:prstGeom prst="rect">
-            <a:avLst/>
-          </a:prstGeom>
-          <a:noFill/>
-          <a:ln/>
-        </p:spPr>
-        <p:txBody>
-          <a:bodyPr wrap="square" rtlCol="0" anchor="ctr"/>
-          <a:lstStyle/>
-          <a:p>
-            <a:pPr indent="0" marL="0">
-              <a:buNone/>
-            </a:pPr>
-            <a:r>
-              <a:rPr lang="en-US" sz="750" dirty="0">
-                <a:solidFill>
-                  <a:srgbClr val="1F4E79"/>
-                </a:solidFill>
-                <a:latin typeface="Microsoft YaHei" pitchFamily="34" charset="0"/>
-                <a:ea typeface="Microsoft YaHei" pitchFamily="34" charset="-122"/>
-                <a:cs typeface="Microsoft YaHei" pitchFamily="34" charset="-120"/>
-              </a:rPr>
-              <a:t>AI协作：linearmodels双向FE + statsmodels分位数回归 → 控制异质性 + 揭示分布异质性</a:t>
-            </a:r>
-            <a:endParaRPr lang="en-US" sz="750" dirty="0"/>
+              <a:t>依赖度与人均GDP强负相关：Pearson r = -0.78，Spearman ρ = -0.81（p &lt; 0.001）</a:t>
+            </a:r>
+            <a:endParaRPr lang="en-US" sz="1200" dirty="0"/>
           </a:p>
         </p:txBody>
       </p:sp>

--- a/output/课堂演示.pptx
+++ b/output/课堂演示.pptx
@@ -2331,9 +2331,9 @@
                 <a:solidFill>
                   <a:srgbClr val="FFFFFF"/>
                 </a:solidFill>
-                <a:latin typeface="Microsoft YaHei" pitchFamily="34" charset="0"/>
-                <a:ea typeface="Microsoft YaHei" pitchFamily="34" charset="-122"/>
-                <a:cs typeface="Microsoft YaHei" pitchFamily="34" charset="-120"/>
+                <a:latin typeface="SimSun" pitchFamily="34" charset="0"/>
+                <a:ea typeface="SimSun" pitchFamily="34" charset="-122"/>
+                <a:cs typeface="SimSun" pitchFamily="34" charset="-120"/>
               </a:rPr>
               <a:t>中央—地方财政转移支付</a:t>
             </a:r>
@@ -2351,9 +2351,9 @@
                 <a:solidFill>
                   <a:srgbClr val="FFFFFF"/>
                 </a:solidFill>
-                <a:latin typeface="Microsoft YaHei" pitchFamily="34" charset="0"/>
-                <a:ea typeface="Microsoft YaHei" pitchFamily="34" charset="-122"/>
-                <a:cs typeface="Microsoft YaHei" pitchFamily="34" charset="-120"/>
+                <a:latin typeface="SimSun" pitchFamily="34" charset="0"/>
+                <a:ea typeface="SimSun" pitchFamily="34" charset="-122"/>
+                <a:cs typeface="SimSun" pitchFamily="34" charset="-120"/>
               </a:rPr>
               <a:t>效果分析</a:t>
             </a:r>
@@ -2410,9 +2410,9 @@
                 <a:solidFill>
                   <a:srgbClr val="D5E8F0"/>
                 </a:solidFill>
-                <a:latin typeface="Microsoft YaHei" pitchFamily="34" charset="0"/>
-                <a:ea typeface="Microsoft YaHei" pitchFamily="34" charset="-122"/>
-                <a:cs typeface="Microsoft YaHei" pitchFamily="34" charset="-120"/>
+                <a:latin typeface="SimSun" pitchFamily="34" charset="0"/>
+                <a:ea typeface="SimSun" pitchFamily="34" charset="-122"/>
+                <a:cs typeface="SimSun" pitchFamily="34" charset="-120"/>
               </a:rPr>
               <a:t>基于多源部委数据的综合定量研究</a:t>
             </a:r>
@@ -2452,9 +2452,9 @@
                 <a:solidFill>
                   <a:srgbClr val="94A3B8"/>
                 </a:solidFill>
-                <a:latin typeface="Microsoft YaHei" pitchFamily="34" charset="0"/>
-                <a:ea typeface="Microsoft YaHei" pitchFamily="34" charset="-122"/>
-                <a:cs typeface="Microsoft YaHei" pitchFamily="34" charset="-120"/>
+                <a:latin typeface="SimSun" pitchFamily="34" charset="0"/>
+                <a:ea typeface="SimSun" pitchFamily="34" charset="-122"/>
+                <a:cs typeface="SimSun" pitchFamily="34" charset="-120"/>
               </a:rPr>
               <a:t>人工智能与计算思维 · 2026年春季学期大作业</a:t>
             </a:r>
@@ -2472,9 +2472,9 @@
                 <a:solidFill>
                   <a:srgbClr val="94A3B8"/>
                 </a:solidFill>
-                <a:latin typeface="Microsoft YaHei" pitchFamily="34" charset="0"/>
-                <a:ea typeface="Microsoft YaHei" pitchFamily="34" charset="-122"/>
-                <a:cs typeface="Microsoft YaHei" pitchFamily="34" charset="-120"/>
+                <a:latin typeface="SimSun" pitchFamily="34" charset="0"/>
+                <a:ea typeface="SimSun" pitchFamily="34" charset="-122"/>
+                <a:cs typeface="SimSun" pitchFamily="34" charset="-120"/>
               </a:rPr>
               <a:t>单人完成  |  Python + ECharts  |  Claude Code 协作开发</a:t>
             </a:r>
@@ -2543,9 +2543,9 @@
                 <a:solidFill>
                   <a:srgbClr val="1A3C5E"/>
                 </a:solidFill>
-                <a:latin typeface="Microsoft YaHei" pitchFamily="34" charset="0"/>
-                <a:ea typeface="Microsoft YaHei" pitchFamily="34" charset="-122"/>
-                <a:cs typeface="Microsoft YaHei" pitchFamily="34" charset="-120"/>
+                <a:latin typeface="SimHei" pitchFamily="34" charset="0"/>
+                <a:ea typeface="SimHei" pitchFamily="34" charset="-122"/>
+                <a:cs typeface="SimHei" pitchFamily="34" charset="-120"/>
               </a:rPr>
               <a:t>发现五：统计检验 — 显著性验证</a:t>
             </a:r>
@@ -2666,9 +2666,9 @@
                 <a:solidFill>
                   <a:srgbClr val="1E293B"/>
                 </a:solidFill>
-                <a:latin typeface="Microsoft YaHei" pitchFamily="34" charset="0"/>
-                <a:ea typeface="Microsoft YaHei" pitchFamily="34" charset="-122"/>
-                <a:cs typeface="Microsoft YaHei" pitchFamily="34" charset="-120"/>
+                <a:latin typeface="SimHei" pitchFamily="34" charset="0"/>
+                <a:ea typeface="SimHei" pitchFamily="34" charset="-122"/>
+                <a:cs typeface="SimHei" pitchFamily="34" charset="-120"/>
               </a:rPr>
               <a:t>依赖度 vs 自给率: r = -0.9749</a:t>
             </a:r>
@@ -2705,9 +2705,9 @@
                 <a:solidFill>
                   <a:srgbClr val="64748B"/>
                 </a:solidFill>
-                <a:latin typeface="Microsoft YaHei" pitchFamily="34" charset="0"/>
-                <a:ea typeface="Microsoft YaHei" pitchFamily="34" charset="-122"/>
-                <a:cs typeface="Microsoft YaHei" pitchFamily="34" charset="-120"/>
+                <a:latin typeface="SimSun" pitchFamily="34" charset="0"/>
+                <a:ea typeface="SimSun" pitchFamily="34" charset="-122"/>
+                <a:cs typeface="SimSun" pitchFamily="34" charset="-120"/>
               </a:rPr>
               <a:t>近乎完全负相关</a:t>
             </a:r>
@@ -2784,9 +2784,9 @@
                 <a:solidFill>
                   <a:srgbClr val="1E293B"/>
                 </a:solidFill>
-                <a:latin typeface="Microsoft YaHei" pitchFamily="34" charset="0"/>
-                <a:ea typeface="Microsoft YaHei" pitchFamily="34" charset="-122"/>
-                <a:cs typeface="Microsoft YaHei" pitchFamily="34" charset="-120"/>
+                <a:latin typeface="SimHei" pitchFamily="34" charset="0"/>
+                <a:ea typeface="SimHei" pitchFamily="34" charset="-122"/>
+                <a:cs typeface="SimHei" pitchFamily="34" charset="-120"/>
               </a:rPr>
               <a:t>依赖度 vs 人均GDP: r = -0.7751</a:t>
             </a:r>
@@ -2823,9 +2823,9 @@
                 <a:solidFill>
                   <a:srgbClr val="64748B"/>
                 </a:solidFill>
-                <a:latin typeface="Microsoft YaHei" pitchFamily="34" charset="0"/>
-                <a:ea typeface="Microsoft YaHei" pitchFamily="34" charset="-122"/>
-                <a:cs typeface="Microsoft YaHei" pitchFamily="34" charset="-120"/>
+                <a:latin typeface="SimSun" pitchFamily="34" charset="0"/>
+                <a:ea typeface="SimSun" pitchFamily="34" charset="-122"/>
+                <a:cs typeface="SimSun" pitchFamily="34" charset="-120"/>
               </a:rPr>
               <a:t>强负相关</a:t>
             </a:r>
@@ -2902,9 +2902,9 @@
                 <a:solidFill>
                   <a:srgbClr val="1E293B"/>
                 </a:solidFill>
-                <a:latin typeface="Microsoft YaHei" pitchFamily="34" charset="0"/>
-                <a:ea typeface="Microsoft YaHei" pitchFamily="34" charset="-122"/>
-                <a:cs typeface="Microsoft YaHei" pitchFamily="34" charset="-120"/>
+                <a:latin typeface="SimHei" pitchFamily="34" charset="0"/>
+                <a:ea typeface="SimHei" pitchFamily="34" charset="-122"/>
+                <a:cs typeface="SimHei" pitchFamily="34" charset="-120"/>
               </a:rPr>
               <a:t>ρ = -0.8129, p &lt; 0.001</a:t>
             </a:r>
@@ -2941,9 +2941,9 @@
                 <a:solidFill>
                   <a:srgbClr val="64748B"/>
                 </a:solidFill>
-                <a:latin typeface="Microsoft YaHei" pitchFamily="34" charset="0"/>
-                <a:ea typeface="Microsoft YaHei" pitchFamily="34" charset="-122"/>
-                <a:cs typeface="Microsoft YaHei" pitchFamily="34" charset="-120"/>
+                <a:latin typeface="SimSun" pitchFamily="34" charset="0"/>
+                <a:ea typeface="SimSun" pitchFamily="34" charset="-122"/>
+                <a:cs typeface="SimSun" pitchFamily="34" charset="-120"/>
               </a:rPr>
               <a:t>单调关系极显著</a:t>
             </a:r>
@@ -3020,9 +3020,9 @@
                 <a:solidFill>
                   <a:srgbClr val="1E293B"/>
                 </a:solidFill>
-                <a:latin typeface="Microsoft YaHei" pitchFamily="34" charset="0"/>
-                <a:ea typeface="Microsoft YaHei" pitchFamily="34" charset="-122"/>
-                <a:cs typeface="Microsoft YaHei" pitchFamily="34" charset="-120"/>
+                <a:latin typeface="SimHei" pitchFamily="34" charset="0"/>
+                <a:ea typeface="SimHei" pitchFamily="34" charset="-122"/>
+                <a:cs typeface="SimHei" pitchFamily="34" charset="-120"/>
               </a:rPr>
               <a:t>F = 62.10, p &lt; 0.001</a:t>
             </a:r>
@@ -3059,9 +3059,9 @@
                 <a:solidFill>
                   <a:srgbClr val="64748B"/>
                 </a:solidFill>
-                <a:latin typeface="Microsoft YaHei" pitchFamily="34" charset="0"/>
-                <a:ea typeface="Microsoft YaHei" pitchFamily="34" charset="-122"/>
-                <a:cs typeface="Microsoft YaHei" pitchFamily="34" charset="-120"/>
+                <a:latin typeface="SimSun" pitchFamily="34" charset="0"/>
+                <a:ea typeface="SimSun" pitchFamily="34" charset="-122"/>
+                <a:cs typeface="SimSun" pitchFamily="34" charset="-120"/>
               </a:rPr>
               <a:t>三类省份差异极显著</a:t>
             </a:r>
@@ -3138,9 +3138,9 @@
                 <a:solidFill>
                   <a:srgbClr val="1E293B"/>
                 </a:solidFill>
-                <a:latin typeface="Microsoft YaHei" pitchFamily="34" charset="0"/>
-                <a:ea typeface="Microsoft YaHei" pitchFamily="34" charset="-122"/>
-                <a:cs typeface="Microsoft YaHei" pitchFamily="34" charset="-120"/>
+                <a:latin typeface="SimHei" pitchFamily="34" charset="0"/>
+                <a:ea typeface="SimHei" pitchFamily="34" charset="-122"/>
+                <a:cs typeface="SimHei" pitchFamily="34" charset="-120"/>
               </a:rPr>
               <a:t>高/中/低 两两比较 p &lt; 0.001</a:t>
             </a:r>
@@ -3177,9 +3177,9 @@
                 <a:solidFill>
                   <a:srgbClr val="64748B"/>
                 </a:solidFill>
-                <a:latin typeface="Microsoft YaHei" pitchFamily="34" charset="0"/>
-                <a:ea typeface="Microsoft YaHei" pitchFamily="34" charset="-122"/>
-                <a:cs typeface="Microsoft YaHei" pitchFamily="34" charset="-120"/>
+                <a:latin typeface="SimSun" pitchFamily="34" charset="0"/>
+                <a:ea typeface="SimSun" pitchFamily="34" charset="-122"/>
+                <a:cs typeface="SimSun" pitchFamily="34" charset="-120"/>
               </a:rPr>
               <a:t>Bonferroni校正全部显著</a:t>
             </a:r>
@@ -3268,9 +3268,9 @@
                 <a:solidFill>
                   <a:srgbClr val="FFFFFF"/>
                 </a:solidFill>
-                <a:latin typeface="Microsoft YaHei" pitchFamily="34" charset="0"/>
-                <a:ea typeface="Microsoft YaHei" pitchFamily="34" charset="-122"/>
-                <a:cs typeface="Microsoft YaHei" pitchFamily="34" charset="-120"/>
+                <a:latin typeface="SimHei" pitchFamily="34" charset="0"/>
+                <a:ea typeface="SimHei" pitchFamily="34" charset="-122"/>
+                <a:cs typeface="SimHei" pitchFamily="34" charset="-120"/>
               </a:rPr>
               <a:t>第三部分：回归分析 — 因果识别</a:t>
             </a:r>
@@ -3339,9 +3339,9 @@
                 <a:solidFill>
                   <a:srgbClr val="1A3C5E"/>
                 </a:solidFill>
-                <a:latin typeface="Microsoft YaHei" pitchFamily="34" charset="0"/>
-                <a:ea typeface="Microsoft YaHei" pitchFamily="34" charset="-122"/>
-                <a:cs typeface="Microsoft YaHei" pitchFamily="34" charset="-120"/>
+                <a:latin typeface="SimHei" pitchFamily="34" charset="0"/>
+                <a:ea typeface="SimHei" pitchFamily="34" charset="-122"/>
+                <a:cs typeface="SimHei" pitchFamily="34" charset="-120"/>
               </a:rPr>
               <a:t>发现六：面板固定效应回归</a:t>
             </a:r>
@@ -3442,9 +3442,9 @@
                 <a:solidFill>
                   <a:srgbClr val="FFFFFF"/>
                 </a:solidFill>
-                <a:latin typeface="Microsoft YaHei" pitchFamily="34" charset="0"/>
-                <a:ea typeface="Microsoft YaHei" pitchFamily="34" charset="-122"/>
-                <a:cs typeface="Microsoft YaHei" pitchFamily="34" charset="-120"/>
+                <a:latin typeface="SimHei" pitchFamily="34" charset="0"/>
+                <a:ea typeface="SimHei" pitchFamily="34" charset="-122"/>
+                <a:cs typeface="SimHei" pitchFamily="34" charset="-120"/>
               </a:rPr>
               <a:t>ln(人均GDP)系数显著负向 · ln(人口)系数显著正向 · 控制省份FE和时间FE</a:t>
             </a:r>
@@ -3513,9 +3513,9 @@
                 <a:solidFill>
                   <a:srgbClr val="1A3C5E"/>
                 </a:solidFill>
-                <a:latin typeface="Microsoft YaHei" pitchFamily="34" charset="0"/>
-                <a:ea typeface="Microsoft YaHei" pitchFamily="34" charset="-122"/>
-                <a:cs typeface="Microsoft YaHei" pitchFamily="34" charset="-120"/>
+                <a:latin typeface="SimHei" pitchFamily="34" charset="0"/>
+                <a:ea typeface="SimHei" pitchFamily="34" charset="-122"/>
+                <a:cs typeface="SimHei" pitchFamily="34" charset="-120"/>
               </a:rPr>
               <a:t>发现七：分位数回归 — 异质性分析</a:t>
             </a:r>
@@ -3616,9 +3616,9 @@
                 <a:solidFill>
                   <a:srgbClr val="FFFFFF"/>
                 </a:solidFill>
-                <a:latin typeface="Microsoft YaHei" pitchFamily="34" charset="0"/>
-                <a:ea typeface="Microsoft YaHei" pitchFamily="34" charset="-122"/>
-                <a:cs typeface="Microsoft YaHei" pitchFamily="34" charset="-120"/>
+                <a:latin typeface="SimHei" pitchFamily="34" charset="0"/>
+                <a:ea typeface="SimHei" pitchFamily="34" charset="-122"/>
+                <a:cs typeface="SimHei" pitchFamily="34" charset="-120"/>
               </a:rPr>
               <a:t>低依赖分位点：GDP效应更强 · 高依赖分位点：人口效应更显著</a:t>
             </a:r>
@@ -3707,9 +3707,9 @@
                 <a:solidFill>
                   <a:srgbClr val="FFFFFF"/>
                 </a:solidFill>
-                <a:latin typeface="Microsoft YaHei" pitchFamily="34" charset="0"/>
-                <a:ea typeface="Microsoft YaHei" pitchFamily="34" charset="-122"/>
-                <a:cs typeface="Microsoft YaHei" pitchFamily="34" charset="-120"/>
+                <a:latin typeface="SimHei" pitchFamily="34" charset="0"/>
+                <a:ea typeface="SimHei" pitchFamily="34" charset="-122"/>
+                <a:cs typeface="SimHei" pitchFamily="34" charset="-120"/>
               </a:rPr>
               <a:t>第四部分：空间计量分析</a:t>
             </a:r>
@@ -3778,9 +3778,9 @@
                 <a:solidFill>
                   <a:srgbClr val="1A3C5E"/>
                 </a:solidFill>
-                <a:latin typeface="Microsoft YaHei" pitchFamily="34" charset="0"/>
-                <a:ea typeface="Microsoft YaHei" pitchFamily="34" charset="-122"/>
-                <a:cs typeface="Microsoft YaHei" pitchFamily="34" charset="-120"/>
+                <a:latin typeface="SimHei" pitchFamily="34" charset="0"/>
+                <a:ea typeface="SimHei" pitchFamily="34" charset="-122"/>
+                <a:cs typeface="SimHei" pitchFamily="34" charset="-120"/>
               </a:rPr>
               <a:t>发现八：空间聚集特征 — Moran's I检验</a:t>
             </a:r>
@@ -3881,9 +3881,9 @@
                 <a:solidFill>
                   <a:srgbClr val="FFFFFF"/>
                 </a:solidFill>
-                <a:latin typeface="Microsoft YaHei" pitchFamily="34" charset="0"/>
-                <a:ea typeface="Microsoft YaHei" pitchFamily="34" charset="-122"/>
-                <a:cs typeface="Microsoft YaHei" pitchFamily="34" charset="-120"/>
+                <a:latin typeface="SimHei" pitchFamily="34" charset="0"/>
+                <a:ea typeface="SimHei" pitchFamily="34" charset="-122"/>
+                <a:cs typeface="SimHei" pitchFamily="34" charset="-120"/>
               </a:rPr>
               <a:t>Moran's I = 0.42（p &lt; 0.001）· 高依赖省份呈现空间集群特征</a:t>
             </a:r>
@@ -3952,9 +3952,9 @@
                 <a:solidFill>
                   <a:srgbClr val="1A3C5E"/>
                 </a:solidFill>
-                <a:latin typeface="Microsoft YaHei" pitchFamily="34" charset="0"/>
-                <a:ea typeface="Microsoft YaHei" pitchFamily="34" charset="-122"/>
-                <a:cs typeface="Microsoft YaHei" pitchFamily="34" charset="-120"/>
+                <a:latin typeface="SimHei" pitchFamily="34" charset="0"/>
+                <a:ea typeface="SimHei" pitchFamily="34" charset="-122"/>
+                <a:cs typeface="SimHei" pitchFamily="34" charset="-120"/>
               </a:rPr>
               <a:t>结论与政策启示</a:t>
             </a:r>
@@ -4031,9 +4031,9 @@
                 <a:solidFill>
                   <a:srgbClr val="FFFFFF"/>
                 </a:solidFill>
-                <a:latin typeface="Microsoft YaHei" pitchFamily="34" charset="0"/>
-                <a:ea typeface="Microsoft YaHei" pitchFamily="34" charset="-122"/>
-                <a:cs typeface="Microsoft YaHei" pitchFamily="34" charset="-120"/>
+                <a:latin typeface="SimHei" pitchFamily="34" charset="0"/>
+                <a:ea typeface="SimHei" pitchFamily="34" charset="-122"/>
+                <a:cs typeface="SimHei" pitchFamily="34" charset="-120"/>
               </a:rPr>
               <a:t>六项核心发现</a:t>
             </a:r>
@@ -4070,9 +4070,9 @@
                 <a:solidFill>
                   <a:srgbClr val="1E293B"/>
                 </a:solidFill>
-                <a:latin typeface="Microsoft YaHei" pitchFamily="34" charset="0"/>
-                <a:ea typeface="Microsoft YaHei" pitchFamily="34" charset="-122"/>
-                <a:cs typeface="Microsoft YaHei" pitchFamily="34" charset="-120"/>
+                <a:latin typeface="SimSun" pitchFamily="34" charset="0"/>
+                <a:ea typeface="SimSun" pitchFamily="34" charset="-122"/>
+                <a:cs typeface="SimSun" pitchFamily="34" charset="-120"/>
               </a:rPr>
               <a:t>① 均等化方向正确：低自给率省份人均转移支付是高自给率的5.4倍</a:t>
             </a:r>
@@ -4109,9 +4109,9 @@
                 <a:solidFill>
                   <a:srgbClr val="1E293B"/>
                 </a:solidFill>
-                <a:latin typeface="Microsoft YaHei" pitchFamily="34" charset="0"/>
-                <a:ea typeface="Microsoft YaHei" pitchFamily="34" charset="-122"/>
-                <a:cs typeface="Microsoft YaHei" pitchFamily="34" charset="-120"/>
+                <a:latin typeface="SimSun" pitchFamily="34" charset="0"/>
+                <a:ea typeface="SimSun" pitchFamily="34" charset="-122"/>
+                <a:cs typeface="SimSun" pitchFamily="34" charset="-120"/>
               </a:rPr>
               <a:t>② 地区差距依然严峻：人均GDP京/甘相差4倍，转移支付托底但无法根本改变</a:t>
             </a:r>
@@ -4148,9 +4148,9 @@
                 <a:solidFill>
                   <a:srgbClr val="1E293B"/>
                 </a:solidFill>
-                <a:latin typeface="Microsoft YaHei" pitchFamily="34" charset="0"/>
-                <a:ea typeface="Microsoft YaHei" pitchFamily="34" charset="-122"/>
-                <a:cs typeface="Microsoft YaHei" pitchFamily="34" charset="-120"/>
+                <a:latin typeface="SimSun" pitchFamily="34" charset="0"/>
+                <a:ea typeface="SimSun" pitchFamily="34" charset="-122"/>
+                <a:cs typeface="SimSun" pitchFamily="34" charset="-120"/>
               </a:rPr>
               <a:t>③ 整体依赖加深：全国平均依赖度从37%升至47%</a:t>
             </a:r>
@@ -4187,9 +4187,9 @@
                 <a:solidFill>
                   <a:srgbClr val="1E293B"/>
                 </a:solidFill>
-                <a:latin typeface="Microsoft YaHei" pitchFamily="34" charset="0"/>
-                <a:ea typeface="Microsoft YaHei" pitchFamily="34" charset="-122"/>
-                <a:cs typeface="Microsoft YaHei" pitchFamily="34" charset="-120"/>
+                <a:latin typeface="SimSun" pitchFamily="34" charset="0"/>
+                <a:ea typeface="SimSun" pitchFamily="34" charset="-122"/>
+                <a:cs typeface="SimSun" pitchFamily="34" charset="-120"/>
               </a:rPr>
               <a:t>④ 三类划分有效：ANOVA F=62.10，组间差异极显著</a:t>
             </a:r>
@@ -4226,9 +4226,9 @@
                 <a:solidFill>
                   <a:srgbClr val="1E293B"/>
                 </a:solidFill>
-                <a:latin typeface="Microsoft YaHei" pitchFamily="34" charset="0"/>
-                <a:ea typeface="Microsoft YaHei" pitchFamily="34" charset="-122"/>
-                <a:cs typeface="Microsoft YaHei" pitchFamily="34" charset="-120"/>
+                <a:latin typeface="SimSun" pitchFamily="34" charset="0"/>
+                <a:ea typeface="SimSun" pitchFamily="34" charset="-122"/>
+                <a:cs typeface="SimSun" pitchFamily="34" charset="-120"/>
               </a:rPr>
               <a:t>⑤ 面板回归证实：ln(人均GDP)显著负向，经济越发达依赖度越低</a:t>
             </a:r>
@@ -4265,9 +4265,9 @@
                 <a:solidFill>
                   <a:srgbClr val="1E293B"/>
                 </a:solidFill>
-                <a:latin typeface="Microsoft YaHei" pitchFamily="34" charset="0"/>
-                <a:ea typeface="Microsoft YaHei" pitchFamily="34" charset="-122"/>
-                <a:cs typeface="Microsoft YaHei" pitchFamily="34" charset="-120"/>
+                <a:latin typeface="SimSun" pitchFamily="34" charset="0"/>
+                <a:ea typeface="SimSun" pitchFamily="34" charset="-122"/>
+                <a:cs typeface="SimSun" pitchFamily="34" charset="-120"/>
               </a:rPr>
               <a:t>⑥ 空间聚集显著：Moran's I=0.42***，高依赖省份呈现空间集群特征</a:t>
             </a:r>
@@ -4324,9 +4324,9 @@
                 <a:solidFill>
                   <a:srgbClr val="FFFFFF"/>
                 </a:solidFill>
-                <a:latin typeface="Microsoft YaHei" pitchFamily="34" charset="0"/>
-                <a:ea typeface="Microsoft YaHei" pitchFamily="34" charset="-122"/>
-                <a:cs typeface="Microsoft YaHei" pitchFamily="34" charset="-120"/>
+                <a:latin typeface="SimHei" pitchFamily="34" charset="0"/>
+                <a:ea typeface="SimHei" pitchFamily="34" charset="-122"/>
+                <a:cs typeface="SimHei" pitchFamily="34" charset="-120"/>
               </a:rPr>
               <a:t>政策启示</a:t>
             </a:r>
@@ -4363,9 +4363,9 @@
                 <a:solidFill>
                   <a:srgbClr val="1E293B"/>
                 </a:solidFill>
-                <a:latin typeface="Microsoft YaHei" pitchFamily="34" charset="0"/>
-                <a:ea typeface="Microsoft YaHei" pitchFamily="34" charset="-122"/>
-                <a:cs typeface="Microsoft YaHei" pitchFamily="34" charset="-120"/>
+                <a:latin typeface="SimSun" pitchFamily="34" charset="0"/>
+                <a:ea typeface="SimSun" pitchFamily="34" charset="-122"/>
+                <a:cs typeface="SimSun" pitchFamily="34" charset="-120"/>
               </a:rPr>
               <a:t>① 优化转移支付结构：一般性向低自给率倾斜，专项引入绩效竞争</a:t>
             </a:r>
@@ -4402,9 +4402,9 @@
                 <a:solidFill>
                   <a:srgbClr val="1E293B"/>
                 </a:solidFill>
-                <a:latin typeface="Microsoft YaHei" pitchFamily="34" charset="0"/>
-                <a:ea typeface="Microsoft YaHei" pitchFamily="34" charset="-122"/>
-                <a:cs typeface="Microsoft YaHei" pitchFamily="34" charset="-120"/>
+                <a:latin typeface="SimSun" pitchFamily="34" charset="0"/>
+                <a:ea typeface="SimSun" pitchFamily="34" charset="-122"/>
+                <a:cs typeface="SimSun" pitchFamily="34" charset="-120"/>
               </a:rPr>
               <a:t>② 推动地方税源建设：培育地方主体税种，增强自主造血能力</a:t>
             </a:r>
@@ -4441,9 +4441,9 @@
                 <a:solidFill>
                   <a:srgbClr val="1E293B"/>
                 </a:solidFill>
-                <a:latin typeface="Microsoft YaHei" pitchFamily="34" charset="0"/>
-                <a:ea typeface="Microsoft YaHei" pitchFamily="34" charset="-122"/>
-                <a:cs typeface="Microsoft YaHei" pitchFamily="34" charset="-120"/>
+                <a:latin typeface="SimSun" pitchFamily="34" charset="0"/>
+                <a:ea typeface="SimSun" pitchFamily="34" charset="-122"/>
+                <a:cs typeface="SimSun" pitchFamily="34" charset="-120"/>
               </a:rPr>
               <a:t>③ 建立动态监测体系：面板数据年度跟踪，差异化帮扶</a:t>
             </a:r>
@@ -4480,9 +4480,9 @@
                 <a:solidFill>
                   <a:srgbClr val="1E293B"/>
                 </a:solidFill>
-                <a:latin typeface="Microsoft YaHei" pitchFamily="34" charset="0"/>
-                <a:ea typeface="Microsoft YaHei" pitchFamily="34" charset="-122"/>
-                <a:cs typeface="Microsoft YaHei" pitchFamily="34" charset="-120"/>
+                <a:latin typeface="SimSun" pitchFamily="34" charset="0"/>
+                <a:ea typeface="SimSun" pitchFamily="34" charset="-122"/>
+                <a:cs typeface="SimSun" pitchFamily="34" charset="-120"/>
               </a:rPr>
               <a:t>④ 考虑空间溢出效应：高依赖集群区域需协同政策支持</a:t>
             </a:r>
@@ -4519,9 +4519,9 @@
                 <a:solidFill>
                   <a:srgbClr val="1E293B"/>
                 </a:solidFill>
-                <a:latin typeface="Microsoft YaHei" pitchFamily="34" charset="0"/>
-                <a:ea typeface="Microsoft YaHei" pitchFamily="34" charset="-122"/>
-                <a:cs typeface="Microsoft YaHei" pitchFamily="34" charset="-120"/>
+                <a:latin typeface="SimSun" pitchFamily="34" charset="0"/>
+                <a:ea typeface="SimSun" pitchFamily="34" charset="-122"/>
+                <a:cs typeface="SimSun" pitchFamily="34" charset="-120"/>
               </a:rPr>
               <a:t>⑤ 完善分配公式：纳入人均GDP、人口、公共服务成本差异</a:t>
             </a:r>
@@ -4558,9 +4558,9 @@
                 <a:solidFill>
                   <a:srgbClr val="1E293B"/>
                 </a:solidFill>
-                <a:latin typeface="Microsoft YaHei" pitchFamily="34" charset="0"/>
-                <a:ea typeface="Microsoft YaHei" pitchFamily="34" charset="-122"/>
-                <a:cs typeface="Microsoft YaHei" pitchFamily="34" charset="-120"/>
+                <a:latin typeface="SimSun" pitchFamily="34" charset="0"/>
+                <a:ea typeface="SimSun" pitchFamily="34" charset="-122"/>
+                <a:cs typeface="SimSun" pitchFamily="34" charset="-120"/>
               </a:rPr>
               <a:t>⑥ 加强绩效评价：结果与资金分配挂钩，确保资金使用效率</a:t>
             </a:r>
@@ -4629,9 +4629,9 @@
                 <a:solidFill>
                   <a:srgbClr val="1A3C5E"/>
                 </a:solidFill>
-                <a:latin typeface="Microsoft YaHei" pitchFamily="34" charset="0"/>
-                <a:ea typeface="Microsoft YaHei" pitchFamily="34" charset="-122"/>
-                <a:cs typeface="Microsoft YaHei" pitchFamily="34" charset="-120"/>
+                <a:latin typeface="SimHei" pitchFamily="34" charset="0"/>
+                <a:ea typeface="SimHei" pitchFamily="34" charset="-122"/>
+                <a:cs typeface="SimHei" pitchFamily="34" charset="-120"/>
               </a:rPr>
               <a:t>方法论反思：AI辅助开发的实践启示</a:t>
             </a:r>
@@ -4708,9 +4708,9 @@
                 <a:solidFill>
                   <a:srgbClr val="1A3C5E"/>
                 </a:solidFill>
-                <a:latin typeface="Microsoft YaHei" pitchFamily="34" charset="0"/>
-                <a:ea typeface="Microsoft YaHei" pitchFamily="34" charset="-122"/>
-                <a:cs typeface="Microsoft YaHei" pitchFamily="34" charset="-120"/>
+                <a:latin typeface="SimHei" pitchFamily="34" charset="0"/>
+                <a:ea typeface="SimHei" pitchFamily="34" charset="-122"/>
+                <a:cs typeface="SimHei" pitchFamily="34" charset="-120"/>
               </a:rPr>
               <a:t>80+ 条</a:t>
             </a:r>
@@ -4747,9 +4747,9 @@
                 <a:solidFill>
                   <a:srgbClr val="64748B"/>
                 </a:solidFill>
-                <a:latin typeface="Microsoft YaHei" pitchFamily="34" charset="0"/>
-                <a:ea typeface="Microsoft YaHei" pitchFamily="34" charset="-122"/>
-                <a:cs typeface="Microsoft YaHei" pitchFamily="34" charset="-120"/>
+                <a:latin typeface="SimSun" pitchFamily="34" charset="0"/>
+                <a:ea typeface="SimSun" pitchFamily="34" charset="-122"/>
+                <a:cs typeface="SimSun" pitchFamily="34" charset="-120"/>
               </a:rPr>
               <a:t>累计指令/反馈</a:t>
             </a:r>
@@ -4806,9 +4806,9 @@
                 <a:solidFill>
                   <a:srgbClr val="2E75B6"/>
                 </a:solidFill>
-                <a:latin typeface="Microsoft YaHei" pitchFamily="34" charset="0"/>
-                <a:ea typeface="Microsoft YaHei" pitchFamily="34" charset="-122"/>
-                <a:cs typeface="Microsoft YaHei" pitchFamily="34" charset="-120"/>
+                <a:latin typeface="SimHei" pitchFamily="34" charset="0"/>
+                <a:ea typeface="SimHei" pitchFamily="34" charset="-122"/>
+                <a:cs typeface="SimHei" pitchFamily="34" charset="-120"/>
               </a:rPr>
               <a:t>~1000行</a:t>
             </a:r>
@@ -4845,9 +4845,9 @@
                 <a:solidFill>
                   <a:srgbClr val="64748B"/>
                 </a:solidFill>
-                <a:latin typeface="Microsoft YaHei" pitchFamily="34" charset="0"/>
-                <a:ea typeface="Microsoft YaHei" pitchFamily="34" charset="-122"/>
-                <a:cs typeface="Microsoft YaHei" pitchFamily="34" charset="-120"/>
+                <a:latin typeface="SimSun" pitchFamily="34" charset="0"/>
+                <a:ea typeface="SimSun" pitchFamily="34" charset="-122"/>
+                <a:cs typeface="SimSun" pitchFamily="34" charset="-120"/>
               </a:rPr>
               <a:t>Python代码</a:t>
             </a:r>
@@ -4904,9 +4904,9 @@
                 <a:solidFill>
                   <a:srgbClr val="27AE60"/>
                 </a:solidFill>
-                <a:latin typeface="Microsoft YaHei" pitchFamily="34" charset="0"/>
-                <a:ea typeface="Microsoft YaHei" pitchFamily="34" charset="-122"/>
-                <a:cs typeface="Microsoft YaHei" pitchFamily="34" charset="-120"/>
+                <a:latin typeface="SimHei" pitchFamily="34" charset="0"/>
+                <a:ea typeface="SimHei" pitchFamily="34" charset="-122"/>
+                <a:cs typeface="SimHei" pitchFamily="34" charset="-120"/>
               </a:rPr>
               <a:t>~4小时</a:t>
             </a:r>
@@ -4943,9 +4943,9 @@
                 <a:solidFill>
                   <a:srgbClr val="64748B"/>
                 </a:solidFill>
-                <a:latin typeface="Microsoft YaHei" pitchFamily="34" charset="0"/>
-                <a:ea typeface="Microsoft YaHei" pitchFamily="34" charset="-122"/>
-                <a:cs typeface="Microsoft YaHei" pitchFamily="34" charset="-120"/>
+                <a:latin typeface="SimSun" pitchFamily="34" charset="0"/>
+                <a:ea typeface="SimSun" pitchFamily="34" charset="-122"/>
+                <a:cs typeface="SimSun" pitchFamily="34" charset="-120"/>
               </a:rPr>
               <a:t>从0到交付</a:t>
             </a:r>
@@ -5038,9 +5038,9 @@
                 <a:solidFill>
                   <a:srgbClr val="1F4E79"/>
                 </a:solidFill>
-                <a:latin typeface="Microsoft YaHei" pitchFamily="34" charset="0"/>
-                <a:ea typeface="Microsoft YaHei" pitchFamily="34" charset="-122"/>
-                <a:cs typeface="Microsoft YaHei" pitchFamily="34" charset="-120"/>
+                <a:latin typeface="SimHei" pitchFamily="34" charset="0"/>
+                <a:ea typeface="SimHei" pitchFamily="34" charset="-122"/>
+                <a:cs typeface="SimHei" pitchFamily="34" charset="-120"/>
               </a:rPr>
               <a:t>AI降低技术门槛，人定义问题边界</a:t>
             </a:r>
@@ -5077,9 +5077,9 @@
                 <a:solidFill>
                   <a:srgbClr val="64748B"/>
                 </a:solidFill>
-                <a:latin typeface="Microsoft YaHei" pitchFamily="34" charset="0"/>
-                <a:ea typeface="Microsoft YaHei" pitchFamily="34" charset="-122"/>
-                <a:cs typeface="Microsoft YaHei" pitchFamily="34" charset="-120"/>
+                <a:latin typeface="SimSun" pitchFamily="34" charset="0"/>
+                <a:ea typeface="SimSun" pitchFamily="34" charset="-122"/>
+                <a:cs typeface="SimSun" pitchFamily="34" charset="-120"/>
               </a:rPr>
               <a:t>选题方向、指标体系、结论判断均由人拍板</a:t>
             </a:r>
@@ -5172,9 +5172,9 @@
                 <a:solidFill>
                   <a:srgbClr val="1F4E79"/>
                 </a:solidFill>
-                <a:latin typeface="Microsoft YaHei" pitchFamily="34" charset="0"/>
-                <a:ea typeface="Microsoft YaHei" pitchFamily="34" charset="-122"/>
-                <a:cs typeface="Microsoft YaHei" pitchFamily="34" charset="-120"/>
+                <a:latin typeface="SimHei" pitchFamily="34" charset="0"/>
+                <a:ea typeface="SimHei" pitchFamily="34" charset="-122"/>
+                <a:cs typeface="SimHei" pitchFamily="34" charset="-120"/>
               </a:rPr>
               <a:t>领域知识是不可替代的质量底线</a:t>
             </a:r>
@@ -5211,9 +5211,9 @@
                 <a:solidFill>
                   <a:srgbClr val="64748B"/>
                 </a:solidFill>
-                <a:latin typeface="Microsoft YaHei" pitchFamily="34" charset="0"/>
-                <a:ea typeface="Microsoft YaHei" pitchFamily="34" charset="-122"/>
-                <a:cs typeface="Microsoft YaHei" pitchFamily="34" charset="-120"/>
+                <a:latin typeface="SimSun" pitchFamily="34" charset="0"/>
+                <a:ea typeface="SimSun" pitchFamily="34" charset="-122"/>
+                <a:cs typeface="SimSun" pitchFamily="34" charset="-120"/>
               </a:rPr>
               <a:t>计划单列市跳过规则、决算滞后回退逻辑——人的判断是校准器</a:t>
             </a:r>
@@ -5306,9 +5306,9 @@
                 <a:solidFill>
                   <a:srgbClr val="1F4E79"/>
                 </a:solidFill>
-                <a:latin typeface="Microsoft YaHei" pitchFamily="34" charset="0"/>
-                <a:ea typeface="Microsoft YaHei" pitchFamily="34" charset="-122"/>
-                <a:cs typeface="Microsoft YaHei" pitchFamily="34" charset="-120"/>
+                <a:latin typeface="SimHei" pitchFamily="34" charset="0"/>
+                <a:ea typeface="SimHei" pitchFamily="34" charset="-122"/>
+                <a:cs typeface="SimHei" pitchFamily="34" charset="-120"/>
               </a:rPr>
               <a:t>迭代优于一次到位，兜底方案至关重要</a:t>
             </a:r>
@@ -5345,9 +5345,9 @@
                 <a:solidFill>
                   <a:srgbClr val="64748B"/>
                 </a:solidFill>
-                <a:latin typeface="Microsoft YaHei" pitchFamily="34" charset="0"/>
-                <a:ea typeface="Microsoft YaHei" pitchFamily="34" charset="-122"/>
-                <a:cs typeface="Microsoft YaHei" pitchFamily="34" charset="-120"/>
+                <a:latin typeface="SimSun" pitchFamily="34" charset="0"/>
+                <a:ea typeface="SimSun" pitchFamily="34" charset="-122"/>
+                <a:cs typeface="SimSun" pitchFamily="34" charset="-120"/>
               </a:rPr>
               <a:t>可视化模块5轮调试：Plotly→geopandas PNG</a:t>
             </a:r>
@@ -5440,9 +5440,9 @@
                 <a:solidFill>
                   <a:srgbClr val="1F4E79"/>
                 </a:solidFill>
-                <a:latin typeface="Microsoft YaHei" pitchFamily="34" charset="0"/>
-                <a:ea typeface="Microsoft YaHei" pitchFamily="34" charset="-122"/>
-                <a:cs typeface="Microsoft YaHei" pitchFamily="34" charset="-120"/>
+                <a:latin typeface="SimHei" pitchFamily="34" charset="0"/>
+                <a:ea typeface="SimHei" pitchFamily="34" charset="-122"/>
+                <a:cs typeface="SimHei" pitchFamily="34" charset="-120"/>
               </a:rPr>
               <a:t>计算思维的核心是问题分解与验证</a:t>
             </a:r>
@@ -5479,9 +5479,9 @@
                 <a:solidFill>
                   <a:srgbClr val="64748B"/>
                 </a:solidFill>
-                <a:latin typeface="Microsoft YaHei" pitchFamily="34" charset="0"/>
-                <a:ea typeface="Microsoft YaHei" pitchFamily="34" charset="-122"/>
-                <a:cs typeface="Microsoft YaHei" pitchFamily="34" charset="-120"/>
+                <a:latin typeface="SimSun" pitchFamily="34" charset="0"/>
+                <a:ea typeface="SimSun" pitchFamily="34" charset="-122"/>
+                <a:cs typeface="SimSun" pitchFamily="34" charset="-120"/>
               </a:rPr>
               <a:t>分解→协作→验证的循环才是课程核心收获</a:t>
             </a:r>
@@ -5538,9 +5538,9 @@
                 <a:solidFill>
                   <a:srgbClr val="1F4E79"/>
                 </a:solidFill>
-                <a:latin typeface="Microsoft YaHei" pitchFamily="34" charset="0"/>
-                <a:ea typeface="Microsoft YaHei" pitchFamily="34" charset="-122"/>
-                <a:cs typeface="Microsoft YaHei" pitchFamily="34" charset="-120"/>
+                <a:latin typeface="SimHei" pitchFamily="34" charset="0"/>
+                <a:ea typeface="SimHei" pitchFamily="34" charset="-122"/>
+                <a:cs typeface="SimHei" pitchFamily="34" charset="-120"/>
               </a:rPr>
               <a:t>核心启示：AI降低了技术门槛，但问题定义权、数据理解力、结论判断力——因为AI的存在反而更加重要</a:t>
             </a:r>
@@ -5609,9 +5609,9 @@
                 <a:solidFill>
                   <a:srgbClr val="1A3C5E"/>
                 </a:solidFill>
-                <a:latin typeface="Microsoft YaHei" pitchFamily="34" charset="0"/>
-                <a:ea typeface="Microsoft YaHei" pitchFamily="34" charset="-122"/>
-                <a:cs typeface="Microsoft YaHei" pitchFamily="34" charset="-120"/>
+                <a:latin typeface="SimHei" pitchFamily="34" charset="0"/>
+                <a:ea typeface="SimHei" pitchFamily="34" charset="-122"/>
+                <a:cs typeface="SimHei" pitchFamily="34" charset="-120"/>
               </a:rPr>
               <a:t>问题提出：中央转移支付的分配效果</a:t>
             </a:r>
@@ -5688,9 +5688,9 @@
                 <a:solidFill>
                   <a:srgbClr val="1A3C5E"/>
                 </a:solidFill>
-                <a:latin typeface="Microsoft YaHei" pitchFamily="34" charset="0"/>
-                <a:ea typeface="Microsoft YaHei" pitchFamily="34" charset="-122"/>
-                <a:cs typeface="Microsoft YaHei" pitchFamily="34" charset="-120"/>
+                <a:latin typeface="SimHei" pitchFamily="34" charset="0"/>
+                <a:ea typeface="SimHei" pitchFamily="34" charset="-122"/>
+                <a:cs typeface="SimHei" pitchFamily="34" charset="-120"/>
               </a:rPr>
               <a:t>约10万亿</a:t>
             </a:r>
@@ -5727,9 +5727,9 @@
                 <a:solidFill>
                   <a:srgbClr val="64748B"/>
                 </a:solidFill>
-                <a:latin typeface="Microsoft YaHei" pitchFamily="34" charset="0"/>
-                <a:ea typeface="Microsoft YaHei" pitchFamily="34" charset="-122"/>
-                <a:cs typeface="Microsoft YaHei" pitchFamily="34" charset="-120"/>
+                <a:latin typeface="SimSun" pitchFamily="34" charset="0"/>
+                <a:ea typeface="SimSun" pitchFamily="34" charset="-122"/>
+                <a:cs typeface="SimSun" pitchFamily="34" charset="-120"/>
               </a:rPr>
               <a:t>2024年转移支付总额</a:t>
             </a:r>
@@ -5786,9 +5786,9 @@
                 <a:solidFill>
                   <a:srgbClr val="C0392B"/>
                 </a:solidFill>
-                <a:latin typeface="Microsoft YaHei" pitchFamily="34" charset="0"/>
-                <a:ea typeface="Microsoft YaHei" pitchFamily="34" charset="-122"/>
-                <a:cs typeface="Microsoft YaHei" pitchFamily="34" charset="-120"/>
+                <a:latin typeface="SimHei" pitchFamily="34" charset="0"/>
+                <a:ea typeface="SimHei" pitchFamily="34" charset="-122"/>
+                <a:cs typeface="SimHei" pitchFamily="34" charset="-120"/>
               </a:rPr>
               <a:t>约47%</a:t>
             </a:r>
@@ -5825,9 +5825,9 @@
                 <a:solidFill>
                   <a:srgbClr val="64748B"/>
                 </a:solidFill>
-                <a:latin typeface="Microsoft YaHei" pitchFamily="34" charset="0"/>
-                <a:ea typeface="Microsoft YaHei" pitchFamily="34" charset="-122"/>
-                <a:cs typeface="Microsoft YaHei" pitchFamily="34" charset="-120"/>
+                <a:latin typeface="SimSun" pitchFamily="34" charset="0"/>
+                <a:ea typeface="SimSun" pitchFamily="34" charset="-122"/>
+                <a:cs typeface="SimSun" pitchFamily="34" charset="-120"/>
               </a:rPr>
               <a:t>占地方财政支出比重</a:t>
             </a:r>
@@ -5884,9 +5884,9 @@
                 <a:solidFill>
                   <a:srgbClr val="2E75B6"/>
                 </a:solidFill>
-                <a:latin typeface="Microsoft YaHei" pitchFamily="34" charset="0"/>
-                <a:ea typeface="Microsoft YaHei" pitchFamily="34" charset="-122"/>
-                <a:cs typeface="Microsoft YaHei" pitchFamily="34" charset="-120"/>
+                <a:latin typeface="SimHei" pitchFamily="34" charset="0"/>
+                <a:ea typeface="SimHei" pitchFamily="34" charset="-122"/>
+                <a:cs typeface="SimHei" pitchFamily="34" charset="-120"/>
               </a:rPr>
               <a:t>31省 × 7年</a:t>
             </a:r>
@@ -5923,9 +5923,9 @@
                 <a:solidFill>
                   <a:srgbClr val="64748B"/>
                 </a:solidFill>
-                <a:latin typeface="Microsoft YaHei" pitchFamily="34" charset="0"/>
-                <a:ea typeface="Microsoft YaHei" pitchFamily="34" charset="-122"/>
-                <a:cs typeface="Microsoft YaHei" pitchFamily="34" charset="-120"/>
+                <a:latin typeface="SimSun" pitchFamily="34" charset="0"/>
+                <a:ea typeface="SimSun" pitchFamily="34" charset="-122"/>
+                <a:cs typeface="SimSun" pitchFamily="34" charset="-120"/>
               </a:rPr>
               <a:t>面板数据规模</a:t>
             </a:r>
@@ -5962,9 +5962,9 @@
                 <a:solidFill>
                   <a:srgbClr val="1E293B"/>
                 </a:solidFill>
-                <a:latin typeface="Microsoft YaHei" pitchFamily="34" charset="0"/>
-                <a:ea typeface="Microsoft YaHei" pitchFamily="34" charset="-122"/>
-                <a:cs typeface="Microsoft YaHei" pitchFamily="34" charset="-120"/>
+                <a:latin typeface="SimHei" pitchFamily="34" charset="0"/>
+                <a:ea typeface="SimHei" pitchFamily="34" charset="-122"/>
+                <a:cs typeface="SimHei" pitchFamily="34" charset="-120"/>
               </a:rPr>
               <a:t>核心研究问题</a:t>
             </a:r>
@@ -6002,9 +6002,9 @@
                 <a:solidFill>
                   <a:srgbClr val="1E293B"/>
                 </a:solidFill>
-                <a:latin typeface="Microsoft YaHei" pitchFamily="34" charset="0"/>
-                <a:ea typeface="Microsoft YaHei" pitchFamily="34" charset="-122"/>
-                <a:cs typeface="Microsoft YaHei" pitchFamily="34" charset="-120"/>
+                <a:latin typeface="SimSun" pitchFamily="34" charset="0"/>
+                <a:ea typeface="SimSun" pitchFamily="34" charset="-122"/>
+                <a:cs typeface="SimSun" pitchFamily="34" charset="-120"/>
               </a:rPr>
               <a:t>1. 中央转移支付是否有效缩小了地区间财力差距？</a:t>
             </a:r>
@@ -6020,9 +6020,9 @@
                 <a:solidFill>
                   <a:srgbClr val="1E293B"/>
                 </a:solidFill>
-                <a:latin typeface="Microsoft YaHei" pitchFamily="34" charset="0"/>
-                <a:ea typeface="Microsoft YaHei" pitchFamily="34" charset="-122"/>
-                <a:cs typeface="Microsoft YaHei" pitchFamily="34" charset="-120"/>
+                <a:latin typeface="SimSun" pitchFamily="34" charset="0"/>
+                <a:ea typeface="SimSun" pitchFamily="34" charset="-122"/>
+                <a:cs typeface="SimSun" pitchFamily="34" charset="-120"/>
               </a:rPr>
               <a:t>2. 哪些省份对中央转移支付的依赖程度最高？背后的经济与财政因素是什么？</a:t>
             </a:r>
@@ -6038,9 +6038,9 @@
                 <a:solidFill>
                   <a:srgbClr val="1E293B"/>
                 </a:solidFill>
-                <a:latin typeface="Microsoft YaHei" pitchFamily="34" charset="0"/>
-                <a:ea typeface="Microsoft YaHei" pitchFamily="34" charset="-122"/>
-                <a:cs typeface="Microsoft YaHei" pitchFamily="34" charset="-120"/>
+                <a:latin typeface="SimSun" pitchFamily="34" charset="0"/>
+                <a:ea typeface="SimSun" pitchFamily="34" charset="-122"/>
+                <a:cs typeface="SimSun" pitchFamily="34" charset="-120"/>
               </a:rPr>
               <a:t>3. 转移支付的分配是否与经济发展水平、人口结构等指标匹配？</a:t>
             </a:r>
@@ -6097,9 +6097,9 @@
                 <a:solidFill>
                   <a:srgbClr val="1F4E79"/>
                 </a:solidFill>
-                <a:latin typeface="Microsoft YaHei" pitchFamily="34" charset="0"/>
-                <a:ea typeface="Microsoft YaHei" pitchFamily="34" charset="-122"/>
-                <a:cs typeface="Microsoft YaHei" pitchFamily="34" charset="-120"/>
+                <a:latin typeface="SimSun" pitchFamily="34" charset="0"/>
+                <a:ea typeface="SimSun" pitchFamily="34" charset="-122"/>
+                <a:cs typeface="SimSun" pitchFamily="34" charset="-120"/>
               </a:rPr>
               <a:t>AI协作：从8个候选选题中评估匹配度，结合政府管理专业背景推荐转移支付方向</a:t>
             </a:r>
@@ -6168,9 +6168,9 @@
                 <a:solidFill>
                   <a:srgbClr val="1A3C5E"/>
                 </a:solidFill>
-                <a:latin typeface="Microsoft YaHei" pitchFamily="34" charset="0"/>
-                <a:ea typeface="Microsoft YaHei" pitchFamily="34" charset="-122"/>
-                <a:cs typeface="Microsoft YaHei" pitchFamily="34" charset="-120"/>
+                <a:latin typeface="SimHei" pitchFamily="34" charset="0"/>
+                <a:ea typeface="SimHei" pitchFamily="34" charset="-122"/>
+                <a:cs typeface="SimHei" pitchFamily="34" charset="-120"/>
               </a:rPr>
               <a:t>数据来源与分析框架</a:t>
             </a:r>
@@ -6227,9 +6227,9 @@
                 <a:solidFill>
                   <a:srgbClr val="1A3C5E"/>
                 </a:solidFill>
-                <a:latin typeface="Microsoft YaHei" pitchFamily="34" charset="0"/>
-                <a:ea typeface="Microsoft YaHei" pitchFamily="34" charset="-122"/>
-                <a:cs typeface="Microsoft YaHei" pitchFamily="34" charset="-120"/>
+                <a:latin typeface="SimHei" pitchFamily="34" charset="0"/>
+                <a:ea typeface="SimHei" pitchFamily="34" charset="-122"/>
+                <a:cs typeface="SimHei" pitchFamily="34" charset="-120"/>
               </a:rPr>
               <a:t>数据来源</a:t>
             </a:r>
@@ -6286,9 +6286,9 @@
                 <a:solidFill>
                   <a:srgbClr val="1F4E79"/>
                 </a:solidFill>
-                <a:latin typeface="Microsoft YaHei" pitchFamily="34" charset="0"/>
-                <a:ea typeface="Microsoft YaHei" pitchFamily="34" charset="-122"/>
-                <a:cs typeface="Microsoft YaHei" pitchFamily="34" charset="-120"/>
+                <a:latin typeface="SimHei" pitchFamily="34" charset="0"/>
+                <a:ea typeface="SimHei" pitchFamily="34" charset="-122"/>
+                <a:cs typeface="SimHei" pitchFamily="34" charset="-120"/>
               </a:rPr>
               <a:t>国家统计局</a:t>
             </a:r>
@@ -6325,9 +6325,9 @@
                 <a:solidFill>
                   <a:srgbClr val="64748B"/>
                 </a:solidFill>
-                <a:latin typeface="Microsoft YaHei" pitchFamily="34" charset="0"/>
-                <a:ea typeface="Microsoft YaHei" pitchFamily="34" charset="-122"/>
-                <a:cs typeface="Microsoft YaHei" pitchFamily="34" charset="-120"/>
+                <a:latin typeface="SimSun" pitchFamily="34" charset="0"/>
+                <a:ea typeface="SimSun" pitchFamily="34" charset="-122"/>
+                <a:cs typeface="SimSun" pitchFamily="34" charset="-120"/>
               </a:rPr>
               <a:t>GDP、常住人口</a:t>
             </a:r>
@@ -6384,9 +6384,9 @@
                 <a:solidFill>
                   <a:srgbClr val="1F4E79"/>
                 </a:solidFill>
-                <a:latin typeface="Microsoft YaHei" pitchFamily="34" charset="0"/>
-                <a:ea typeface="Microsoft YaHei" pitchFamily="34" charset="-122"/>
-                <a:cs typeface="Microsoft YaHei" pitchFamily="34" charset="-120"/>
+                <a:latin typeface="SimHei" pitchFamily="34" charset="0"/>
+                <a:ea typeface="SimHei" pitchFamily="34" charset="-122"/>
+                <a:cs typeface="SimHei" pitchFamily="34" charset="-120"/>
               </a:rPr>
               <a:t>财政部</a:t>
             </a:r>
@@ -6423,9 +6423,9 @@
                 <a:solidFill>
                   <a:srgbClr val="64748B"/>
                 </a:solidFill>
-                <a:latin typeface="Microsoft YaHei" pitchFamily="34" charset="0"/>
-                <a:ea typeface="Microsoft YaHei" pitchFamily="34" charset="-122"/>
-                <a:cs typeface="Microsoft YaHei" pitchFamily="34" charset="-120"/>
+                <a:latin typeface="SimSun" pitchFamily="34" charset="0"/>
+                <a:ea typeface="SimSun" pitchFamily="34" charset="-122"/>
+                <a:cs typeface="SimSun" pitchFamily="34" charset="-120"/>
               </a:rPr>
               <a:t>财政收入、财政支出</a:t>
             </a:r>
@@ -6482,9 +6482,9 @@
                 <a:solidFill>
                   <a:srgbClr val="1F4E79"/>
                 </a:solidFill>
-                <a:latin typeface="Microsoft YaHei" pitchFamily="34" charset="0"/>
-                <a:ea typeface="Microsoft YaHei" pitchFamily="34" charset="-122"/>
-                <a:cs typeface="Microsoft YaHei" pitchFamily="34" charset="-120"/>
+                <a:latin typeface="SimHei" pitchFamily="34" charset="0"/>
+                <a:ea typeface="SimHei" pitchFamily="34" charset="-122"/>
+                <a:cs typeface="SimHei" pitchFamily="34" charset="-120"/>
               </a:rPr>
               <a:t>财政部预算司</a:t>
             </a:r>
@@ -6521,9 +6521,9 @@
                 <a:solidFill>
                   <a:srgbClr val="64748B"/>
                 </a:solidFill>
-                <a:latin typeface="Microsoft YaHei" pitchFamily="34" charset="0"/>
-                <a:ea typeface="Microsoft YaHei" pitchFamily="34" charset="-122"/>
-                <a:cs typeface="Microsoft YaHei" pitchFamily="34" charset="-120"/>
+                <a:latin typeface="SimSun" pitchFamily="34" charset="0"/>
+                <a:ea typeface="SimSun" pitchFamily="34" charset="-122"/>
+                <a:cs typeface="SimSun" pitchFamily="34" charset="-120"/>
               </a:rPr>
               <a:t>中央转移支付</a:t>
             </a:r>
@@ -6560,9 +6560,9 @@
                 <a:solidFill>
                   <a:srgbClr val="1A3C5E"/>
                 </a:solidFill>
-                <a:latin typeface="Microsoft YaHei" pitchFamily="34" charset="0"/>
-                <a:ea typeface="Microsoft YaHei" pitchFamily="34" charset="-122"/>
-                <a:cs typeface="Microsoft YaHei" pitchFamily="34" charset="-120"/>
+                <a:latin typeface="SimHei" pitchFamily="34" charset="0"/>
+                <a:ea typeface="SimHei" pitchFamily="34" charset="-122"/>
+                <a:cs typeface="SimHei" pitchFamily="34" charset="-120"/>
               </a:rPr>
               <a:t>分析框架</a:t>
             </a:r>
@@ -6619,9 +6619,9 @@
                 <a:solidFill>
                   <a:srgbClr val="FFFFFF"/>
                 </a:solidFill>
-                <a:latin typeface="Microsoft YaHei" pitchFamily="34" charset="0"/>
-                <a:ea typeface="Microsoft YaHei" pitchFamily="34" charset="-122"/>
-                <a:cs typeface="Microsoft YaHei" pitchFamily="34" charset="-120"/>
+                <a:latin typeface="SimHei" pitchFamily="34" charset="0"/>
+                <a:ea typeface="SimHei" pitchFamily="34" charset="-122"/>
+                <a:cs typeface="SimHei" pitchFamily="34" charset="-120"/>
               </a:rPr>
               <a:t>①</a:t>
             </a:r>
@@ -6658,9 +6658,9 @@
                 <a:solidFill>
                   <a:srgbClr val="1E293B"/>
                 </a:solidFill>
-                <a:latin typeface="Microsoft YaHei" pitchFamily="34" charset="0"/>
-                <a:ea typeface="Microsoft YaHei" pitchFamily="34" charset="-122"/>
-                <a:cs typeface="Microsoft YaHei" pitchFamily="34" charset="-120"/>
+                <a:latin typeface="SimHei" pitchFamily="34" charset="0"/>
+                <a:ea typeface="SimHei" pitchFamily="34" charset="-122"/>
+                <a:cs typeface="SimHei" pitchFamily="34" charset="-120"/>
               </a:rPr>
               <a:t>描述性分析</a:t>
             </a:r>
@@ -6697,9 +6697,9 @@
                 <a:solidFill>
                   <a:srgbClr val="64748B"/>
                 </a:solidFill>
-                <a:latin typeface="Microsoft YaHei" pitchFamily="34" charset="0"/>
-                <a:ea typeface="Microsoft YaHei" pitchFamily="34" charset="-122"/>
-                <a:cs typeface="Microsoft YaHei" pitchFamily="34" charset="-120"/>
+                <a:latin typeface="SimSun" pitchFamily="34" charset="0"/>
+                <a:ea typeface="SimSun" pitchFamily="34" charset="-122"/>
+                <a:cs typeface="SimSun" pitchFamily="34" charset="-120"/>
               </a:rPr>
               <a:t>地区分布 + 时序演变</a:t>
             </a:r>
@@ -6756,9 +6756,9 @@
                 <a:solidFill>
                   <a:srgbClr val="FFFFFF"/>
                 </a:solidFill>
-                <a:latin typeface="Microsoft YaHei" pitchFamily="34" charset="0"/>
-                <a:ea typeface="Microsoft YaHei" pitchFamily="34" charset="-122"/>
-                <a:cs typeface="Microsoft YaHei" pitchFamily="34" charset="-120"/>
+                <a:latin typeface="SimHei" pitchFamily="34" charset="0"/>
+                <a:ea typeface="SimHei" pitchFamily="34" charset="-122"/>
+                <a:cs typeface="SimHei" pitchFamily="34" charset="-120"/>
               </a:rPr>
               <a:t>②</a:t>
             </a:r>
@@ -6795,9 +6795,9 @@
                 <a:solidFill>
                   <a:srgbClr val="1E293B"/>
                 </a:solidFill>
-                <a:latin typeface="Microsoft YaHei" pitchFamily="34" charset="0"/>
-                <a:ea typeface="Microsoft YaHei" pitchFamily="34" charset="-122"/>
-                <a:cs typeface="Microsoft YaHei" pitchFamily="34" charset="-120"/>
+                <a:latin typeface="SimHei" pitchFamily="34" charset="0"/>
+                <a:ea typeface="SimHei" pitchFamily="34" charset="-122"/>
+                <a:cs typeface="SimHei" pitchFamily="34" charset="-120"/>
               </a:rPr>
               <a:t>分组对比</a:t>
             </a:r>
@@ -6834,9 +6834,9 @@
                 <a:solidFill>
                   <a:srgbClr val="64748B"/>
                 </a:solidFill>
-                <a:latin typeface="Microsoft YaHei" pitchFamily="34" charset="0"/>
-                <a:ea typeface="Microsoft YaHei" pitchFamily="34" charset="-122"/>
-                <a:cs typeface="Microsoft YaHei" pitchFamily="34" charset="-120"/>
+                <a:latin typeface="SimSun" pitchFamily="34" charset="0"/>
+                <a:ea typeface="SimSun" pitchFamily="34" charset="-122"/>
+                <a:cs typeface="SimSun" pitchFamily="34" charset="-120"/>
               </a:rPr>
               <a:t>三类省份 + 统计检验</a:t>
             </a:r>
@@ -6893,9 +6893,9 @@
                 <a:solidFill>
                   <a:srgbClr val="FFFFFF"/>
                 </a:solidFill>
-                <a:latin typeface="Microsoft YaHei" pitchFamily="34" charset="0"/>
-                <a:ea typeface="Microsoft YaHei" pitchFamily="34" charset="-122"/>
-                <a:cs typeface="Microsoft YaHei" pitchFamily="34" charset="-120"/>
+                <a:latin typeface="SimHei" pitchFamily="34" charset="0"/>
+                <a:ea typeface="SimHei" pitchFamily="34" charset="-122"/>
+                <a:cs typeface="SimHei" pitchFamily="34" charset="-120"/>
               </a:rPr>
               <a:t>③</a:t>
             </a:r>
@@ -6932,9 +6932,9 @@
                 <a:solidFill>
                   <a:srgbClr val="1E293B"/>
                 </a:solidFill>
-                <a:latin typeface="Microsoft YaHei" pitchFamily="34" charset="0"/>
-                <a:ea typeface="Microsoft YaHei" pitchFamily="34" charset="-122"/>
-                <a:cs typeface="Microsoft YaHei" pitchFamily="34" charset="-120"/>
+                <a:latin typeface="SimHei" pitchFamily="34" charset="0"/>
+                <a:ea typeface="SimHei" pitchFamily="34" charset="-122"/>
+                <a:cs typeface="SimHei" pitchFamily="34" charset="-120"/>
               </a:rPr>
               <a:t>回归分析</a:t>
             </a:r>
@@ -6971,9 +6971,9 @@
                 <a:solidFill>
                   <a:srgbClr val="64748B"/>
                 </a:solidFill>
-                <a:latin typeface="Microsoft YaHei" pitchFamily="34" charset="0"/>
-                <a:ea typeface="Microsoft YaHei" pitchFamily="34" charset="-122"/>
-                <a:cs typeface="Microsoft YaHei" pitchFamily="34" charset="-120"/>
+                <a:latin typeface="SimSun" pitchFamily="34" charset="0"/>
+                <a:ea typeface="SimSun" pitchFamily="34" charset="-122"/>
+                <a:cs typeface="SimSun" pitchFamily="34" charset="-120"/>
               </a:rPr>
               <a:t>面板FE + 分位数回归</a:t>
             </a:r>
@@ -7030,9 +7030,9 @@
                 <a:solidFill>
                   <a:srgbClr val="FFFFFF"/>
                 </a:solidFill>
-                <a:latin typeface="Microsoft YaHei" pitchFamily="34" charset="0"/>
-                <a:ea typeface="Microsoft YaHei" pitchFamily="34" charset="-122"/>
-                <a:cs typeface="Microsoft YaHei" pitchFamily="34" charset="-120"/>
+                <a:latin typeface="SimHei" pitchFamily="34" charset="0"/>
+                <a:ea typeface="SimHei" pitchFamily="34" charset="-122"/>
+                <a:cs typeface="SimHei" pitchFamily="34" charset="-120"/>
               </a:rPr>
               <a:t>④</a:t>
             </a:r>
@@ -7069,9 +7069,9 @@
                 <a:solidFill>
                   <a:srgbClr val="1E293B"/>
                 </a:solidFill>
-                <a:latin typeface="Microsoft YaHei" pitchFamily="34" charset="0"/>
-                <a:ea typeface="Microsoft YaHei" pitchFamily="34" charset="-122"/>
-                <a:cs typeface="Microsoft YaHei" pitchFamily="34" charset="-120"/>
+                <a:latin typeface="SimHei" pitchFamily="34" charset="0"/>
+                <a:ea typeface="SimHei" pitchFamily="34" charset="-122"/>
+                <a:cs typeface="SimHei" pitchFamily="34" charset="-120"/>
               </a:rPr>
               <a:t>空间计量</a:t>
             </a:r>
@@ -7108,9 +7108,9 @@
                 <a:solidFill>
                   <a:srgbClr val="64748B"/>
                 </a:solidFill>
-                <a:latin typeface="Microsoft YaHei" pitchFamily="34" charset="0"/>
-                <a:ea typeface="Microsoft YaHei" pitchFamily="34" charset="-122"/>
-                <a:cs typeface="Microsoft YaHei" pitchFamily="34" charset="-120"/>
+                <a:latin typeface="SimSun" pitchFamily="34" charset="0"/>
+                <a:ea typeface="SimSun" pitchFamily="34" charset="-122"/>
+                <a:cs typeface="SimSun" pitchFamily="34" charset="-120"/>
               </a:rPr>
               <a:t>Moran's I 空间聚集</a:t>
             </a:r>
@@ -7167,9 +7167,9 @@
                 <a:solidFill>
                   <a:srgbClr val="1F4E79"/>
                 </a:solidFill>
-                <a:latin typeface="Microsoft YaHei" pitchFamily="34" charset="0"/>
-                <a:ea typeface="Microsoft YaHei" pitchFamily="34" charset="-122"/>
-                <a:cs typeface="Microsoft YaHei" pitchFamily="34" charset="-120"/>
+                <a:latin typeface="SimSun" pitchFamily="34" charset="0"/>
+                <a:ea typeface="SimSun" pitchFamily="34" charset="-122"/>
+                <a:cs typeface="SimSun" pitchFamily="34" charset="-120"/>
               </a:rPr>
               <a:t>AI协作：输出指标体系设计 + 四阶段流水线架构（采集→处理→可视化→报告）</a:t>
             </a:r>
@@ -7258,9 +7258,9 @@
                 <a:solidFill>
                   <a:srgbClr val="FFFFFF"/>
                 </a:solidFill>
-                <a:latin typeface="Microsoft YaHei" pitchFamily="34" charset="0"/>
-                <a:ea typeface="Microsoft YaHei" pitchFamily="34" charset="-122"/>
-                <a:cs typeface="Microsoft YaHei" pitchFamily="34" charset="-120"/>
+                <a:latin typeface="SimHei" pitchFamily="34" charset="0"/>
+                <a:ea typeface="SimHei" pitchFamily="34" charset="-122"/>
+                <a:cs typeface="SimHei" pitchFamily="34" charset="-120"/>
               </a:rPr>
               <a:t>第一部分：描述性分析</a:t>
             </a:r>
@@ -7329,9 +7329,9 @@
                 <a:solidFill>
                   <a:srgbClr val="1A3C5E"/>
                 </a:solidFill>
-                <a:latin typeface="Microsoft YaHei" pitchFamily="34" charset="0"/>
-                <a:ea typeface="Microsoft YaHei" pitchFamily="34" charset="-122"/>
-                <a:cs typeface="Microsoft YaHei" pitchFamily="34" charset="-120"/>
+                <a:latin typeface="SimHei" pitchFamily="34" charset="0"/>
+                <a:ea typeface="SimHei" pitchFamily="34" charset="-122"/>
+                <a:cs typeface="SimHei" pitchFamily="34" charset="-120"/>
               </a:rPr>
               <a:t>发现一：转移支付依赖度的空间格局</a:t>
             </a:r>
@@ -7456,9 +7456,9 @@
                 <a:solidFill>
                   <a:srgbClr val="FFFFFF"/>
                 </a:solidFill>
-                <a:latin typeface="Microsoft YaHei" pitchFamily="34" charset="0"/>
-                <a:ea typeface="Microsoft YaHei" pitchFamily="34" charset="-122"/>
-                <a:cs typeface="Microsoft YaHei" pitchFamily="34" charset="-120"/>
+                <a:latin typeface="SimHei" pitchFamily="34" charset="0"/>
+                <a:ea typeface="SimHei" pitchFamily="34" charset="-122"/>
+                <a:cs typeface="SimHei" pitchFamily="34" charset="-120"/>
               </a:rPr>
               <a:t>西藏依赖度 88.0%  vs  上海 9.6%  ·  极差 78.4 个百分点</a:t>
             </a:r>
@@ -7515,9 +7515,9 @@
                 <a:solidFill>
                   <a:srgbClr val="FFFFFF"/>
                 </a:solidFill>
-                <a:latin typeface="Microsoft YaHei" pitchFamily="34" charset="0"/>
-                <a:ea typeface="Microsoft YaHei" pitchFamily="34" charset="-122"/>
-                <a:cs typeface="Microsoft YaHei" pitchFamily="34" charset="-120"/>
+                <a:latin typeface="SimHei" pitchFamily="34" charset="0"/>
+                <a:ea typeface="SimHei" pitchFamily="34" charset="-122"/>
+                <a:cs typeface="SimHei" pitchFamily="34" charset="-120"/>
               </a:rPr>
               <a:t>整体呈东低西高格局  ·  高依赖省份集中在西部</a:t>
             </a:r>
@@ -7586,9 +7586,9 @@
                 <a:solidFill>
                   <a:srgbClr val="1A3C5E"/>
                 </a:solidFill>
-                <a:latin typeface="Microsoft YaHei" pitchFamily="34" charset="0"/>
-                <a:ea typeface="Microsoft YaHei" pitchFamily="34" charset="-122"/>
-                <a:cs typeface="Microsoft YaHei" pitchFamily="34" charset="-120"/>
+                <a:latin typeface="SimHei" pitchFamily="34" charset="0"/>
+                <a:ea typeface="SimHei" pitchFamily="34" charset="-122"/>
+                <a:cs typeface="SimHei" pitchFamily="34" charset="-120"/>
               </a:rPr>
               <a:t>发现二：全国趋势与依赖度时序演变</a:t>
             </a:r>
@@ -7713,9 +7713,9 @@
                 <a:solidFill>
                   <a:srgbClr val="FFFFFF"/>
                 </a:solidFill>
-                <a:latin typeface="Microsoft YaHei" pitchFamily="34" charset="0"/>
-                <a:ea typeface="Microsoft YaHei" pitchFamily="34" charset="-122"/>
-                <a:cs typeface="Microsoft YaHei" pitchFamily="34" charset="-120"/>
+                <a:latin typeface="SimSun" pitchFamily="34" charset="0"/>
+                <a:ea typeface="SimSun" pitchFamily="34" charset="-122"/>
+                <a:cs typeface="SimSun" pitchFamily="34" charset="-120"/>
               </a:rPr>
               <a:t>全国平均依赖度从37%升至47%，转移支付总额从6万亿增至10万亿</a:t>
             </a:r>
@@ -7772,9 +7772,9 @@
                 <a:solidFill>
                   <a:srgbClr val="FFFFFF"/>
                 </a:solidFill>
-                <a:latin typeface="Microsoft YaHei" pitchFamily="34" charset="0"/>
-                <a:ea typeface="Microsoft YaHei" pitchFamily="34" charset="-122"/>
-                <a:cs typeface="Microsoft YaHei" pitchFamily="34" charset="-120"/>
+                <a:latin typeface="SimSun" pitchFamily="34" charset="0"/>
+                <a:ea typeface="SimSun" pitchFamily="34" charset="-122"/>
+                <a:cs typeface="SimSun" pitchFamily="34" charset="-120"/>
               </a:rPr>
               <a:t>依赖度分布整体右移，中位数上升约10个百分点</a:t>
             </a:r>
@@ -7863,9 +7863,9 @@
                 <a:solidFill>
                   <a:srgbClr val="FFFFFF"/>
                 </a:solidFill>
-                <a:latin typeface="Microsoft YaHei" pitchFamily="34" charset="0"/>
-                <a:ea typeface="Microsoft YaHei" pitchFamily="34" charset="-122"/>
-                <a:cs typeface="Microsoft YaHei" pitchFamily="34" charset="-120"/>
+                <a:latin typeface="SimHei" pitchFamily="34" charset="0"/>
+                <a:ea typeface="SimHei" pitchFamily="34" charset="-122"/>
+                <a:cs typeface="SimHei" pitchFamily="34" charset="-120"/>
               </a:rPr>
               <a:t>第二部分：分组对比与统计检验</a:t>
             </a:r>
@@ -7934,9 +7934,9 @@
                 <a:solidFill>
                   <a:srgbClr val="1A3C5E"/>
                 </a:solidFill>
-                <a:latin typeface="Microsoft YaHei" pitchFamily="34" charset="0"/>
-                <a:ea typeface="Microsoft YaHei" pitchFamily="34" charset="-122"/>
-                <a:cs typeface="Microsoft YaHei" pitchFamily="34" charset="-120"/>
+                <a:latin typeface="SimHei" pitchFamily="34" charset="0"/>
+                <a:ea typeface="SimHei" pitchFamily="34" charset="-122"/>
+                <a:cs typeface="SimHei" pitchFamily="34" charset="-120"/>
               </a:rPr>
               <a:t>发现三：三类财政自给率省份的关键差异</a:t>
             </a:r>
@@ -8033,9 +8033,9 @@
                 <a:solidFill>
                   <a:srgbClr val="27AE60"/>
                 </a:solidFill>
-                <a:latin typeface="Microsoft YaHei" pitchFamily="34" charset="0"/>
-                <a:ea typeface="Microsoft YaHei" pitchFamily="34" charset="-122"/>
-                <a:cs typeface="Microsoft YaHei" pitchFamily="34" charset="-120"/>
+                <a:latin typeface="SimHei" pitchFamily="34" charset="0"/>
+                <a:ea typeface="SimHei" pitchFamily="34" charset="-122"/>
+                <a:cs typeface="SimHei" pitchFamily="34" charset="-120"/>
               </a:rPr>
               <a:t>高自给率 ≥60%</a:t>
             </a:r>
@@ -8072,9 +8072,9 @@
                 <a:solidFill>
                   <a:srgbClr val="1E293B"/>
                 </a:solidFill>
-                <a:latin typeface="Microsoft YaHei" pitchFamily="34" charset="0"/>
-                <a:ea typeface="Microsoft YaHei" pitchFamily="34" charset="-122"/>
-                <a:cs typeface="Microsoft YaHei" pitchFamily="34" charset="-120"/>
+                <a:latin typeface="SimHei" pitchFamily="34" charset="0"/>
+                <a:ea typeface="SimHei" pitchFamily="34" charset="-122"/>
+                <a:cs typeface="SimHei" pitchFamily="34" charset="-120"/>
               </a:rPr>
               <a:t>5省</a:t>
             </a:r>
@@ -8114,9 +8114,9 @@
                 <a:solidFill>
                   <a:srgbClr val="1E293B"/>
                 </a:solidFill>
-                <a:latin typeface="Microsoft YaHei" pitchFamily="34" charset="0"/>
-                <a:ea typeface="Microsoft YaHei" pitchFamily="34" charset="-122"/>
-                <a:cs typeface="Microsoft YaHei" pitchFamily="34" charset="-120"/>
+                <a:latin typeface="SimSun" pitchFamily="34" charset="0"/>
+                <a:ea typeface="SimSun" pitchFamily="34" charset="-122"/>
+                <a:cs typeface="SimSun" pitchFamily="34" charset="-120"/>
               </a:rPr>
               <a:t>依赖度: 13.9%</a:t>
             </a:r>
@@ -8134,9 +8134,9 @@
                 <a:solidFill>
                   <a:srgbClr val="1E293B"/>
                 </a:solidFill>
-                <a:latin typeface="Microsoft YaHei" pitchFamily="34" charset="0"/>
-                <a:ea typeface="Microsoft YaHei" pitchFamily="34" charset="-122"/>
-                <a:cs typeface="Microsoft YaHei" pitchFamily="34" charset="-120"/>
+                <a:latin typeface="SimSun" pitchFamily="34" charset="0"/>
+                <a:ea typeface="SimSun" pitchFamily="34" charset="-122"/>
+                <a:cs typeface="SimSun" pitchFamily="34" charset="-120"/>
               </a:rPr>
               <a:t>人均转移支付: 3,672元</a:t>
             </a:r>
@@ -8154,9 +8154,9 @@
                 <a:solidFill>
                   <a:srgbClr val="1E293B"/>
                 </a:solidFill>
-                <a:latin typeface="Microsoft YaHei" pitchFamily="34" charset="0"/>
-                <a:ea typeface="Microsoft YaHei" pitchFamily="34" charset="-122"/>
-                <a:cs typeface="Microsoft YaHei" pitchFamily="34" charset="-120"/>
+                <a:latin typeface="SimSun" pitchFamily="34" charset="0"/>
+                <a:ea typeface="SimSun" pitchFamily="34" charset="-122"/>
+                <a:cs typeface="SimSun" pitchFamily="34" charset="-120"/>
               </a:rPr>
               <a:t>人均GDP: 170,057元</a:t>
             </a:r>
@@ -8193,9 +8193,9 @@
                 <a:solidFill>
                   <a:srgbClr val="64748B"/>
                 </a:solidFill>
-                <a:latin typeface="Microsoft YaHei" pitchFamily="34" charset="0"/>
-                <a:ea typeface="Microsoft YaHei" pitchFamily="34" charset="-122"/>
-                <a:cs typeface="Microsoft YaHei" pitchFamily="34" charset="-120"/>
+                <a:latin typeface="SimSun" pitchFamily="34" charset="0"/>
+                <a:ea typeface="SimSun" pitchFamily="34" charset="-122"/>
+                <a:cs typeface="SimSun" pitchFamily="34" charset="-120"/>
               </a:rPr>
               <a:t>上海、北京、广东</a:t>
             </a:r>
@@ -8210,9 +8210,9 @@
                 <a:solidFill>
                   <a:srgbClr val="64748B"/>
                 </a:solidFill>
-                <a:latin typeface="Microsoft YaHei" pitchFamily="34" charset="0"/>
-                <a:ea typeface="Microsoft YaHei" pitchFamily="34" charset="-122"/>
-                <a:cs typeface="Microsoft YaHei" pitchFamily="34" charset="-120"/>
+                <a:latin typeface="SimSun" pitchFamily="34" charset="0"/>
+                <a:ea typeface="SimSun" pitchFamily="34" charset="-122"/>
+                <a:cs typeface="SimSun" pitchFamily="34" charset="-120"/>
               </a:rPr>
               <a:t>浙江、江苏</a:t>
             </a:r>
@@ -8289,9 +8289,9 @@
                 <a:solidFill>
                   <a:srgbClr val="E67E22"/>
                 </a:solidFill>
-                <a:latin typeface="Microsoft YaHei" pitchFamily="34" charset="0"/>
-                <a:ea typeface="Microsoft YaHei" pitchFamily="34" charset="-122"/>
-                <a:cs typeface="Microsoft YaHei" pitchFamily="34" charset="-120"/>
+                <a:latin typeface="SimHei" pitchFamily="34" charset="0"/>
+                <a:ea typeface="SimHei" pitchFamily="34" charset="-122"/>
+                <a:cs typeface="SimHei" pitchFamily="34" charset="-120"/>
               </a:rPr>
               <a:t>中自给率 35-60%</a:t>
             </a:r>
@@ -8328,9 +8328,9 @@
                 <a:solidFill>
                   <a:srgbClr val="1E293B"/>
                 </a:solidFill>
-                <a:latin typeface="Microsoft YaHei" pitchFamily="34" charset="0"/>
-                <a:ea typeface="Microsoft YaHei" pitchFamily="34" charset="-122"/>
-                <a:cs typeface="Microsoft YaHei" pitchFamily="34" charset="-120"/>
+                <a:latin typeface="SimHei" pitchFamily="34" charset="0"/>
+                <a:ea typeface="SimHei" pitchFamily="34" charset="-122"/>
+                <a:cs typeface="SimHei" pitchFamily="34" charset="-120"/>
               </a:rPr>
               <a:t>16省</a:t>
             </a:r>
@@ -8370,9 +8370,9 @@
                 <a:solidFill>
                   <a:srgbClr val="1E293B"/>
                 </a:solidFill>
-                <a:latin typeface="Microsoft YaHei" pitchFamily="34" charset="0"/>
-                <a:ea typeface="Microsoft YaHei" pitchFamily="34" charset="-122"/>
-                <a:cs typeface="Microsoft YaHei" pitchFamily="34" charset="-120"/>
+                <a:latin typeface="SimSun" pitchFamily="34" charset="0"/>
+                <a:ea typeface="SimSun" pitchFamily="34" charset="-122"/>
+                <a:cs typeface="SimSun" pitchFamily="34" charset="-120"/>
               </a:rPr>
               <a:t>依赖度: 44.2%</a:t>
             </a:r>
@@ -8390,9 +8390,9 @@
                 <a:solidFill>
                   <a:srgbClr val="1E293B"/>
                 </a:solidFill>
-                <a:latin typeface="Microsoft YaHei" pitchFamily="34" charset="0"/>
-                <a:ea typeface="Microsoft YaHei" pitchFamily="34" charset="-122"/>
-                <a:cs typeface="Microsoft YaHei" pitchFamily="34" charset="-120"/>
+                <a:latin typeface="SimSun" pitchFamily="34" charset="0"/>
+                <a:ea typeface="SimSun" pitchFamily="34" charset="-122"/>
+                <a:cs typeface="SimSun" pitchFamily="34" charset="-120"/>
               </a:rPr>
               <a:t>人均转移支付: 7,729元</a:t>
             </a:r>
@@ -8410,9 +8410,9 @@
                 <a:solidFill>
                   <a:srgbClr val="1E293B"/>
                 </a:solidFill>
-                <a:latin typeface="Microsoft YaHei" pitchFamily="34" charset="0"/>
-                <a:ea typeface="Microsoft YaHei" pitchFamily="34" charset="-122"/>
-                <a:cs typeface="Microsoft YaHei" pitchFamily="34" charset="-120"/>
+                <a:latin typeface="SimSun" pitchFamily="34" charset="0"/>
+                <a:ea typeface="SimSun" pitchFamily="34" charset="-122"/>
+                <a:cs typeface="SimSun" pitchFamily="34" charset="-120"/>
               </a:rPr>
               <a:t>人均GDP: 90,195元</a:t>
             </a:r>
@@ -8449,9 +8449,9 @@
                 <a:solidFill>
                   <a:srgbClr val="64748B"/>
                 </a:solidFill>
-                <a:latin typeface="Microsoft YaHei" pitchFamily="34" charset="0"/>
-                <a:ea typeface="Microsoft YaHei" pitchFamily="34" charset="-122"/>
-                <a:cs typeface="Microsoft YaHei" pitchFamily="34" charset="-120"/>
+                <a:latin typeface="SimSun" pitchFamily="34" charset="0"/>
+                <a:ea typeface="SimSun" pitchFamily="34" charset="-122"/>
+                <a:cs typeface="SimSun" pitchFamily="34" charset="-120"/>
               </a:rPr>
               <a:t>山东、福建、山西</a:t>
             </a:r>
@@ -8466,9 +8466,9 @@
                 <a:solidFill>
                   <a:srgbClr val="64748B"/>
                 </a:solidFill>
-                <a:latin typeface="Microsoft YaHei" pitchFamily="34" charset="0"/>
-                <a:ea typeface="Microsoft YaHei" pitchFamily="34" charset="-122"/>
-                <a:cs typeface="Microsoft YaHei" pitchFamily="34" charset="-120"/>
+                <a:latin typeface="SimSun" pitchFamily="34" charset="0"/>
+                <a:ea typeface="SimSun" pitchFamily="34" charset="-122"/>
+                <a:cs typeface="SimSun" pitchFamily="34" charset="-120"/>
               </a:rPr>
               <a:t>内蒙古、辽宁等</a:t>
             </a:r>
@@ -8545,9 +8545,9 @@
                 <a:solidFill>
                   <a:srgbClr val="C0392B"/>
                 </a:solidFill>
-                <a:latin typeface="Microsoft YaHei" pitchFamily="34" charset="0"/>
-                <a:ea typeface="Microsoft YaHei" pitchFamily="34" charset="-122"/>
-                <a:cs typeface="Microsoft YaHei" pitchFamily="34" charset="-120"/>
+                <a:latin typeface="SimHei" pitchFamily="34" charset="0"/>
+                <a:ea typeface="SimHei" pitchFamily="34" charset="-122"/>
+                <a:cs typeface="SimHei" pitchFamily="34" charset="-120"/>
               </a:rPr>
               <a:t>低自给率 &lt;35%</a:t>
             </a:r>
@@ -8584,9 +8584,9 @@
                 <a:solidFill>
                   <a:srgbClr val="1E293B"/>
                 </a:solidFill>
-                <a:latin typeface="Microsoft YaHei" pitchFamily="34" charset="0"/>
-                <a:ea typeface="Microsoft YaHei" pitchFamily="34" charset="-122"/>
-                <a:cs typeface="Microsoft YaHei" pitchFamily="34" charset="-120"/>
+                <a:latin typeface="SimHei" pitchFamily="34" charset="0"/>
+                <a:ea typeface="SimHei" pitchFamily="34" charset="-122"/>
+                <a:cs typeface="SimHei" pitchFamily="34" charset="-120"/>
               </a:rPr>
               <a:t>10省</a:t>
             </a:r>
@@ -8626,9 +8626,9 @@
                 <a:solidFill>
                   <a:srgbClr val="1E293B"/>
                 </a:solidFill>
-                <a:latin typeface="Microsoft YaHei" pitchFamily="34" charset="0"/>
-                <a:ea typeface="Microsoft YaHei" pitchFamily="34" charset="-122"/>
-                <a:cs typeface="Microsoft YaHei" pitchFamily="34" charset="-120"/>
+                <a:latin typeface="SimSun" pitchFamily="34" charset="0"/>
+                <a:ea typeface="SimSun" pitchFamily="34" charset="-122"/>
+                <a:cs typeface="SimSun" pitchFamily="34" charset="-120"/>
               </a:rPr>
               <a:t>依赖度: 68.0%</a:t>
             </a:r>
@@ -8646,9 +8646,9 @@
                 <a:solidFill>
                   <a:srgbClr val="1E293B"/>
                 </a:solidFill>
-                <a:latin typeface="Microsoft YaHei" pitchFamily="34" charset="0"/>
-                <a:ea typeface="Microsoft YaHei" pitchFamily="34" charset="-122"/>
-                <a:cs typeface="Microsoft YaHei" pitchFamily="34" charset="-120"/>
+                <a:latin typeface="SimSun" pitchFamily="34" charset="0"/>
+                <a:ea typeface="SimSun" pitchFamily="34" charset="-122"/>
+                <a:cs typeface="SimSun" pitchFamily="34" charset="-120"/>
               </a:rPr>
               <a:t>人均转移支付: 19,916元</a:t>
             </a:r>
@@ -8666,9 +8666,9 @@
                 <a:solidFill>
                   <a:srgbClr val="1E293B"/>
                 </a:solidFill>
-                <a:latin typeface="Microsoft YaHei" pitchFamily="34" charset="0"/>
-                <a:ea typeface="Microsoft YaHei" pitchFamily="34" charset="-122"/>
-                <a:cs typeface="Microsoft YaHei" pitchFamily="34" charset="-120"/>
+                <a:latin typeface="SimSun" pitchFamily="34" charset="0"/>
+                <a:ea typeface="SimSun" pitchFamily="34" charset="-122"/>
+                <a:cs typeface="SimSun" pitchFamily="34" charset="-120"/>
               </a:rPr>
               <a:t>人均GDP: 64,863元</a:t>
             </a:r>
@@ -8705,9 +8705,9 @@
                 <a:solidFill>
                   <a:srgbClr val="64748B"/>
                 </a:solidFill>
-                <a:latin typeface="Microsoft YaHei" pitchFamily="34" charset="0"/>
-                <a:ea typeface="Microsoft YaHei" pitchFamily="34" charset="-122"/>
-                <a:cs typeface="Microsoft YaHei" pitchFamily="34" charset="-120"/>
+                <a:latin typeface="SimSun" pitchFamily="34" charset="0"/>
+                <a:ea typeface="SimSun" pitchFamily="34" charset="-122"/>
+                <a:cs typeface="SimSun" pitchFamily="34" charset="-120"/>
               </a:rPr>
               <a:t>西藏、甘肃、青海</a:t>
             </a:r>
@@ -8722,9 +8722,9 @@
                 <a:solidFill>
                   <a:srgbClr val="64748B"/>
                 </a:solidFill>
-                <a:latin typeface="Microsoft YaHei" pitchFamily="34" charset="0"/>
-                <a:ea typeface="Microsoft YaHei" pitchFamily="34" charset="-122"/>
-                <a:cs typeface="Microsoft YaHei" pitchFamily="34" charset="-120"/>
+                <a:latin typeface="SimSun" pitchFamily="34" charset="0"/>
+                <a:ea typeface="SimSun" pitchFamily="34" charset="-122"/>
+                <a:cs typeface="SimSun" pitchFamily="34" charset="-120"/>
               </a:rPr>
               <a:t>宁夏、黑龙江等</a:t>
             </a:r>
@@ -8761,9 +8761,9 @@
                 <a:solidFill>
                   <a:srgbClr val="64748B"/>
                 </a:solidFill>
-                <a:latin typeface="Microsoft YaHei" pitchFamily="34" charset="0"/>
-                <a:ea typeface="Microsoft YaHei" pitchFamily="34" charset="-122"/>
-                <a:cs typeface="Microsoft YaHei" pitchFamily="34" charset="-120"/>
+                <a:latin typeface="SimSun" pitchFamily="34" charset="0"/>
+                <a:ea typeface="SimSun" pitchFamily="34" charset="-122"/>
+                <a:cs typeface="SimSun" pitchFamily="34" charset="-120"/>
               </a:rPr>
               <a:t>低自给率省份人均转移支付是高自给率的5.4倍 → 转移支付向财力薄弱地区倾斜</a:t>
             </a:r>
@@ -8832,9 +8832,9 @@
                 <a:solidFill>
                   <a:srgbClr val="1A3C5E"/>
                 </a:solidFill>
-                <a:latin typeface="Microsoft YaHei" pitchFamily="34" charset="0"/>
-                <a:ea typeface="Microsoft YaHei" pitchFamily="34" charset="-122"/>
-                <a:cs typeface="Microsoft YaHei" pitchFamily="34" charset="-120"/>
+                <a:latin typeface="SimHei" pitchFamily="34" charset="0"/>
+                <a:ea typeface="SimHei" pitchFamily="34" charset="-122"/>
+                <a:cs typeface="SimHei" pitchFamily="34" charset="-120"/>
               </a:rPr>
               <a:t>发现四：转移支付与经济发展水平的关系</a:t>
             </a:r>
@@ -8935,9 +8935,9 @@
                 <a:solidFill>
                   <a:srgbClr val="FFFFFF"/>
                 </a:solidFill>
-                <a:latin typeface="Microsoft YaHei" pitchFamily="34" charset="0"/>
-                <a:ea typeface="Microsoft YaHei" pitchFamily="34" charset="-122"/>
-                <a:cs typeface="Microsoft YaHei" pitchFamily="34" charset="-120"/>
+                <a:latin typeface="SimHei" pitchFamily="34" charset="0"/>
+                <a:ea typeface="SimHei" pitchFamily="34" charset="-122"/>
+                <a:cs typeface="SimHei" pitchFamily="34" charset="-120"/>
               </a:rPr>
               <a:t>依赖度与人均GDP强负相关：Pearson r = -0.78，Spearman ρ = -0.81（p &lt; 0.001）</a:t>
             </a:r>
